--- a/representative_complete_enterprise_solution.pptx
+++ b/representative_complete_enterprise_solution.pptx
@@ -356,418 +356,6 @@
 </p:sldLayout>
 </file>
 
-<file path=ppt/slideLayouts/slideLayout1.xml><?xml version="1.0" encoding="utf-8"?>
-<p:sldLayout xmlns:a="http://schemas.openxmlformats.org/drawingml/2006/main" xmlns:r="http://schemas.openxmlformats.org/officeDocument/2006/relationships" xmlns:p="http://schemas.openxmlformats.org/presentationml/2006/main" type="title" preserve="1">
-  <p:cSld name="Title Slide">
-    <p:spTree>
-      <p:nvGrpSpPr>
-        <p:cNvPr id="1" name=""/>
-        <p:cNvGrpSpPr/>
-        <p:nvPr/>
-      </p:nvGrpSpPr>
-      <p:grpSpPr>
-        <a:xfrm>
-          <a:off x="0" y="0"/>
-          <a:ext cx="0" cy="0"/>
-          <a:chOff x="0" y="0"/>
-          <a:chExt cx="0" cy="0"/>
-        </a:xfrm>
-      </p:grpSpPr>
-      <p:sp>
-        <p:nvSpPr>
-          <p:cNvPr id="2" name="Title 1"/>
-          <p:cNvSpPr>
-            <a:spLocks noGrp="1"/>
-          </p:cNvSpPr>
-          <p:nvPr>
-            <p:ph type="ctrTitle"/>
-          </p:nvPr>
-        </p:nvSpPr>
-        <p:spPr>
-          <a:xfrm>
-            <a:off x="685800" y="2130425"/>
-            <a:ext cx="7772400" cy="1470025"/>
-          </a:xfrm>
-        </p:spPr>
-        <p:txBody>
-          <a:bodyPr/>
-          <a:lstStyle/>
-          <a:p>
-            <a:r>
-              <a:rPr lang="en-US" smtClean="0"/>
-              <a:t>Click to edit Master title style</a:t>
-            </a:r>
-            <a:endParaRPr lang="en-US"/>
-          </a:p>
-        </p:txBody>
-      </p:sp>
-      <p:sp>
-        <p:nvSpPr>
-          <p:cNvPr id="3" name="Subtitle 2"/>
-          <p:cNvSpPr>
-            <a:spLocks noGrp="1"/>
-          </p:cNvSpPr>
-          <p:nvPr>
-            <p:ph type="subTitle" idx="1"/>
-          </p:nvPr>
-        </p:nvSpPr>
-        <p:spPr>
-          <a:xfrm>
-            <a:off x="1371600" y="3886200"/>
-            <a:ext cx="6400800" cy="1752600"/>
-          </a:xfrm>
-        </p:spPr>
-        <p:txBody>
-          <a:bodyPr/>
-          <a:lstStyle>
-            <a:lvl1pPr marL="0" indent="0" algn="ctr">
-              <a:buNone/>
-              <a:defRPr>
-                <a:solidFill>
-                  <a:schemeClr val="tx1">
-                    <a:tint val="75000"/>
-                  </a:schemeClr>
-                </a:solidFill>
-              </a:defRPr>
-            </a:lvl1pPr>
-            <a:lvl2pPr marL="457200" indent="0" algn="ctr">
-              <a:buNone/>
-              <a:defRPr>
-                <a:solidFill>
-                  <a:schemeClr val="tx1">
-                    <a:tint val="75000"/>
-                  </a:schemeClr>
-                </a:solidFill>
-              </a:defRPr>
-            </a:lvl2pPr>
-            <a:lvl3pPr marL="914400" indent="0" algn="ctr">
-              <a:buNone/>
-              <a:defRPr>
-                <a:solidFill>
-                  <a:schemeClr val="tx1">
-                    <a:tint val="75000"/>
-                  </a:schemeClr>
-                </a:solidFill>
-              </a:defRPr>
-            </a:lvl3pPr>
-            <a:lvl4pPr marL="1371600" indent="0" algn="ctr">
-              <a:buNone/>
-              <a:defRPr>
-                <a:solidFill>
-                  <a:schemeClr val="tx1">
-                    <a:tint val="75000"/>
-                  </a:schemeClr>
-                </a:solidFill>
-              </a:defRPr>
-            </a:lvl4pPr>
-            <a:lvl5pPr marL="1828800" indent="0" algn="ctr">
-              <a:buNone/>
-              <a:defRPr>
-                <a:solidFill>
-                  <a:schemeClr val="tx1">
-                    <a:tint val="75000"/>
-                  </a:schemeClr>
-                </a:solidFill>
-              </a:defRPr>
-            </a:lvl5pPr>
-            <a:lvl6pPr marL="2286000" indent="0" algn="ctr">
-              <a:buNone/>
-              <a:defRPr>
-                <a:solidFill>
-                  <a:schemeClr val="tx1">
-                    <a:tint val="75000"/>
-                  </a:schemeClr>
-                </a:solidFill>
-              </a:defRPr>
-            </a:lvl6pPr>
-            <a:lvl7pPr marL="2743200" indent="0" algn="ctr">
-              <a:buNone/>
-              <a:defRPr>
-                <a:solidFill>
-                  <a:schemeClr val="tx1">
-                    <a:tint val="75000"/>
-                  </a:schemeClr>
-                </a:solidFill>
-              </a:defRPr>
-            </a:lvl7pPr>
-            <a:lvl8pPr marL="3200400" indent="0" algn="ctr">
-              <a:buNone/>
-              <a:defRPr>
-                <a:solidFill>
-                  <a:schemeClr val="tx1">
-                    <a:tint val="75000"/>
-                  </a:schemeClr>
-                </a:solidFill>
-              </a:defRPr>
-            </a:lvl8pPr>
-            <a:lvl9pPr marL="3657600" indent="0" algn="ctr">
-              <a:buNone/>
-              <a:defRPr>
-                <a:solidFill>
-                  <a:schemeClr val="tx1">
-                    <a:tint val="75000"/>
-                  </a:schemeClr>
-                </a:solidFill>
-              </a:defRPr>
-            </a:lvl9pPr>
-          </a:lstStyle>
-          <a:p>
-            <a:r>
-              <a:rPr lang="en-US" smtClean="0"/>
-              <a:t>Click to edit Master subtitle style</a:t>
-            </a:r>
-            <a:endParaRPr lang="en-US"/>
-          </a:p>
-        </p:txBody>
-      </p:sp>
-      <p:sp>
-        <p:nvSpPr>
-          <p:cNvPr id="4" name="Date Placeholder 3"/>
-          <p:cNvSpPr>
-            <a:spLocks noGrp="1"/>
-          </p:cNvSpPr>
-          <p:nvPr>
-            <p:ph type="dt" sz="half" idx="10"/>
-          </p:nvPr>
-        </p:nvSpPr>
-        <p:spPr/>
-        <p:txBody>
-          <a:bodyPr/>
-          <a:lstStyle/>
-          <a:p>
-            <a:fld id="{5BCAD085-E8A6-8845-BD4E-CB4CCA059FC4}" type="datetimeFigureOut">
-              <a:rPr lang="en-US" smtClean="0"/>
-              <a:t>1/27/13</a:t>
-            </a:fld>
-            <a:endParaRPr lang="en-US"/>
-          </a:p>
-        </p:txBody>
-      </p:sp>
-      <p:sp>
-        <p:nvSpPr>
-          <p:cNvPr id="5" name="Footer Placeholder 4"/>
-          <p:cNvSpPr>
-            <a:spLocks noGrp="1"/>
-          </p:cNvSpPr>
-          <p:nvPr>
-            <p:ph type="ftr" sz="quarter" idx="11"/>
-          </p:nvPr>
-        </p:nvSpPr>
-        <p:spPr/>
-        <p:txBody>
-          <a:bodyPr/>
-          <a:lstStyle/>
-          <a:p>
-            <a:endParaRPr lang="en-US"/>
-          </a:p>
-        </p:txBody>
-      </p:sp>
-      <p:sp>
-        <p:nvSpPr>
-          <p:cNvPr id="6" name="Slide Number Placeholder 5"/>
-          <p:cNvSpPr>
-            <a:spLocks noGrp="1"/>
-          </p:cNvSpPr>
-          <p:nvPr>
-            <p:ph type="sldNum" sz="quarter" idx="12"/>
-          </p:nvPr>
-        </p:nvSpPr>
-        <p:spPr/>
-        <p:txBody>
-          <a:bodyPr/>
-          <a:lstStyle/>
-          <a:p>
-            <a:fld id="{C1FF6DA9-008F-8B48-92A6-B652298478BF}" type="slidenum">
-              <a:rPr lang="en-US" smtClean="0"/>
-              <a:t>‹#›</a:t>
-            </a:fld>
-            <a:endParaRPr lang="en-US"/>
-          </a:p>
-        </p:txBody>
-      </p:sp>
-    </p:spTree>
-    <p:extLst>
-      <p:ext uri="{BB962C8B-B14F-4D97-AF65-F5344CB8AC3E}">
-        <p14:creationId xmlns:p14="http://schemas.microsoft.com/office/powerpoint/2010/main" val="3168075583"/>
-      </p:ext>
-    </p:extLst>
-  </p:cSld>
-  <p:clrMapOvr>
-    <a:masterClrMapping/>
-  </p:clrMapOvr>
-</p:sldLayout>
-</file>
-
-<file path=ppt/slideLayouts/slideLayout10.xml><?xml version="1.0" encoding="utf-8"?>
-<p:sldLayout xmlns:a="http://schemas.openxmlformats.org/drawingml/2006/main" xmlns:r="http://schemas.openxmlformats.org/officeDocument/2006/relationships" xmlns:p="http://schemas.openxmlformats.org/presentationml/2006/main" type="vertTx" preserve="1">
-  <p:cSld name="Title and Vertical Text">
-    <p:spTree>
-      <p:nvGrpSpPr>
-        <p:cNvPr id="1" name=""/>
-        <p:cNvGrpSpPr/>
-        <p:nvPr/>
-      </p:nvGrpSpPr>
-      <p:grpSpPr>
-        <a:xfrm>
-          <a:off x="0" y="0"/>
-          <a:ext cx="0" cy="0"/>
-          <a:chOff x="0" y="0"/>
-          <a:chExt cx="0" cy="0"/>
-        </a:xfrm>
-      </p:grpSpPr>
-      <p:sp>
-        <p:nvSpPr>
-          <p:cNvPr id="2" name="Title 1"/>
-          <p:cNvSpPr>
-            <a:spLocks noGrp="1"/>
-          </p:cNvSpPr>
-          <p:nvPr>
-            <p:ph type="title"/>
-          </p:nvPr>
-        </p:nvSpPr>
-        <p:spPr/>
-        <p:txBody>
-          <a:bodyPr/>
-          <a:lstStyle/>
-          <a:p>
-            <a:r>
-              <a:rPr lang="en-US" smtClean="0"/>
-              <a:t>Click to edit Master title style</a:t>
-            </a:r>
-            <a:endParaRPr lang="en-US"/>
-          </a:p>
-        </p:txBody>
-      </p:sp>
-      <p:sp>
-        <p:nvSpPr>
-          <p:cNvPr id="3" name="Vertical Text Placeholder 2"/>
-          <p:cNvSpPr>
-            <a:spLocks noGrp="1"/>
-          </p:cNvSpPr>
-          <p:nvPr>
-            <p:ph type="body" orient="vert" idx="1"/>
-          </p:nvPr>
-        </p:nvSpPr>
-        <p:spPr/>
-        <p:txBody>
-          <a:bodyPr vert="eaVert"/>
-          <a:lstStyle/>
-          <a:p>
-            <a:pPr lvl="0"/>
-            <a:r>
-              <a:rPr lang="en-US" smtClean="0"/>
-              <a:t>Click to edit Master text styles</a:t>
-            </a:r>
-          </a:p>
-          <a:p>
-            <a:pPr lvl="1"/>
-            <a:r>
-              <a:rPr lang="en-US" smtClean="0"/>
-              <a:t>Second level</a:t>
-            </a:r>
-          </a:p>
-          <a:p>
-            <a:pPr lvl="2"/>
-            <a:r>
-              <a:rPr lang="en-US" smtClean="0"/>
-              <a:t>Third level</a:t>
-            </a:r>
-          </a:p>
-          <a:p>
-            <a:pPr lvl="3"/>
-            <a:r>
-              <a:rPr lang="en-US" smtClean="0"/>
-              <a:t>Fourth level</a:t>
-            </a:r>
-          </a:p>
-          <a:p>
-            <a:pPr lvl="4"/>
-            <a:r>
-              <a:rPr lang="en-US" smtClean="0"/>
-              <a:t>Fifth level</a:t>
-            </a:r>
-            <a:endParaRPr lang="en-US"/>
-          </a:p>
-        </p:txBody>
-      </p:sp>
-      <p:sp>
-        <p:nvSpPr>
-          <p:cNvPr id="4" name="Date Placeholder 3"/>
-          <p:cNvSpPr>
-            <a:spLocks noGrp="1"/>
-          </p:cNvSpPr>
-          <p:nvPr>
-            <p:ph type="dt" sz="half" idx="10"/>
-          </p:nvPr>
-        </p:nvSpPr>
-        <p:spPr/>
-        <p:txBody>
-          <a:bodyPr/>
-          <a:lstStyle/>
-          <a:p>
-            <a:fld id="{5BCAD085-E8A6-8845-BD4E-CB4CCA059FC4}" type="datetimeFigureOut">
-              <a:rPr lang="en-US" smtClean="0"/>
-              <a:t>1/27/13</a:t>
-            </a:fld>
-            <a:endParaRPr lang="en-US"/>
-          </a:p>
-        </p:txBody>
-      </p:sp>
-      <p:sp>
-        <p:nvSpPr>
-          <p:cNvPr id="5" name="Footer Placeholder 4"/>
-          <p:cNvSpPr>
-            <a:spLocks noGrp="1"/>
-          </p:cNvSpPr>
-          <p:nvPr>
-            <p:ph type="ftr" sz="quarter" idx="11"/>
-          </p:nvPr>
-        </p:nvSpPr>
-        <p:spPr/>
-        <p:txBody>
-          <a:bodyPr/>
-          <a:lstStyle/>
-          <a:p>
-            <a:endParaRPr lang="en-US"/>
-          </a:p>
-        </p:txBody>
-      </p:sp>
-      <p:sp>
-        <p:nvSpPr>
-          <p:cNvPr id="6" name="Slide Number Placeholder 5"/>
-          <p:cNvSpPr>
-            <a:spLocks noGrp="1"/>
-          </p:cNvSpPr>
-          <p:nvPr>
-            <p:ph type="sldNum" sz="quarter" idx="12"/>
-          </p:nvPr>
-        </p:nvSpPr>
-        <p:spPr/>
-        <p:txBody>
-          <a:bodyPr/>
-          <a:lstStyle/>
-          <a:p>
-            <a:fld id="{C1FF6DA9-008F-8B48-92A6-B652298478BF}" type="slidenum">
-              <a:rPr lang="en-US" smtClean="0"/>
-              <a:t>‹#›</a:t>
-            </a:fld>
-            <a:endParaRPr lang="en-US"/>
-          </a:p>
-        </p:txBody>
-      </p:sp>
-    </p:spTree>
-    <p:extLst>
-      <p:ext uri="{BB962C8B-B14F-4D97-AF65-F5344CB8AC3E}">
-        <p14:creationId xmlns:p14="http://schemas.microsoft.com/office/powerpoint/2010/main" val="2910927964"/>
-      </p:ext>
-    </p:extLst>
-  </p:cSld>
-  <p:clrMapOvr>
-    <a:masterClrMapping/>
-  </p:clrMapOvr>
-</p:sldLayout>
-</file>
-
 <file path=ppt/slideLayouts/slideLayout10.xml><?xml version="1.0" encoding="utf-8"?>
 <p:sldLayout xmlns:a="http://schemas.openxmlformats.org/drawingml/2006/main" xmlns:r="http://schemas.openxmlformats.org/officeDocument/2006/relationships" xmlns:p="http://schemas.openxmlformats.org/presentationml/2006/main" type="vertTx" preserve="1">
   <p:cSld name="Title and Vertical Text">
@@ -1118,356 +706,6 @@
 </p:sldLayout>
 </file>
 
-<file path=ppt/slideLayouts/slideLayout11.xml><?xml version="1.0" encoding="utf-8"?>
-<p:sldLayout xmlns:a="http://schemas.openxmlformats.org/drawingml/2006/main" xmlns:r="http://schemas.openxmlformats.org/officeDocument/2006/relationships" xmlns:p="http://schemas.openxmlformats.org/presentationml/2006/main" type="vertTitleAndTx" preserve="1">
-  <p:cSld name="Vertical Title and Text">
-    <p:spTree>
-      <p:nvGrpSpPr>
-        <p:cNvPr id="1" name=""/>
-        <p:cNvGrpSpPr/>
-        <p:nvPr/>
-      </p:nvGrpSpPr>
-      <p:grpSpPr>
-        <a:xfrm>
-          <a:off x="0" y="0"/>
-          <a:ext cx="0" cy="0"/>
-          <a:chOff x="0" y="0"/>
-          <a:chExt cx="0" cy="0"/>
-        </a:xfrm>
-      </p:grpSpPr>
-      <p:sp>
-        <p:nvSpPr>
-          <p:cNvPr id="2" name="Vertical Title 1"/>
-          <p:cNvSpPr>
-            <a:spLocks noGrp="1"/>
-          </p:cNvSpPr>
-          <p:nvPr>
-            <p:ph type="title" orient="vert"/>
-          </p:nvPr>
-        </p:nvSpPr>
-        <p:spPr>
-          <a:xfrm>
-            <a:off x="6629400" y="274638"/>
-            <a:ext cx="2057400" cy="5851525"/>
-          </a:xfrm>
-        </p:spPr>
-        <p:txBody>
-          <a:bodyPr vert="eaVert"/>
-          <a:lstStyle/>
-          <a:p>
-            <a:r>
-              <a:rPr lang="en-US" smtClean="0"/>
-              <a:t>Click to edit Master title style</a:t>
-            </a:r>
-            <a:endParaRPr lang="en-US"/>
-          </a:p>
-        </p:txBody>
-      </p:sp>
-      <p:sp>
-        <p:nvSpPr>
-          <p:cNvPr id="3" name="Vertical Text Placeholder 2"/>
-          <p:cNvSpPr>
-            <a:spLocks noGrp="1"/>
-          </p:cNvSpPr>
-          <p:nvPr>
-            <p:ph type="body" orient="vert" idx="1"/>
-          </p:nvPr>
-        </p:nvSpPr>
-        <p:spPr>
-          <a:xfrm>
-            <a:off x="457200" y="274638"/>
-            <a:ext cx="6019800" cy="5851525"/>
-          </a:xfrm>
-        </p:spPr>
-        <p:txBody>
-          <a:bodyPr vert="eaVert"/>
-          <a:lstStyle/>
-          <a:p>
-            <a:pPr lvl="0"/>
-            <a:r>
-              <a:rPr lang="en-US" smtClean="0"/>
-              <a:t>Click to edit Master text styles</a:t>
-            </a:r>
-          </a:p>
-          <a:p>
-            <a:pPr lvl="1"/>
-            <a:r>
-              <a:rPr lang="en-US" smtClean="0"/>
-              <a:t>Second level</a:t>
-            </a:r>
-          </a:p>
-          <a:p>
-            <a:pPr lvl="2"/>
-            <a:r>
-              <a:rPr lang="en-US" smtClean="0"/>
-              <a:t>Third level</a:t>
-            </a:r>
-          </a:p>
-          <a:p>
-            <a:pPr lvl="3"/>
-            <a:r>
-              <a:rPr lang="en-US" smtClean="0"/>
-              <a:t>Fourth level</a:t>
-            </a:r>
-          </a:p>
-          <a:p>
-            <a:pPr lvl="4"/>
-            <a:r>
-              <a:rPr lang="en-US" smtClean="0"/>
-              <a:t>Fifth level</a:t>
-            </a:r>
-            <a:endParaRPr lang="en-US"/>
-          </a:p>
-        </p:txBody>
-      </p:sp>
-      <p:sp>
-        <p:nvSpPr>
-          <p:cNvPr id="4" name="Date Placeholder 3"/>
-          <p:cNvSpPr>
-            <a:spLocks noGrp="1"/>
-          </p:cNvSpPr>
-          <p:nvPr>
-            <p:ph type="dt" sz="half" idx="10"/>
-          </p:nvPr>
-        </p:nvSpPr>
-        <p:spPr/>
-        <p:txBody>
-          <a:bodyPr/>
-          <a:lstStyle/>
-          <a:p>
-            <a:fld id="{5BCAD085-E8A6-8845-BD4E-CB4CCA059FC4}" type="datetimeFigureOut">
-              <a:rPr lang="en-US" smtClean="0"/>
-              <a:t>1/27/13</a:t>
-            </a:fld>
-            <a:endParaRPr lang="en-US"/>
-          </a:p>
-        </p:txBody>
-      </p:sp>
-      <p:sp>
-        <p:nvSpPr>
-          <p:cNvPr id="5" name="Footer Placeholder 4"/>
-          <p:cNvSpPr>
-            <a:spLocks noGrp="1"/>
-          </p:cNvSpPr>
-          <p:nvPr>
-            <p:ph type="ftr" sz="quarter" idx="11"/>
-          </p:nvPr>
-        </p:nvSpPr>
-        <p:spPr/>
-        <p:txBody>
-          <a:bodyPr/>
-          <a:lstStyle/>
-          <a:p>
-            <a:endParaRPr lang="en-US"/>
-          </a:p>
-        </p:txBody>
-      </p:sp>
-      <p:sp>
-        <p:nvSpPr>
-          <p:cNvPr id="6" name="Slide Number Placeholder 5"/>
-          <p:cNvSpPr>
-            <a:spLocks noGrp="1"/>
-          </p:cNvSpPr>
-          <p:nvPr>
-            <p:ph type="sldNum" sz="quarter" idx="12"/>
-          </p:nvPr>
-        </p:nvSpPr>
-        <p:spPr/>
-        <p:txBody>
-          <a:bodyPr/>
-          <a:lstStyle/>
-          <a:p>
-            <a:fld id="{C1FF6DA9-008F-8B48-92A6-B652298478BF}" type="slidenum">
-              <a:rPr lang="en-US" smtClean="0"/>
-              <a:t>‹#›</a:t>
-            </a:fld>
-            <a:endParaRPr lang="en-US"/>
-          </a:p>
-        </p:txBody>
-      </p:sp>
-    </p:spTree>
-    <p:extLst>
-      <p:ext uri="{BB962C8B-B14F-4D97-AF65-F5344CB8AC3E}">
-        <p14:creationId xmlns:p14="http://schemas.microsoft.com/office/powerpoint/2010/main" val="3612223792"/>
-      </p:ext>
-    </p:extLst>
-  </p:cSld>
-  <p:clrMapOvr>
-    <a:masterClrMapping/>
-  </p:clrMapOvr>
-</p:sldLayout>
-</file>
-
-<file path=ppt/slideLayouts/slideLayout2.xml><?xml version="1.0" encoding="utf-8"?>
-<p:sldLayout xmlns:a="http://schemas.openxmlformats.org/drawingml/2006/main" xmlns:r="http://schemas.openxmlformats.org/officeDocument/2006/relationships" xmlns:p="http://schemas.openxmlformats.org/presentationml/2006/main" type="obj" preserve="1">
-  <p:cSld name="Title and Content">
-    <p:spTree>
-      <p:nvGrpSpPr>
-        <p:cNvPr id="1" name=""/>
-        <p:cNvGrpSpPr/>
-        <p:nvPr/>
-      </p:nvGrpSpPr>
-      <p:grpSpPr>
-        <a:xfrm>
-          <a:off x="0" y="0"/>
-          <a:ext cx="0" cy="0"/>
-          <a:chOff x="0" y="0"/>
-          <a:chExt cx="0" cy="0"/>
-        </a:xfrm>
-      </p:grpSpPr>
-      <p:sp>
-        <p:nvSpPr>
-          <p:cNvPr id="2" name="Title 1"/>
-          <p:cNvSpPr>
-            <a:spLocks noGrp="1"/>
-          </p:cNvSpPr>
-          <p:nvPr>
-            <p:ph type="title"/>
-          </p:nvPr>
-        </p:nvSpPr>
-        <p:spPr/>
-        <p:txBody>
-          <a:bodyPr/>
-          <a:lstStyle/>
-          <a:p>
-            <a:r>
-              <a:rPr lang="en-US" smtClean="0"/>
-              <a:t>Click to edit Master title style</a:t>
-            </a:r>
-            <a:endParaRPr lang="en-US"/>
-          </a:p>
-        </p:txBody>
-      </p:sp>
-      <p:sp>
-        <p:nvSpPr>
-          <p:cNvPr id="3" name="Content Placeholder 2"/>
-          <p:cNvSpPr>
-            <a:spLocks noGrp="1"/>
-          </p:cNvSpPr>
-          <p:nvPr>
-            <p:ph idx="1"/>
-          </p:nvPr>
-        </p:nvSpPr>
-        <p:spPr/>
-        <p:txBody>
-          <a:bodyPr/>
-          <a:lstStyle/>
-          <a:p>
-            <a:pPr lvl="0"/>
-            <a:r>
-              <a:rPr lang="en-US" smtClean="0"/>
-              <a:t>Click to edit Master text styles</a:t>
-            </a:r>
-          </a:p>
-          <a:p>
-            <a:pPr lvl="1"/>
-            <a:r>
-              <a:rPr lang="en-US" smtClean="0"/>
-              <a:t>Second level</a:t>
-            </a:r>
-          </a:p>
-          <a:p>
-            <a:pPr lvl="2"/>
-            <a:r>
-              <a:rPr lang="en-US" smtClean="0"/>
-              <a:t>Third level</a:t>
-            </a:r>
-          </a:p>
-          <a:p>
-            <a:pPr lvl="3"/>
-            <a:r>
-              <a:rPr lang="en-US" smtClean="0"/>
-              <a:t>Fourth level</a:t>
-            </a:r>
-          </a:p>
-          <a:p>
-            <a:pPr lvl="4"/>
-            <a:r>
-              <a:rPr lang="en-US" smtClean="0"/>
-              <a:t>Fifth level</a:t>
-            </a:r>
-            <a:endParaRPr lang="en-US"/>
-          </a:p>
-        </p:txBody>
-      </p:sp>
-      <p:sp>
-        <p:nvSpPr>
-          <p:cNvPr id="4" name="Date Placeholder 3"/>
-          <p:cNvSpPr>
-            <a:spLocks noGrp="1"/>
-          </p:cNvSpPr>
-          <p:nvPr>
-            <p:ph type="dt" sz="half" idx="10"/>
-          </p:nvPr>
-        </p:nvSpPr>
-        <p:spPr/>
-        <p:txBody>
-          <a:bodyPr/>
-          <a:lstStyle/>
-          <a:p>
-            <a:fld id="{5BCAD085-E8A6-8845-BD4E-CB4CCA059FC4}" type="datetimeFigureOut">
-              <a:rPr lang="en-US" smtClean="0"/>
-              <a:t>1/27/13</a:t>
-            </a:fld>
-            <a:endParaRPr lang="en-US"/>
-          </a:p>
-        </p:txBody>
-      </p:sp>
-      <p:sp>
-        <p:nvSpPr>
-          <p:cNvPr id="5" name="Footer Placeholder 4"/>
-          <p:cNvSpPr>
-            <a:spLocks noGrp="1"/>
-          </p:cNvSpPr>
-          <p:nvPr>
-            <p:ph type="ftr" sz="quarter" idx="11"/>
-          </p:nvPr>
-        </p:nvSpPr>
-        <p:spPr/>
-        <p:txBody>
-          <a:bodyPr/>
-          <a:lstStyle/>
-          <a:p>
-            <a:endParaRPr lang="en-US"/>
-          </a:p>
-        </p:txBody>
-      </p:sp>
-      <p:sp>
-        <p:nvSpPr>
-          <p:cNvPr id="6" name="Slide Number Placeholder 5"/>
-          <p:cNvSpPr>
-            <a:spLocks noGrp="1"/>
-          </p:cNvSpPr>
-          <p:nvPr>
-            <p:ph type="sldNum" sz="quarter" idx="12"/>
-          </p:nvPr>
-        </p:nvSpPr>
-        <p:spPr/>
-        <p:txBody>
-          <a:bodyPr/>
-          <a:lstStyle/>
-          <a:p>
-            <a:fld id="{C1FF6DA9-008F-8B48-92A6-B652298478BF}" type="slidenum">
-              <a:rPr lang="en-US" smtClean="0"/>
-              <a:t>‹#›</a:t>
-            </a:fld>
-            <a:endParaRPr lang="en-US"/>
-          </a:p>
-        </p:txBody>
-      </p:sp>
-    </p:spTree>
-    <p:extLst>
-      <p:ext uri="{BB962C8B-B14F-4D97-AF65-F5344CB8AC3E}">
-        <p14:creationId xmlns:p14="http://schemas.microsoft.com/office/powerpoint/2010/main" val="2614314258"/>
-      </p:ext>
-    </p:extLst>
-  </p:cSld>
-  <p:clrMapOvr>
-    <a:masterClrMapping/>
-  </p:clrMapOvr>
-</p:sldLayout>
-</file>
-
 <file path=ppt/slideLayouts/slideLayout2.xml><?xml version="1.0" encoding="utf-8"?>
 <p:sldLayout xmlns:a="http://schemas.openxmlformats.org/drawingml/2006/main" xmlns:r="http://schemas.openxmlformats.org/officeDocument/2006/relationships" xmlns:p="http://schemas.openxmlformats.org/presentationml/2006/main" type="obj" preserve="1">
   <p:cSld name="Title and Content">
@@ -1875,540 +1113,6 @@
     <p:extLst>
       <p:ext uri="{BB962C8B-B14F-4D97-AF65-F5344CB8AC3E}">
         <p14:creationId xmlns:p14="http://schemas.microsoft.com/office/powerpoint/2010/main" val="960648375"/>
-      </p:ext>
-    </p:extLst>
-  </p:cSld>
-  <p:clrMapOvr>
-    <a:masterClrMapping/>
-  </p:clrMapOvr>
-</p:sldLayout>
-</file>
-
-<file path=ppt/slideLayouts/slideLayout3.xml><?xml version="1.0" encoding="utf-8"?>
-<p:sldLayout xmlns:a="http://schemas.openxmlformats.org/drawingml/2006/main" xmlns:r="http://schemas.openxmlformats.org/officeDocument/2006/relationships" xmlns:p="http://schemas.openxmlformats.org/presentationml/2006/main" type="secHead" preserve="1">
-  <p:cSld name="Section Header">
-    <p:spTree>
-      <p:nvGrpSpPr>
-        <p:cNvPr id="1" name=""/>
-        <p:cNvGrpSpPr/>
-        <p:nvPr/>
-      </p:nvGrpSpPr>
-      <p:grpSpPr>
-        <a:xfrm>
-          <a:off x="0" y="0"/>
-          <a:ext cx="0" cy="0"/>
-          <a:chOff x="0" y="0"/>
-          <a:chExt cx="0" cy="0"/>
-        </a:xfrm>
-      </p:grpSpPr>
-      <p:sp>
-        <p:nvSpPr>
-          <p:cNvPr id="2" name="Title 1"/>
-          <p:cNvSpPr>
-            <a:spLocks noGrp="1"/>
-          </p:cNvSpPr>
-          <p:nvPr>
-            <p:ph type="title"/>
-          </p:nvPr>
-        </p:nvSpPr>
-        <p:spPr>
-          <a:xfrm>
-            <a:off x="722313" y="4406900"/>
-            <a:ext cx="7772400" cy="1362075"/>
-          </a:xfrm>
-        </p:spPr>
-        <p:txBody>
-          <a:bodyPr anchor="t"/>
-          <a:lstStyle>
-            <a:lvl1pPr algn="l">
-              <a:defRPr sz="4000" b="1" cap="all"/>
-            </a:lvl1pPr>
-          </a:lstStyle>
-          <a:p>
-            <a:r>
-              <a:rPr lang="en-US" smtClean="0"/>
-              <a:t>Click to edit Master title style</a:t>
-            </a:r>
-            <a:endParaRPr lang="en-US"/>
-          </a:p>
-        </p:txBody>
-      </p:sp>
-      <p:sp>
-        <p:nvSpPr>
-          <p:cNvPr id="3" name="Text Placeholder 2"/>
-          <p:cNvSpPr>
-            <a:spLocks noGrp="1"/>
-          </p:cNvSpPr>
-          <p:nvPr>
-            <p:ph type="body" idx="1"/>
-          </p:nvPr>
-        </p:nvSpPr>
-        <p:spPr>
-          <a:xfrm>
-            <a:off x="722313" y="2906713"/>
-            <a:ext cx="7772400" cy="1500187"/>
-          </a:xfrm>
-        </p:spPr>
-        <p:txBody>
-          <a:bodyPr anchor="b"/>
-          <a:lstStyle>
-            <a:lvl1pPr marL="0" indent="0">
-              <a:buNone/>
-              <a:defRPr sz="2000">
-                <a:solidFill>
-                  <a:schemeClr val="tx1">
-                    <a:tint val="75000"/>
-                  </a:schemeClr>
-                </a:solidFill>
-              </a:defRPr>
-            </a:lvl1pPr>
-            <a:lvl2pPr marL="457200" indent="0">
-              <a:buNone/>
-              <a:defRPr sz="1800">
-                <a:solidFill>
-                  <a:schemeClr val="tx1">
-                    <a:tint val="75000"/>
-                  </a:schemeClr>
-                </a:solidFill>
-              </a:defRPr>
-            </a:lvl2pPr>
-            <a:lvl3pPr marL="914400" indent="0">
-              <a:buNone/>
-              <a:defRPr sz="1600">
-                <a:solidFill>
-                  <a:schemeClr val="tx1">
-                    <a:tint val="75000"/>
-                  </a:schemeClr>
-                </a:solidFill>
-              </a:defRPr>
-            </a:lvl3pPr>
-            <a:lvl4pPr marL="1371600" indent="0">
-              <a:buNone/>
-              <a:defRPr sz="1400">
-                <a:solidFill>
-                  <a:schemeClr val="tx1">
-                    <a:tint val="75000"/>
-                  </a:schemeClr>
-                </a:solidFill>
-              </a:defRPr>
-            </a:lvl4pPr>
-            <a:lvl5pPr marL="1828800" indent="0">
-              <a:buNone/>
-              <a:defRPr sz="1400">
-                <a:solidFill>
-                  <a:schemeClr val="tx1">
-                    <a:tint val="75000"/>
-                  </a:schemeClr>
-                </a:solidFill>
-              </a:defRPr>
-            </a:lvl5pPr>
-            <a:lvl6pPr marL="2286000" indent="0">
-              <a:buNone/>
-              <a:defRPr sz="1400">
-                <a:solidFill>
-                  <a:schemeClr val="tx1">
-                    <a:tint val="75000"/>
-                  </a:schemeClr>
-                </a:solidFill>
-              </a:defRPr>
-            </a:lvl6pPr>
-            <a:lvl7pPr marL="2743200" indent="0">
-              <a:buNone/>
-              <a:defRPr sz="1400">
-                <a:solidFill>
-                  <a:schemeClr val="tx1">
-                    <a:tint val="75000"/>
-                  </a:schemeClr>
-                </a:solidFill>
-              </a:defRPr>
-            </a:lvl7pPr>
-            <a:lvl8pPr marL="3200400" indent="0">
-              <a:buNone/>
-              <a:defRPr sz="1400">
-                <a:solidFill>
-                  <a:schemeClr val="tx1">
-                    <a:tint val="75000"/>
-                  </a:schemeClr>
-                </a:solidFill>
-              </a:defRPr>
-            </a:lvl8pPr>
-            <a:lvl9pPr marL="3657600" indent="0">
-              <a:buNone/>
-              <a:defRPr sz="1400">
-                <a:solidFill>
-                  <a:schemeClr val="tx1">
-                    <a:tint val="75000"/>
-                  </a:schemeClr>
-                </a:solidFill>
-              </a:defRPr>
-            </a:lvl9pPr>
-          </a:lstStyle>
-          <a:p>
-            <a:pPr lvl="0"/>
-            <a:r>
-              <a:rPr lang="en-US" smtClean="0"/>
-              <a:t>Click to edit Master text styles</a:t>
-            </a:r>
-          </a:p>
-        </p:txBody>
-      </p:sp>
-      <p:sp>
-        <p:nvSpPr>
-          <p:cNvPr id="4" name="Date Placeholder 3"/>
-          <p:cNvSpPr>
-            <a:spLocks noGrp="1"/>
-          </p:cNvSpPr>
-          <p:nvPr>
-            <p:ph type="dt" sz="half" idx="10"/>
-          </p:nvPr>
-        </p:nvSpPr>
-        <p:spPr/>
-        <p:txBody>
-          <a:bodyPr/>
-          <a:lstStyle/>
-          <a:p>
-            <a:fld id="{5BCAD085-E8A6-8845-BD4E-CB4CCA059FC4}" type="datetimeFigureOut">
-              <a:rPr lang="en-US" smtClean="0"/>
-              <a:t>1/27/13</a:t>
-            </a:fld>
-            <a:endParaRPr lang="en-US"/>
-          </a:p>
-        </p:txBody>
-      </p:sp>
-      <p:sp>
-        <p:nvSpPr>
-          <p:cNvPr id="5" name="Footer Placeholder 4"/>
-          <p:cNvSpPr>
-            <a:spLocks noGrp="1"/>
-          </p:cNvSpPr>
-          <p:nvPr>
-            <p:ph type="ftr" sz="quarter" idx="11"/>
-          </p:nvPr>
-        </p:nvSpPr>
-        <p:spPr/>
-        <p:txBody>
-          <a:bodyPr/>
-          <a:lstStyle/>
-          <a:p>
-            <a:endParaRPr lang="en-US"/>
-          </a:p>
-        </p:txBody>
-      </p:sp>
-      <p:sp>
-        <p:nvSpPr>
-          <p:cNvPr id="6" name="Slide Number Placeholder 5"/>
-          <p:cNvSpPr>
-            <a:spLocks noGrp="1"/>
-          </p:cNvSpPr>
-          <p:nvPr>
-            <p:ph type="sldNum" sz="quarter" idx="12"/>
-          </p:nvPr>
-        </p:nvSpPr>
-        <p:spPr/>
-        <p:txBody>
-          <a:bodyPr/>
-          <a:lstStyle/>
-          <a:p>
-            <a:fld id="{C1FF6DA9-008F-8B48-92A6-B652298478BF}" type="slidenum">
-              <a:rPr lang="en-US" smtClean="0"/>
-              <a:t>‹#›</a:t>
-            </a:fld>
-            <a:endParaRPr lang="en-US"/>
-          </a:p>
-        </p:txBody>
-      </p:sp>
-    </p:spTree>
-    <p:extLst>
-      <p:ext uri="{BB962C8B-B14F-4D97-AF65-F5344CB8AC3E}">
-        <p14:creationId xmlns:p14="http://schemas.microsoft.com/office/powerpoint/2010/main" val="960648375"/>
-      </p:ext>
-    </p:extLst>
-  </p:cSld>
-  <p:clrMapOvr>
-    <a:masterClrMapping/>
-  </p:clrMapOvr>
-</p:sldLayout>
-</file>
-
-<file path=ppt/slideLayouts/slideLayout4.xml><?xml version="1.0" encoding="utf-8"?>
-<p:sldLayout xmlns:a="http://schemas.openxmlformats.org/drawingml/2006/main" xmlns:r="http://schemas.openxmlformats.org/officeDocument/2006/relationships" xmlns:p="http://schemas.openxmlformats.org/presentationml/2006/main" type="twoObj" preserve="1">
-  <p:cSld name="Two Content">
-    <p:spTree>
-      <p:nvGrpSpPr>
-        <p:cNvPr id="1" name=""/>
-        <p:cNvGrpSpPr/>
-        <p:nvPr/>
-      </p:nvGrpSpPr>
-      <p:grpSpPr>
-        <a:xfrm>
-          <a:off x="0" y="0"/>
-          <a:ext cx="0" cy="0"/>
-          <a:chOff x="0" y="0"/>
-          <a:chExt cx="0" cy="0"/>
-        </a:xfrm>
-      </p:grpSpPr>
-      <p:sp>
-        <p:nvSpPr>
-          <p:cNvPr id="2" name="Title 1"/>
-          <p:cNvSpPr>
-            <a:spLocks noGrp="1"/>
-          </p:cNvSpPr>
-          <p:nvPr>
-            <p:ph type="title"/>
-          </p:nvPr>
-        </p:nvSpPr>
-        <p:spPr/>
-        <p:txBody>
-          <a:bodyPr/>
-          <a:lstStyle/>
-          <a:p>
-            <a:r>
-              <a:rPr lang="en-US" smtClean="0"/>
-              <a:t>Click to edit Master title style</a:t>
-            </a:r>
-            <a:endParaRPr lang="en-US"/>
-          </a:p>
-        </p:txBody>
-      </p:sp>
-      <p:sp>
-        <p:nvSpPr>
-          <p:cNvPr id="3" name="Content Placeholder 2"/>
-          <p:cNvSpPr>
-            <a:spLocks noGrp="1"/>
-          </p:cNvSpPr>
-          <p:nvPr>
-            <p:ph sz="half" idx="1"/>
-          </p:nvPr>
-        </p:nvSpPr>
-        <p:spPr>
-          <a:xfrm>
-            <a:off x="457200" y="1600200"/>
-            <a:ext cx="4038600" cy="4525963"/>
-          </a:xfrm>
-        </p:spPr>
-        <p:txBody>
-          <a:bodyPr/>
-          <a:lstStyle>
-            <a:lvl1pPr>
-              <a:defRPr sz="2800"/>
-            </a:lvl1pPr>
-            <a:lvl2pPr>
-              <a:defRPr sz="2400"/>
-            </a:lvl2pPr>
-            <a:lvl3pPr>
-              <a:defRPr sz="2000"/>
-            </a:lvl3pPr>
-            <a:lvl4pPr>
-              <a:defRPr sz="1800"/>
-            </a:lvl4pPr>
-            <a:lvl5pPr>
-              <a:defRPr sz="1800"/>
-            </a:lvl5pPr>
-            <a:lvl6pPr>
-              <a:defRPr sz="1800"/>
-            </a:lvl6pPr>
-            <a:lvl7pPr>
-              <a:defRPr sz="1800"/>
-            </a:lvl7pPr>
-            <a:lvl8pPr>
-              <a:defRPr sz="1800"/>
-            </a:lvl8pPr>
-            <a:lvl9pPr>
-              <a:defRPr sz="1800"/>
-            </a:lvl9pPr>
-          </a:lstStyle>
-          <a:p>
-            <a:pPr lvl="0"/>
-            <a:r>
-              <a:rPr lang="en-US" smtClean="0"/>
-              <a:t>Click to edit Master text styles</a:t>
-            </a:r>
-          </a:p>
-          <a:p>
-            <a:pPr lvl="1"/>
-            <a:r>
-              <a:rPr lang="en-US" smtClean="0"/>
-              <a:t>Second level</a:t>
-            </a:r>
-          </a:p>
-          <a:p>
-            <a:pPr lvl="2"/>
-            <a:r>
-              <a:rPr lang="en-US" smtClean="0"/>
-              <a:t>Third level</a:t>
-            </a:r>
-          </a:p>
-          <a:p>
-            <a:pPr lvl="3"/>
-            <a:r>
-              <a:rPr lang="en-US" smtClean="0"/>
-              <a:t>Fourth level</a:t>
-            </a:r>
-          </a:p>
-          <a:p>
-            <a:pPr lvl="4"/>
-            <a:r>
-              <a:rPr lang="en-US" smtClean="0"/>
-              <a:t>Fifth level</a:t>
-            </a:r>
-            <a:endParaRPr lang="en-US"/>
-          </a:p>
-        </p:txBody>
-      </p:sp>
-      <p:sp>
-        <p:nvSpPr>
-          <p:cNvPr id="4" name="Content Placeholder 3"/>
-          <p:cNvSpPr>
-            <a:spLocks noGrp="1"/>
-          </p:cNvSpPr>
-          <p:nvPr>
-            <p:ph sz="half" idx="2"/>
-          </p:nvPr>
-        </p:nvSpPr>
-        <p:spPr>
-          <a:xfrm>
-            <a:off x="4648200" y="1600200"/>
-            <a:ext cx="4038600" cy="4525963"/>
-          </a:xfrm>
-        </p:spPr>
-        <p:txBody>
-          <a:bodyPr/>
-          <a:lstStyle>
-            <a:lvl1pPr>
-              <a:defRPr sz="2800"/>
-            </a:lvl1pPr>
-            <a:lvl2pPr>
-              <a:defRPr sz="2400"/>
-            </a:lvl2pPr>
-            <a:lvl3pPr>
-              <a:defRPr sz="2000"/>
-            </a:lvl3pPr>
-            <a:lvl4pPr>
-              <a:defRPr sz="1800"/>
-            </a:lvl4pPr>
-            <a:lvl5pPr>
-              <a:defRPr sz="1800"/>
-            </a:lvl5pPr>
-            <a:lvl6pPr>
-              <a:defRPr sz="1800"/>
-            </a:lvl6pPr>
-            <a:lvl7pPr>
-              <a:defRPr sz="1800"/>
-            </a:lvl7pPr>
-            <a:lvl8pPr>
-              <a:defRPr sz="1800"/>
-            </a:lvl8pPr>
-            <a:lvl9pPr>
-              <a:defRPr sz="1800"/>
-            </a:lvl9pPr>
-          </a:lstStyle>
-          <a:p>
-            <a:pPr lvl="0"/>
-            <a:r>
-              <a:rPr lang="en-US" smtClean="0"/>
-              <a:t>Click to edit Master text styles</a:t>
-            </a:r>
-          </a:p>
-          <a:p>
-            <a:pPr lvl="1"/>
-            <a:r>
-              <a:rPr lang="en-US" smtClean="0"/>
-              <a:t>Second level</a:t>
-            </a:r>
-          </a:p>
-          <a:p>
-            <a:pPr lvl="2"/>
-            <a:r>
-              <a:rPr lang="en-US" smtClean="0"/>
-              <a:t>Third level</a:t>
-            </a:r>
-          </a:p>
-          <a:p>
-            <a:pPr lvl="3"/>
-            <a:r>
-              <a:rPr lang="en-US" smtClean="0"/>
-              <a:t>Fourth level</a:t>
-            </a:r>
-          </a:p>
-          <a:p>
-            <a:pPr lvl="4"/>
-            <a:r>
-              <a:rPr lang="en-US" smtClean="0"/>
-              <a:t>Fifth level</a:t>
-            </a:r>
-            <a:endParaRPr lang="en-US"/>
-          </a:p>
-        </p:txBody>
-      </p:sp>
-      <p:sp>
-        <p:nvSpPr>
-          <p:cNvPr id="5" name="Date Placeholder 4"/>
-          <p:cNvSpPr>
-            <a:spLocks noGrp="1"/>
-          </p:cNvSpPr>
-          <p:nvPr>
-            <p:ph type="dt" sz="half" idx="10"/>
-          </p:nvPr>
-        </p:nvSpPr>
-        <p:spPr/>
-        <p:txBody>
-          <a:bodyPr/>
-          <a:lstStyle/>
-          <a:p>
-            <a:fld id="{5BCAD085-E8A6-8845-BD4E-CB4CCA059FC4}" type="datetimeFigureOut">
-              <a:rPr lang="en-US" smtClean="0"/>
-              <a:t>1/27/13</a:t>
-            </a:fld>
-            <a:endParaRPr lang="en-US"/>
-          </a:p>
-        </p:txBody>
-      </p:sp>
-      <p:sp>
-        <p:nvSpPr>
-          <p:cNvPr id="6" name="Footer Placeholder 5"/>
-          <p:cNvSpPr>
-            <a:spLocks noGrp="1"/>
-          </p:cNvSpPr>
-          <p:nvPr>
-            <p:ph type="ftr" sz="quarter" idx="11"/>
-          </p:nvPr>
-        </p:nvSpPr>
-        <p:spPr/>
-        <p:txBody>
-          <a:bodyPr/>
-          <a:lstStyle/>
-          <a:p>
-            <a:endParaRPr lang="en-US"/>
-          </a:p>
-        </p:txBody>
-      </p:sp>
-      <p:sp>
-        <p:nvSpPr>
-          <p:cNvPr id="7" name="Slide Number Placeholder 6"/>
-          <p:cNvSpPr>
-            <a:spLocks noGrp="1"/>
-          </p:cNvSpPr>
-          <p:nvPr>
-            <p:ph type="sldNum" sz="quarter" idx="12"/>
-          </p:nvPr>
-        </p:nvSpPr>
-        <p:spPr/>
-        <p:txBody>
-          <a:bodyPr/>
-          <a:lstStyle/>
-          <a:p>
-            <a:fld id="{C1FF6DA9-008F-8B48-92A6-B652298478BF}" type="slidenum">
-              <a:rPr lang="en-US" smtClean="0"/>
-              <a:t>‹#›</a:t>
-            </a:fld>
-            <a:endParaRPr lang="en-US"/>
-          </a:p>
-        </p:txBody>
-      </p:sp>
-    </p:spTree>
-    <p:extLst>
-      <p:ext uri="{BB962C8B-B14F-4D97-AF65-F5344CB8AC3E}">
-        <p14:creationId xmlns:p14="http://schemas.microsoft.com/office/powerpoint/2010/main" val="2782244947"/>
       </p:ext>
     </p:extLst>
   </p:cSld>
@@ -3128,428 +1832,6 @@
 </p:sldLayout>
 </file>
 
-<file path=ppt/slideLayouts/slideLayout5.xml><?xml version="1.0" encoding="utf-8"?>
-<p:sldLayout xmlns:a="http://schemas.openxmlformats.org/drawingml/2006/main" xmlns:r="http://schemas.openxmlformats.org/officeDocument/2006/relationships" xmlns:p="http://schemas.openxmlformats.org/presentationml/2006/main" type="twoTxTwoObj" preserve="1">
-  <p:cSld name="Comparison">
-    <p:spTree>
-      <p:nvGrpSpPr>
-        <p:cNvPr id="1" name=""/>
-        <p:cNvGrpSpPr/>
-        <p:nvPr/>
-      </p:nvGrpSpPr>
-      <p:grpSpPr>
-        <a:xfrm>
-          <a:off x="0" y="0"/>
-          <a:ext cx="0" cy="0"/>
-          <a:chOff x="0" y="0"/>
-          <a:chExt cx="0" cy="0"/>
-        </a:xfrm>
-      </p:grpSpPr>
-      <p:sp>
-        <p:nvSpPr>
-          <p:cNvPr id="2" name="Title 1"/>
-          <p:cNvSpPr>
-            <a:spLocks noGrp="1"/>
-          </p:cNvSpPr>
-          <p:nvPr>
-            <p:ph type="title"/>
-          </p:nvPr>
-        </p:nvSpPr>
-        <p:spPr/>
-        <p:txBody>
-          <a:bodyPr/>
-          <a:lstStyle>
-            <a:lvl1pPr>
-              <a:defRPr/>
-            </a:lvl1pPr>
-          </a:lstStyle>
-          <a:p>
-            <a:r>
-              <a:rPr lang="en-US" smtClean="0"/>
-              <a:t>Click to edit Master title style</a:t>
-            </a:r>
-            <a:endParaRPr lang="en-US"/>
-          </a:p>
-        </p:txBody>
-      </p:sp>
-      <p:sp>
-        <p:nvSpPr>
-          <p:cNvPr id="3" name="Text Placeholder 2"/>
-          <p:cNvSpPr>
-            <a:spLocks noGrp="1"/>
-          </p:cNvSpPr>
-          <p:nvPr>
-            <p:ph type="body" idx="1"/>
-          </p:nvPr>
-        </p:nvSpPr>
-        <p:spPr>
-          <a:xfrm>
-            <a:off x="457200" y="1535113"/>
-            <a:ext cx="4040188" cy="639762"/>
-          </a:xfrm>
-        </p:spPr>
-        <p:txBody>
-          <a:bodyPr anchor="b"/>
-          <a:lstStyle>
-            <a:lvl1pPr marL="0" indent="0">
-              <a:buNone/>
-              <a:defRPr sz="2400" b="1"/>
-            </a:lvl1pPr>
-            <a:lvl2pPr marL="457200" indent="0">
-              <a:buNone/>
-              <a:defRPr sz="2000" b="1"/>
-            </a:lvl2pPr>
-            <a:lvl3pPr marL="914400" indent="0">
-              <a:buNone/>
-              <a:defRPr sz="1800" b="1"/>
-            </a:lvl3pPr>
-            <a:lvl4pPr marL="1371600" indent="0">
-              <a:buNone/>
-              <a:defRPr sz="1600" b="1"/>
-            </a:lvl4pPr>
-            <a:lvl5pPr marL="1828800" indent="0">
-              <a:buNone/>
-              <a:defRPr sz="1600" b="1"/>
-            </a:lvl5pPr>
-            <a:lvl6pPr marL="2286000" indent="0">
-              <a:buNone/>
-              <a:defRPr sz="1600" b="1"/>
-            </a:lvl6pPr>
-            <a:lvl7pPr marL="2743200" indent="0">
-              <a:buNone/>
-              <a:defRPr sz="1600" b="1"/>
-            </a:lvl7pPr>
-            <a:lvl8pPr marL="3200400" indent="0">
-              <a:buNone/>
-              <a:defRPr sz="1600" b="1"/>
-            </a:lvl8pPr>
-            <a:lvl9pPr marL="3657600" indent="0">
-              <a:buNone/>
-              <a:defRPr sz="1600" b="1"/>
-            </a:lvl9pPr>
-          </a:lstStyle>
-          <a:p>
-            <a:pPr lvl="0"/>
-            <a:r>
-              <a:rPr lang="en-US" smtClean="0"/>
-              <a:t>Click to edit Master text styles</a:t>
-            </a:r>
-          </a:p>
-        </p:txBody>
-      </p:sp>
-      <p:sp>
-        <p:nvSpPr>
-          <p:cNvPr id="4" name="Content Placeholder 3"/>
-          <p:cNvSpPr>
-            <a:spLocks noGrp="1"/>
-          </p:cNvSpPr>
-          <p:nvPr>
-            <p:ph sz="half" idx="2"/>
-          </p:nvPr>
-        </p:nvSpPr>
-        <p:spPr>
-          <a:xfrm>
-            <a:off x="457200" y="2174875"/>
-            <a:ext cx="4040188" cy="3951288"/>
-          </a:xfrm>
-        </p:spPr>
-        <p:txBody>
-          <a:bodyPr/>
-          <a:lstStyle>
-            <a:lvl1pPr>
-              <a:defRPr sz="2400"/>
-            </a:lvl1pPr>
-            <a:lvl2pPr>
-              <a:defRPr sz="2000"/>
-            </a:lvl2pPr>
-            <a:lvl3pPr>
-              <a:defRPr sz="1800"/>
-            </a:lvl3pPr>
-            <a:lvl4pPr>
-              <a:defRPr sz="1600"/>
-            </a:lvl4pPr>
-            <a:lvl5pPr>
-              <a:defRPr sz="1600"/>
-            </a:lvl5pPr>
-            <a:lvl6pPr>
-              <a:defRPr sz="1600"/>
-            </a:lvl6pPr>
-            <a:lvl7pPr>
-              <a:defRPr sz="1600"/>
-            </a:lvl7pPr>
-            <a:lvl8pPr>
-              <a:defRPr sz="1600"/>
-            </a:lvl8pPr>
-            <a:lvl9pPr>
-              <a:defRPr sz="1600"/>
-            </a:lvl9pPr>
-          </a:lstStyle>
-          <a:p>
-            <a:pPr lvl="0"/>
-            <a:r>
-              <a:rPr lang="en-US" smtClean="0"/>
-              <a:t>Click to edit Master text styles</a:t>
-            </a:r>
-          </a:p>
-          <a:p>
-            <a:pPr lvl="1"/>
-            <a:r>
-              <a:rPr lang="en-US" smtClean="0"/>
-              <a:t>Second level</a:t>
-            </a:r>
-          </a:p>
-          <a:p>
-            <a:pPr lvl="2"/>
-            <a:r>
-              <a:rPr lang="en-US" smtClean="0"/>
-              <a:t>Third level</a:t>
-            </a:r>
-          </a:p>
-          <a:p>
-            <a:pPr lvl="3"/>
-            <a:r>
-              <a:rPr lang="en-US" smtClean="0"/>
-              <a:t>Fourth level</a:t>
-            </a:r>
-          </a:p>
-          <a:p>
-            <a:pPr lvl="4"/>
-            <a:r>
-              <a:rPr lang="en-US" smtClean="0"/>
-              <a:t>Fifth level</a:t>
-            </a:r>
-            <a:endParaRPr lang="en-US"/>
-          </a:p>
-        </p:txBody>
-      </p:sp>
-      <p:sp>
-        <p:nvSpPr>
-          <p:cNvPr id="5" name="Text Placeholder 4"/>
-          <p:cNvSpPr>
-            <a:spLocks noGrp="1"/>
-          </p:cNvSpPr>
-          <p:nvPr>
-            <p:ph type="body" sz="quarter" idx="3"/>
-          </p:nvPr>
-        </p:nvSpPr>
-        <p:spPr>
-          <a:xfrm>
-            <a:off x="4645025" y="1535113"/>
-            <a:ext cx="4041775" cy="639762"/>
-          </a:xfrm>
-        </p:spPr>
-        <p:txBody>
-          <a:bodyPr anchor="b"/>
-          <a:lstStyle>
-            <a:lvl1pPr marL="0" indent="0">
-              <a:buNone/>
-              <a:defRPr sz="2400" b="1"/>
-            </a:lvl1pPr>
-            <a:lvl2pPr marL="457200" indent="0">
-              <a:buNone/>
-              <a:defRPr sz="2000" b="1"/>
-            </a:lvl2pPr>
-            <a:lvl3pPr marL="914400" indent="0">
-              <a:buNone/>
-              <a:defRPr sz="1800" b="1"/>
-            </a:lvl3pPr>
-            <a:lvl4pPr marL="1371600" indent="0">
-              <a:buNone/>
-              <a:defRPr sz="1600" b="1"/>
-            </a:lvl4pPr>
-            <a:lvl5pPr marL="1828800" indent="0">
-              <a:buNone/>
-              <a:defRPr sz="1600" b="1"/>
-            </a:lvl5pPr>
-            <a:lvl6pPr marL="2286000" indent="0">
-              <a:buNone/>
-              <a:defRPr sz="1600" b="1"/>
-            </a:lvl6pPr>
-            <a:lvl7pPr marL="2743200" indent="0">
-              <a:buNone/>
-              <a:defRPr sz="1600" b="1"/>
-            </a:lvl7pPr>
-            <a:lvl8pPr marL="3200400" indent="0">
-              <a:buNone/>
-              <a:defRPr sz="1600" b="1"/>
-            </a:lvl8pPr>
-            <a:lvl9pPr marL="3657600" indent="0">
-              <a:buNone/>
-              <a:defRPr sz="1600" b="1"/>
-            </a:lvl9pPr>
-          </a:lstStyle>
-          <a:p>
-            <a:pPr lvl="0"/>
-            <a:r>
-              <a:rPr lang="en-US" smtClean="0"/>
-              <a:t>Click to edit Master text styles</a:t>
-            </a:r>
-          </a:p>
-        </p:txBody>
-      </p:sp>
-      <p:sp>
-        <p:nvSpPr>
-          <p:cNvPr id="6" name="Content Placeholder 5"/>
-          <p:cNvSpPr>
-            <a:spLocks noGrp="1"/>
-          </p:cNvSpPr>
-          <p:nvPr>
-            <p:ph sz="quarter" idx="4"/>
-          </p:nvPr>
-        </p:nvSpPr>
-        <p:spPr>
-          <a:xfrm>
-            <a:off x="4645025" y="2174875"/>
-            <a:ext cx="4041775" cy="3951288"/>
-          </a:xfrm>
-        </p:spPr>
-        <p:txBody>
-          <a:bodyPr/>
-          <a:lstStyle>
-            <a:lvl1pPr>
-              <a:defRPr sz="2400"/>
-            </a:lvl1pPr>
-            <a:lvl2pPr>
-              <a:defRPr sz="2000"/>
-            </a:lvl2pPr>
-            <a:lvl3pPr>
-              <a:defRPr sz="1800"/>
-            </a:lvl3pPr>
-            <a:lvl4pPr>
-              <a:defRPr sz="1600"/>
-            </a:lvl4pPr>
-            <a:lvl5pPr>
-              <a:defRPr sz="1600"/>
-            </a:lvl5pPr>
-            <a:lvl6pPr>
-              <a:defRPr sz="1600"/>
-            </a:lvl6pPr>
-            <a:lvl7pPr>
-              <a:defRPr sz="1600"/>
-            </a:lvl7pPr>
-            <a:lvl8pPr>
-              <a:defRPr sz="1600"/>
-            </a:lvl8pPr>
-            <a:lvl9pPr>
-              <a:defRPr sz="1600"/>
-            </a:lvl9pPr>
-          </a:lstStyle>
-          <a:p>
-            <a:pPr lvl="0"/>
-            <a:r>
-              <a:rPr lang="en-US" smtClean="0"/>
-              <a:t>Click to edit Master text styles</a:t>
-            </a:r>
-          </a:p>
-          <a:p>
-            <a:pPr lvl="1"/>
-            <a:r>
-              <a:rPr lang="en-US" smtClean="0"/>
-              <a:t>Second level</a:t>
-            </a:r>
-          </a:p>
-          <a:p>
-            <a:pPr lvl="2"/>
-            <a:r>
-              <a:rPr lang="en-US" smtClean="0"/>
-              <a:t>Third level</a:t>
-            </a:r>
-          </a:p>
-          <a:p>
-            <a:pPr lvl="3"/>
-            <a:r>
-              <a:rPr lang="en-US" smtClean="0"/>
-              <a:t>Fourth level</a:t>
-            </a:r>
-          </a:p>
-          <a:p>
-            <a:pPr lvl="4"/>
-            <a:r>
-              <a:rPr lang="en-US" smtClean="0"/>
-              <a:t>Fifth level</a:t>
-            </a:r>
-            <a:endParaRPr lang="en-US"/>
-          </a:p>
-        </p:txBody>
-      </p:sp>
-      <p:sp>
-        <p:nvSpPr>
-          <p:cNvPr id="7" name="Date Placeholder 6"/>
-          <p:cNvSpPr>
-            <a:spLocks noGrp="1"/>
-          </p:cNvSpPr>
-          <p:nvPr>
-            <p:ph type="dt" sz="half" idx="10"/>
-          </p:nvPr>
-        </p:nvSpPr>
-        <p:spPr/>
-        <p:txBody>
-          <a:bodyPr/>
-          <a:lstStyle/>
-          <a:p>
-            <a:fld id="{5BCAD085-E8A6-8845-BD4E-CB4CCA059FC4}" type="datetimeFigureOut">
-              <a:rPr lang="en-US" smtClean="0"/>
-              <a:t>1/27/13</a:t>
-            </a:fld>
-            <a:endParaRPr lang="en-US"/>
-          </a:p>
-        </p:txBody>
-      </p:sp>
-      <p:sp>
-        <p:nvSpPr>
-          <p:cNvPr id="8" name="Footer Placeholder 7"/>
-          <p:cNvSpPr>
-            <a:spLocks noGrp="1"/>
-          </p:cNvSpPr>
-          <p:nvPr>
-            <p:ph type="ftr" sz="quarter" idx="11"/>
-          </p:nvPr>
-        </p:nvSpPr>
-        <p:spPr/>
-        <p:txBody>
-          <a:bodyPr/>
-          <a:lstStyle/>
-          <a:p>
-            <a:endParaRPr lang="en-US"/>
-          </a:p>
-        </p:txBody>
-      </p:sp>
-      <p:sp>
-        <p:nvSpPr>
-          <p:cNvPr id="9" name="Slide Number Placeholder 8"/>
-          <p:cNvSpPr>
-            <a:spLocks noGrp="1"/>
-          </p:cNvSpPr>
-          <p:nvPr>
-            <p:ph type="sldNum" sz="quarter" idx="12"/>
-          </p:nvPr>
-        </p:nvSpPr>
-        <p:spPr/>
-        <p:txBody>
-          <a:bodyPr/>
-          <a:lstStyle/>
-          <a:p>
-            <a:fld id="{C1FF6DA9-008F-8B48-92A6-B652298478BF}" type="slidenum">
-              <a:rPr lang="en-US" smtClean="0"/>
-              <a:t>‹#›</a:t>
-            </a:fld>
-            <a:endParaRPr lang="en-US"/>
-          </a:p>
-        </p:txBody>
-      </p:sp>
-    </p:spTree>
-    <p:extLst>
-      <p:ext uri="{BB962C8B-B14F-4D97-AF65-F5344CB8AC3E}">
-        <p14:creationId xmlns:p14="http://schemas.microsoft.com/office/powerpoint/2010/main" val="990158736"/>
-      </p:ext>
-    </p:extLst>
-  </p:cSld>
-  <p:clrMapOvr>
-    <a:masterClrMapping/>
-  </p:clrMapOvr>
-</p:sldLayout>
-</file>
-
 <file path=ppt/slideLayouts/slideLayout6.xml><?xml version="1.0" encoding="utf-8"?>
 <p:sldLayout xmlns:a="http://schemas.openxmlformats.org/drawingml/2006/main" xmlns:r="http://schemas.openxmlformats.org/officeDocument/2006/relationships" xmlns:p="http://schemas.openxmlformats.org/presentationml/2006/main" type="titleOnly" preserve="1">
   <p:cSld name="Title Only">
@@ -3659,219 +1941,6 @@
     <p:extLst>
       <p:ext uri="{BB962C8B-B14F-4D97-AF65-F5344CB8AC3E}">
         <p14:creationId xmlns:p14="http://schemas.microsoft.com/office/powerpoint/2010/main" val="727027711"/>
-      </p:ext>
-    </p:extLst>
-  </p:cSld>
-  <p:clrMapOvr>
-    <a:masterClrMapping/>
-  </p:clrMapOvr>
-</p:sldLayout>
-</file>
-
-<file path=ppt/slideLayouts/slideLayout6.xml><?xml version="1.0" encoding="utf-8"?>
-<p:sldLayout xmlns:a="http://schemas.openxmlformats.org/drawingml/2006/main" xmlns:r="http://schemas.openxmlformats.org/officeDocument/2006/relationships" xmlns:p="http://schemas.openxmlformats.org/presentationml/2006/main" type="titleOnly" preserve="1">
-  <p:cSld name="Title Only">
-    <p:spTree>
-      <p:nvGrpSpPr>
-        <p:cNvPr id="1" name=""/>
-        <p:cNvGrpSpPr/>
-        <p:nvPr/>
-      </p:nvGrpSpPr>
-      <p:grpSpPr>
-        <a:xfrm>
-          <a:off x="0" y="0"/>
-          <a:ext cx="0" cy="0"/>
-          <a:chOff x="0" y="0"/>
-          <a:chExt cx="0" cy="0"/>
-        </a:xfrm>
-      </p:grpSpPr>
-      <p:sp>
-        <p:nvSpPr>
-          <p:cNvPr id="2" name="Title 1"/>
-          <p:cNvSpPr>
-            <a:spLocks noGrp="1"/>
-          </p:cNvSpPr>
-          <p:nvPr>
-            <p:ph type="title"/>
-          </p:nvPr>
-        </p:nvSpPr>
-        <p:spPr/>
-        <p:txBody>
-          <a:bodyPr/>
-          <a:lstStyle/>
-          <a:p>
-            <a:r>
-              <a:rPr lang="en-US" smtClean="0"/>
-              <a:t>Click to edit Master title style</a:t>
-            </a:r>
-            <a:endParaRPr lang="en-US"/>
-          </a:p>
-        </p:txBody>
-      </p:sp>
-      <p:sp>
-        <p:nvSpPr>
-          <p:cNvPr id="3" name="Date Placeholder 2"/>
-          <p:cNvSpPr>
-            <a:spLocks noGrp="1"/>
-          </p:cNvSpPr>
-          <p:nvPr>
-            <p:ph type="dt" sz="half" idx="10"/>
-          </p:nvPr>
-        </p:nvSpPr>
-        <p:spPr/>
-        <p:txBody>
-          <a:bodyPr/>
-          <a:lstStyle/>
-          <a:p>
-            <a:fld id="{5BCAD085-E8A6-8845-BD4E-CB4CCA059FC4}" type="datetimeFigureOut">
-              <a:rPr lang="en-US" smtClean="0"/>
-              <a:t>1/27/13</a:t>
-            </a:fld>
-            <a:endParaRPr lang="en-US"/>
-          </a:p>
-        </p:txBody>
-      </p:sp>
-      <p:sp>
-        <p:nvSpPr>
-          <p:cNvPr id="4" name="Footer Placeholder 3"/>
-          <p:cNvSpPr>
-            <a:spLocks noGrp="1"/>
-          </p:cNvSpPr>
-          <p:nvPr>
-            <p:ph type="ftr" sz="quarter" idx="11"/>
-          </p:nvPr>
-        </p:nvSpPr>
-        <p:spPr/>
-        <p:txBody>
-          <a:bodyPr/>
-          <a:lstStyle/>
-          <a:p>
-            <a:endParaRPr lang="en-US"/>
-          </a:p>
-        </p:txBody>
-      </p:sp>
-      <p:sp>
-        <p:nvSpPr>
-          <p:cNvPr id="5" name="Slide Number Placeholder 4"/>
-          <p:cNvSpPr>
-            <a:spLocks noGrp="1"/>
-          </p:cNvSpPr>
-          <p:nvPr>
-            <p:ph type="sldNum" sz="quarter" idx="12"/>
-          </p:nvPr>
-        </p:nvSpPr>
-        <p:spPr/>
-        <p:txBody>
-          <a:bodyPr/>
-          <a:lstStyle/>
-          <a:p>
-            <a:fld id="{C1FF6DA9-008F-8B48-92A6-B652298478BF}" type="slidenum">
-              <a:rPr lang="en-US" smtClean="0"/>
-              <a:t>‹#›</a:t>
-            </a:fld>
-            <a:endParaRPr lang="en-US"/>
-          </a:p>
-        </p:txBody>
-      </p:sp>
-    </p:spTree>
-    <p:extLst>
-      <p:ext uri="{BB962C8B-B14F-4D97-AF65-F5344CB8AC3E}">
-        <p14:creationId xmlns:p14="http://schemas.microsoft.com/office/powerpoint/2010/main" val="727027711"/>
-      </p:ext>
-    </p:extLst>
-  </p:cSld>
-  <p:clrMapOvr>
-    <a:masterClrMapping/>
-  </p:clrMapOvr>
-</p:sldLayout>
-</file>
-
-<file path=ppt/slideLayouts/slideLayout7.xml><?xml version="1.0" encoding="utf-8"?>
-<p:sldLayout xmlns:a="http://schemas.openxmlformats.org/drawingml/2006/main" xmlns:r="http://schemas.openxmlformats.org/officeDocument/2006/relationships" xmlns:p="http://schemas.openxmlformats.org/presentationml/2006/main" type="blank" preserve="1">
-  <p:cSld name="Blank">
-    <p:spTree>
-      <p:nvGrpSpPr>
-        <p:cNvPr id="1" name=""/>
-        <p:cNvGrpSpPr/>
-        <p:nvPr/>
-      </p:nvGrpSpPr>
-      <p:grpSpPr>
-        <a:xfrm>
-          <a:off x="0" y="0"/>
-          <a:ext cx="0" cy="0"/>
-          <a:chOff x="0" y="0"/>
-          <a:chExt cx="0" cy="0"/>
-        </a:xfrm>
-      </p:grpSpPr>
-      <p:sp>
-        <p:nvSpPr>
-          <p:cNvPr id="2" name="Date Placeholder 1"/>
-          <p:cNvSpPr>
-            <a:spLocks noGrp="1"/>
-          </p:cNvSpPr>
-          <p:nvPr>
-            <p:ph type="dt" sz="half" idx="10"/>
-          </p:nvPr>
-        </p:nvSpPr>
-        <p:spPr/>
-        <p:txBody>
-          <a:bodyPr/>
-          <a:lstStyle/>
-          <a:p>
-            <a:fld id="{5BCAD085-E8A6-8845-BD4E-CB4CCA059FC4}" type="datetimeFigureOut">
-              <a:rPr lang="en-US" smtClean="0"/>
-              <a:t>1/27/13</a:t>
-            </a:fld>
-            <a:endParaRPr lang="en-US"/>
-          </a:p>
-        </p:txBody>
-      </p:sp>
-      <p:sp>
-        <p:nvSpPr>
-          <p:cNvPr id="3" name="Footer Placeholder 2"/>
-          <p:cNvSpPr>
-            <a:spLocks noGrp="1"/>
-          </p:cNvSpPr>
-          <p:nvPr>
-            <p:ph type="ftr" sz="quarter" idx="11"/>
-          </p:nvPr>
-        </p:nvSpPr>
-        <p:spPr/>
-        <p:txBody>
-          <a:bodyPr/>
-          <a:lstStyle/>
-          <a:p>
-            <a:endParaRPr lang="en-US"/>
-          </a:p>
-        </p:txBody>
-      </p:sp>
-      <p:sp>
-        <p:nvSpPr>
-          <p:cNvPr id="4" name="Slide Number Placeholder 3"/>
-          <p:cNvSpPr>
-            <a:spLocks noGrp="1"/>
-          </p:cNvSpPr>
-          <p:nvPr>
-            <p:ph type="sldNum" sz="quarter" idx="12"/>
-          </p:nvPr>
-        </p:nvSpPr>
-        <p:spPr/>
-        <p:txBody>
-          <a:bodyPr/>
-          <a:lstStyle/>
-          <a:p>
-            <a:fld id="{C1FF6DA9-008F-8B48-92A6-B652298478BF}" type="slidenum">
-              <a:rPr lang="en-US" smtClean="0"/>
-              <a:t>‹#›</a:t>
-            </a:fld>
-            <a:endParaRPr lang="en-US"/>
-          </a:p>
-        </p:txBody>
-      </p:sp>
-    </p:spTree>
-    <p:extLst>
-      <p:ext uri="{BB962C8B-B14F-4D97-AF65-F5344CB8AC3E}">
-        <p14:creationId xmlns:p14="http://schemas.microsoft.com/office/powerpoint/2010/main" val="1212999818"/>
       </p:ext>
     </p:extLst>
   </p:cSld>
@@ -4253,9 +2322,9 @@
 </p:sldLayout>
 </file>
 
-<file path=ppt/slideLayouts/slideLayout8.xml><?xml version="1.0" encoding="utf-8"?>
-<p:sldLayout xmlns:a="http://schemas.openxmlformats.org/drawingml/2006/main" xmlns:r="http://schemas.openxmlformats.org/officeDocument/2006/relationships" xmlns:p="http://schemas.openxmlformats.org/presentationml/2006/main" type="objTx" preserve="1">
-  <p:cSld name="Content with Caption">
+<file path=ppt/slideLayouts/slideLayout9.xml><?xml version="1.0" encoding="utf-8"?>
+<p:sldLayout xmlns:a="http://schemas.openxmlformats.org/drawingml/2006/main" xmlns:r="http://schemas.openxmlformats.org/officeDocument/2006/relationships" xmlns:p="http://schemas.openxmlformats.org/presentationml/2006/main" type="picTx" preserve="1">
+  <p:cSld name="Picture with Caption">
     <p:spTree>
       <p:nvGrpSpPr>
         <p:cNvPr id="1" name=""/>
@@ -4282,8 +2351,8 @@
         </p:nvSpPr>
         <p:spPr>
           <a:xfrm>
-            <a:off x="457200" y="273050"/>
-            <a:ext cx="3008313" cy="1162050"/>
+            <a:off x="1792288" y="4800600"/>
+            <a:ext cx="5486400" cy="566738"/>
           </a:xfrm>
         </p:spPr>
         <p:txBody>
@@ -4304,85 +2373,61 @@
       </p:sp>
       <p:sp>
         <p:nvSpPr>
-          <p:cNvPr id="3" name="Content Placeholder 2"/>
+          <p:cNvPr id="3" name="Picture Placeholder 2"/>
           <p:cNvSpPr>
             <a:spLocks noGrp="1"/>
           </p:cNvSpPr>
           <p:nvPr>
-            <p:ph idx="1"/>
+            <p:ph type="pic" idx="1"/>
           </p:nvPr>
         </p:nvSpPr>
         <p:spPr>
           <a:xfrm>
-            <a:off x="3575050" y="273050"/>
-            <a:ext cx="5111750" cy="5853113"/>
+            <a:off x="1792288" y="612775"/>
+            <a:ext cx="5486400" cy="4114800"/>
           </a:xfrm>
         </p:spPr>
         <p:txBody>
           <a:bodyPr/>
           <a:lstStyle>
-            <a:lvl1pPr>
+            <a:lvl1pPr marL="0" indent="0">
+              <a:buNone/>
               <a:defRPr sz="3200"/>
             </a:lvl1pPr>
-            <a:lvl2pPr>
+            <a:lvl2pPr marL="457200" indent="0">
+              <a:buNone/>
               <a:defRPr sz="2800"/>
             </a:lvl2pPr>
-            <a:lvl3pPr>
+            <a:lvl3pPr marL="914400" indent="0">
+              <a:buNone/>
               <a:defRPr sz="2400"/>
             </a:lvl3pPr>
-            <a:lvl4pPr>
+            <a:lvl4pPr marL="1371600" indent="0">
+              <a:buNone/>
               <a:defRPr sz="2000"/>
             </a:lvl4pPr>
-            <a:lvl5pPr>
+            <a:lvl5pPr marL="1828800" indent="0">
+              <a:buNone/>
               <a:defRPr sz="2000"/>
             </a:lvl5pPr>
-            <a:lvl6pPr>
+            <a:lvl6pPr marL="2286000" indent="0">
+              <a:buNone/>
               <a:defRPr sz="2000"/>
             </a:lvl6pPr>
-            <a:lvl7pPr>
+            <a:lvl7pPr marL="2743200" indent="0">
+              <a:buNone/>
               <a:defRPr sz="2000"/>
             </a:lvl7pPr>
-            <a:lvl8pPr>
+            <a:lvl8pPr marL="3200400" indent="0">
+              <a:buNone/>
               <a:defRPr sz="2000"/>
             </a:lvl8pPr>
-            <a:lvl9pPr>
+            <a:lvl9pPr marL="3657600" indent="0">
+              <a:buNone/>
               <a:defRPr sz="2000"/>
             </a:lvl9pPr>
           </a:lstStyle>
           <a:p>
-            <a:pPr lvl="0"/>
-            <a:r>
-              <a:rPr lang="en-US" smtClean="0"/>
-              <a:t>Click to edit Master text styles</a:t>
-            </a:r>
-          </a:p>
-          <a:p>
-            <a:pPr lvl="1"/>
-            <a:r>
-              <a:rPr lang="en-US" smtClean="0"/>
-              <a:t>Second level</a:t>
-            </a:r>
-          </a:p>
-          <a:p>
-            <a:pPr lvl="2"/>
-            <a:r>
-              <a:rPr lang="en-US" smtClean="0"/>
-              <a:t>Third level</a:t>
-            </a:r>
-          </a:p>
-          <a:p>
-            <a:pPr lvl="3"/>
-            <a:r>
-              <a:rPr lang="en-US" smtClean="0"/>
-              <a:t>Fourth level</a:t>
-            </a:r>
-          </a:p>
-          <a:p>
-            <a:pPr lvl="4"/>
-            <a:r>
-              <a:rPr lang="en-US" smtClean="0"/>
-              <a:t>Fifth level</a:t>
-            </a:r>
             <a:endParaRPr lang="en-US"/>
           </a:p>
         </p:txBody>
@@ -4399,8 +2444,8 @@
         </p:nvSpPr>
         <p:spPr>
           <a:xfrm>
-            <a:off x="457200" y="1435100"/>
-            <a:ext cx="3008313" cy="4691063"/>
+            <a:off x="1792288" y="5367338"/>
+            <a:ext cx="5486400" cy="804862"/>
           </a:xfrm>
         </p:spPr>
         <p:txBody>
@@ -4520,512 +2565,6 @@
     </p:spTree>
     <p:extLst>
       <p:ext uri="{BB962C8B-B14F-4D97-AF65-F5344CB8AC3E}">
-        <p14:creationId xmlns:p14="http://schemas.microsoft.com/office/powerpoint/2010/main" val="1840726560"/>
-      </p:ext>
-    </p:extLst>
-  </p:cSld>
-  <p:clrMapOvr>
-    <a:masterClrMapping/>
-  </p:clrMapOvr>
-</p:sldLayout>
-</file>
-
-<file path=ppt/slideLayouts/slideLayout9.xml><?xml version="1.0" encoding="utf-8"?>
-<p:sldLayout xmlns:a="http://schemas.openxmlformats.org/drawingml/2006/main" xmlns:r="http://schemas.openxmlformats.org/officeDocument/2006/relationships" xmlns:p="http://schemas.openxmlformats.org/presentationml/2006/main" type="picTx" preserve="1">
-  <p:cSld name="Picture with Caption">
-    <p:spTree>
-      <p:nvGrpSpPr>
-        <p:cNvPr id="1" name=""/>
-        <p:cNvGrpSpPr/>
-        <p:nvPr/>
-      </p:nvGrpSpPr>
-      <p:grpSpPr>
-        <a:xfrm>
-          <a:off x="0" y="0"/>
-          <a:ext cx="0" cy="0"/>
-          <a:chOff x="0" y="0"/>
-          <a:chExt cx="0" cy="0"/>
-        </a:xfrm>
-      </p:grpSpPr>
-      <p:sp>
-        <p:nvSpPr>
-          <p:cNvPr id="2" name="Title 1"/>
-          <p:cNvSpPr>
-            <a:spLocks noGrp="1"/>
-          </p:cNvSpPr>
-          <p:nvPr>
-            <p:ph type="title"/>
-          </p:nvPr>
-        </p:nvSpPr>
-        <p:spPr>
-          <a:xfrm>
-            <a:off x="1792288" y="4800600"/>
-            <a:ext cx="5486400" cy="566738"/>
-          </a:xfrm>
-        </p:spPr>
-        <p:txBody>
-          <a:bodyPr anchor="b"/>
-          <a:lstStyle>
-            <a:lvl1pPr algn="l">
-              <a:defRPr sz="2000" b="1"/>
-            </a:lvl1pPr>
-          </a:lstStyle>
-          <a:p>
-            <a:r>
-              <a:rPr lang="en-US" smtClean="0"/>
-              <a:t>Click to edit Master title style</a:t>
-            </a:r>
-            <a:endParaRPr lang="en-US"/>
-          </a:p>
-        </p:txBody>
-      </p:sp>
-      <p:sp>
-        <p:nvSpPr>
-          <p:cNvPr id="3" name="Picture Placeholder 2"/>
-          <p:cNvSpPr>
-            <a:spLocks noGrp="1"/>
-          </p:cNvSpPr>
-          <p:nvPr>
-            <p:ph type="pic" idx="1"/>
-          </p:nvPr>
-        </p:nvSpPr>
-        <p:spPr>
-          <a:xfrm>
-            <a:off x="1792288" y="612775"/>
-            <a:ext cx="5486400" cy="4114800"/>
-          </a:xfrm>
-        </p:spPr>
-        <p:txBody>
-          <a:bodyPr/>
-          <a:lstStyle>
-            <a:lvl1pPr marL="0" indent="0">
-              <a:buNone/>
-              <a:defRPr sz="3200"/>
-            </a:lvl1pPr>
-            <a:lvl2pPr marL="457200" indent="0">
-              <a:buNone/>
-              <a:defRPr sz="2800"/>
-            </a:lvl2pPr>
-            <a:lvl3pPr marL="914400" indent="0">
-              <a:buNone/>
-              <a:defRPr sz="2400"/>
-            </a:lvl3pPr>
-            <a:lvl4pPr marL="1371600" indent="0">
-              <a:buNone/>
-              <a:defRPr sz="2000"/>
-            </a:lvl4pPr>
-            <a:lvl5pPr marL="1828800" indent="0">
-              <a:buNone/>
-              <a:defRPr sz="2000"/>
-            </a:lvl5pPr>
-            <a:lvl6pPr marL="2286000" indent="0">
-              <a:buNone/>
-              <a:defRPr sz="2000"/>
-            </a:lvl6pPr>
-            <a:lvl7pPr marL="2743200" indent="0">
-              <a:buNone/>
-              <a:defRPr sz="2000"/>
-            </a:lvl7pPr>
-            <a:lvl8pPr marL="3200400" indent="0">
-              <a:buNone/>
-              <a:defRPr sz="2000"/>
-            </a:lvl8pPr>
-            <a:lvl9pPr marL="3657600" indent="0">
-              <a:buNone/>
-              <a:defRPr sz="2000"/>
-            </a:lvl9pPr>
-          </a:lstStyle>
-          <a:p>
-            <a:endParaRPr lang="en-US"/>
-          </a:p>
-        </p:txBody>
-      </p:sp>
-      <p:sp>
-        <p:nvSpPr>
-          <p:cNvPr id="4" name="Text Placeholder 3"/>
-          <p:cNvSpPr>
-            <a:spLocks noGrp="1"/>
-          </p:cNvSpPr>
-          <p:nvPr>
-            <p:ph type="body" sz="half" idx="2"/>
-          </p:nvPr>
-        </p:nvSpPr>
-        <p:spPr>
-          <a:xfrm>
-            <a:off x="1792288" y="5367338"/>
-            <a:ext cx="5486400" cy="804862"/>
-          </a:xfrm>
-        </p:spPr>
-        <p:txBody>
-          <a:bodyPr/>
-          <a:lstStyle>
-            <a:lvl1pPr marL="0" indent="0">
-              <a:buNone/>
-              <a:defRPr sz="1400"/>
-            </a:lvl1pPr>
-            <a:lvl2pPr marL="457200" indent="0">
-              <a:buNone/>
-              <a:defRPr sz="1200"/>
-            </a:lvl2pPr>
-            <a:lvl3pPr marL="914400" indent="0">
-              <a:buNone/>
-              <a:defRPr sz="1000"/>
-            </a:lvl3pPr>
-            <a:lvl4pPr marL="1371600" indent="0">
-              <a:buNone/>
-              <a:defRPr sz="900"/>
-            </a:lvl4pPr>
-            <a:lvl5pPr marL="1828800" indent="0">
-              <a:buNone/>
-              <a:defRPr sz="900"/>
-            </a:lvl5pPr>
-            <a:lvl6pPr marL="2286000" indent="0">
-              <a:buNone/>
-              <a:defRPr sz="900"/>
-            </a:lvl6pPr>
-            <a:lvl7pPr marL="2743200" indent="0">
-              <a:buNone/>
-              <a:defRPr sz="900"/>
-            </a:lvl7pPr>
-            <a:lvl8pPr marL="3200400" indent="0">
-              <a:buNone/>
-              <a:defRPr sz="900"/>
-            </a:lvl8pPr>
-            <a:lvl9pPr marL="3657600" indent="0">
-              <a:buNone/>
-              <a:defRPr sz="900"/>
-            </a:lvl9pPr>
-          </a:lstStyle>
-          <a:p>
-            <a:pPr lvl="0"/>
-            <a:r>
-              <a:rPr lang="en-US" smtClean="0"/>
-              <a:t>Click to edit Master text styles</a:t>
-            </a:r>
-          </a:p>
-        </p:txBody>
-      </p:sp>
-      <p:sp>
-        <p:nvSpPr>
-          <p:cNvPr id="5" name="Date Placeholder 4"/>
-          <p:cNvSpPr>
-            <a:spLocks noGrp="1"/>
-          </p:cNvSpPr>
-          <p:nvPr>
-            <p:ph type="dt" sz="half" idx="10"/>
-          </p:nvPr>
-        </p:nvSpPr>
-        <p:spPr/>
-        <p:txBody>
-          <a:bodyPr/>
-          <a:lstStyle/>
-          <a:p>
-            <a:fld id="{5BCAD085-E8A6-8845-BD4E-CB4CCA059FC4}" type="datetimeFigureOut">
-              <a:rPr lang="en-US" smtClean="0"/>
-              <a:t>1/27/13</a:t>
-            </a:fld>
-            <a:endParaRPr lang="en-US"/>
-          </a:p>
-        </p:txBody>
-      </p:sp>
-      <p:sp>
-        <p:nvSpPr>
-          <p:cNvPr id="6" name="Footer Placeholder 5"/>
-          <p:cNvSpPr>
-            <a:spLocks noGrp="1"/>
-          </p:cNvSpPr>
-          <p:nvPr>
-            <p:ph type="ftr" sz="quarter" idx="11"/>
-          </p:nvPr>
-        </p:nvSpPr>
-        <p:spPr/>
-        <p:txBody>
-          <a:bodyPr/>
-          <a:lstStyle/>
-          <a:p>
-            <a:endParaRPr lang="en-US"/>
-          </a:p>
-        </p:txBody>
-      </p:sp>
-      <p:sp>
-        <p:nvSpPr>
-          <p:cNvPr id="7" name="Slide Number Placeholder 6"/>
-          <p:cNvSpPr>
-            <a:spLocks noGrp="1"/>
-          </p:cNvSpPr>
-          <p:nvPr>
-            <p:ph type="sldNum" sz="quarter" idx="12"/>
-          </p:nvPr>
-        </p:nvSpPr>
-        <p:spPr/>
-        <p:txBody>
-          <a:bodyPr/>
-          <a:lstStyle/>
-          <a:p>
-            <a:fld id="{C1FF6DA9-008F-8B48-92A6-B652298478BF}" type="slidenum">
-              <a:rPr lang="en-US" smtClean="0"/>
-              <a:t>‹#›</a:t>
-            </a:fld>
-            <a:endParaRPr lang="en-US"/>
-          </a:p>
-        </p:txBody>
-      </p:sp>
-    </p:spTree>
-    <p:extLst>
-      <p:ext uri="{BB962C8B-B14F-4D97-AF65-F5344CB8AC3E}">
-        <p14:creationId xmlns:p14="http://schemas.microsoft.com/office/powerpoint/2010/main" val="3889236939"/>
-      </p:ext>
-    </p:extLst>
-  </p:cSld>
-  <p:clrMapOvr>
-    <a:masterClrMapping/>
-  </p:clrMapOvr>
-</p:sldLayout>
-</file>
-
-<file path=ppt/slideLayouts/slideLayout9.xml><?xml version="1.0" encoding="utf-8"?>
-<p:sldLayout xmlns:a="http://schemas.openxmlformats.org/drawingml/2006/main" xmlns:r="http://schemas.openxmlformats.org/officeDocument/2006/relationships" xmlns:p="http://schemas.openxmlformats.org/presentationml/2006/main" type="picTx" preserve="1">
-  <p:cSld name="Picture with Caption">
-    <p:spTree>
-      <p:nvGrpSpPr>
-        <p:cNvPr id="1" name=""/>
-        <p:cNvGrpSpPr/>
-        <p:nvPr/>
-      </p:nvGrpSpPr>
-      <p:grpSpPr>
-        <a:xfrm>
-          <a:off x="0" y="0"/>
-          <a:ext cx="0" cy="0"/>
-          <a:chOff x="0" y="0"/>
-          <a:chExt cx="0" cy="0"/>
-        </a:xfrm>
-      </p:grpSpPr>
-      <p:sp>
-        <p:nvSpPr>
-          <p:cNvPr id="2" name="Title 1"/>
-          <p:cNvSpPr>
-            <a:spLocks noGrp="1"/>
-          </p:cNvSpPr>
-          <p:nvPr>
-            <p:ph type="title"/>
-          </p:nvPr>
-        </p:nvSpPr>
-        <p:spPr>
-          <a:xfrm>
-            <a:off x="1792288" y="4800600"/>
-            <a:ext cx="5486400" cy="566738"/>
-          </a:xfrm>
-        </p:spPr>
-        <p:txBody>
-          <a:bodyPr anchor="b"/>
-          <a:lstStyle>
-            <a:lvl1pPr algn="l">
-              <a:defRPr sz="2000" b="1"/>
-            </a:lvl1pPr>
-          </a:lstStyle>
-          <a:p>
-            <a:r>
-              <a:rPr lang="en-US" smtClean="0"/>
-              <a:t>Click to edit Master title style</a:t>
-            </a:r>
-            <a:endParaRPr lang="en-US"/>
-          </a:p>
-        </p:txBody>
-      </p:sp>
-      <p:sp>
-        <p:nvSpPr>
-          <p:cNvPr id="3" name="Picture Placeholder 2"/>
-          <p:cNvSpPr>
-            <a:spLocks noGrp="1"/>
-          </p:cNvSpPr>
-          <p:nvPr>
-            <p:ph type="pic" idx="1"/>
-          </p:nvPr>
-        </p:nvSpPr>
-        <p:spPr>
-          <a:xfrm>
-            <a:off x="1792288" y="612775"/>
-            <a:ext cx="5486400" cy="4114800"/>
-          </a:xfrm>
-        </p:spPr>
-        <p:txBody>
-          <a:bodyPr/>
-          <a:lstStyle>
-            <a:lvl1pPr marL="0" indent="0">
-              <a:buNone/>
-              <a:defRPr sz="3200"/>
-            </a:lvl1pPr>
-            <a:lvl2pPr marL="457200" indent="0">
-              <a:buNone/>
-              <a:defRPr sz="2800"/>
-            </a:lvl2pPr>
-            <a:lvl3pPr marL="914400" indent="0">
-              <a:buNone/>
-              <a:defRPr sz="2400"/>
-            </a:lvl3pPr>
-            <a:lvl4pPr marL="1371600" indent="0">
-              <a:buNone/>
-              <a:defRPr sz="2000"/>
-            </a:lvl4pPr>
-            <a:lvl5pPr marL="1828800" indent="0">
-              <a:buNone/>
-              <a:defRPr sz="2000"/>
-            </a:lvl5pPr>
-            <a:lvl6pPr marL="2286000" indent="0">
-              <a:buNone/>
-              <a:defRPr sz="2000"/>
-            </a:lvl6pPr>
-            <a:lvl7pPr marL="2743200" indent="0">
-              <a:buNone/>
-              <a:defRPr sz="2000"/>
-            </a:lvl7pPr>
-            <a:lvl8pPr marL="3200400" indent="0">
-              <a:buNone/>
-              <a:defRPr sz="2000"/>
-            </a:lvl8pPr>
-            <a:lvl9pPr marL="3657600" indent="0">
-              <a:buNone/>
-              <a:defRPr sz="2000"/>
-            </a:lvl9pPr>
-          </a:lstStyle>
-          <a:p>
-            <a:endParaRPr lang="en-US"/>
-          </a:p>
-        </p:txBody>
-      </p:sp>
-      <p:sp>
-        <p:nvSpPr>
-          <p:cNvPr id="4" name="Text Placeholder 3"/>
-          <p:cNvSpPr>
-            <a:spLocks noGrp="1"/>
-          </p:cNvSpPr>
-          <p:nvPr>
-            <p:ph type="body" sz="half" idx="2"/>
-          </p:nvPr>
-        </p:nvSpPr>
-        <p:spPr>
-          <a:xfrm>
-            <a:off x="1792288" y="5367338"/>
-            <a:ext cx="5486400" cy="804862"/>
-          </a:xfrm>
-        </p:spPr>
-        <p:txBody>
-          <a:bodyPr/>
-          <a:lstStyle>
-            <a:lvl1pPr marL="0" indent="0">
-              <a:buNone/>
-              <a:defRPr sz="1400"/>
-            </a:lvl1pPr>
-            <a:lvl2pPr marL="457200" indent="0">
-              <a:buNone/>
-              <a:defRPr sz="1200"/>
-            </a:lvl2pPr>
-            <a:lvl3pPr marL="914400" indent="0">
-              <a:buNone/>
-              <a:defRPr sz="1000"/>
-            </a:lvl3pPr>
-            <a:lvl4pPr marL="1371600" indent="0">
-              <a:buNone/>
-              <a:defRPr sz="900"/>
-            </a:lvl4pPr>
-            <a:lvl5pPr marL="1828800" indent="0">
-              <a:buNone/>
-              <a:defRPr sz="900"/>
-            </a:lvl5pPr>
-            <a:lvl6pPr marL="2286000" indent="0">
-              <a:buNone/>
-              <a:defRPr sz="900"/>
-            </a:lvl6pPr>
-            <a:lvl7pPr marL="2743200" indent="0">
-              <a:buNone/>
-              <a:defRPr sz="900"/>
-            </a:lvl7pPr>
-            <a:lvl8pPr marL="3200400" indent="0">
-              <a:buNone/>
-              <a:defRPr sz="900"/>
-            </a:lvl8pPr>
-            <a:lvl9pPr marL="3657600" indent="0">
-              <a:buNone/>
-              <a:defRPr sz="900"/>
-            </a:lvl9pPr>
-          </a:lstStyle>
-          <a:p>
-            <a:pPr lvl="0"/>
-            <a:r>
-              <a:rPr lang="en-US" smtClean="0"/>
-              <a:t>Click to edit Master text styles</a:t>
-            </a:r>
-          </a:p>
-        </p:txBody>
-      </p:sp>
-      <p:sp>
-        <p:nvSpPr>
-          <p:cNvPr id="5" name="Date Placeholder 4"/>
-          <p:cNvSpPr>
-            <a:spLocks noGrp="1"/>
-          </p:cNvSpPr>
-          <p:nvPr>
-            <p:ph type="dt" sz="half" idx="10"/>
-          </p:nvPr>
-        </p:nvSpPr>
-        <p:spPr/>
-        <p:txBody>
-          <a:bodyPr/>
-          <a:lstStyle/>
-          <a:p>
-            <a:fld id="{5BCAD085-E8A6-8845-BD4E-CB4CCA059FC4}" type="datetimeFigureOut">
-              <a:rPr lang="en-US" smtClean="0"/>
-              <a:t>1/27/13</a:t>
-            </a:fld>
-            <a:endParaRPr lang="en-US"/>
-          </a:p>
-        </p:txBody>
-      </p:sp>
-      <p:sp>
-        <p:nvSpPr>
-          <p:cNvPr id="6" name="Footer Placeholder 5"/>
-          <p:cNvSpPr>
-            <a:spLocks noGrp="1"/>
-          </p:cNvSpPr>
-          <p:nvPr>
-            <p:ph type="ftr" sz="quarter" idx="11"/>
-          </p:nvPr>
-        </p:nvSpPr>
-        <p:spPr/>
-        <p:txBody>
-          <a:bodyPr/>
-          <a:lstStyle/>
-          <a:p>
-            <a:endParaRPr lang="en-US"/>
-          </a:p>
-        </p:txBody>
-      </p:sp>
-      <p:sp>
-        <p:nvSpPr>
-          <p:cNvPr id="7" name="Slide Number Placeholder 6"/>
-          <p:cNvSpPr>
-            <a:spLocks noGrp="1"/>
-          </p:cNvSpPr>
-          <p:nvPr>
-            <p:ph type="sldNum" sz="quarter" idx="12"/>
-          </p:nvPr>
-        </p:nvSpPr>
-        <p:spPr/>
-        <p:txBody>
-          <a:bodyPr/>
-          <a:lstStyle/>
-          <a:p>
-            <a:fld id="{C1FF6DA9-008F-8B48-92A6-B652298478BF}" type="slidenum">
-              <a:rPr lang="en-US" smtClean="0"/>
-              <a:t>‹#›</a:t>
-            </a:fld>
-            <a:endParaRPr lang="en-US"/>
-          </a:p>
-        </p:txBody>
-      </p:sp>
-    </p:spTree>
-    <p:extLst>
-      <p:ext uri="{BB962C8B-B14F-4D97-AF65-F5344CB8AC3E}">
         <p14:creationId xmlns:p14="http://schemas.microsoft.com/office/powerpoint/2010/main" val="3889236939"/>
       </p:ext>
     </p:extLst>
@@ -5546,516 +3085,6 @@
 </p:sldMaster>
 </file>
 
-<file path=ppt/slideMasters/slideMaster1.xml><?xml version="1.0" encoding="utf-8"?>
-<p:sldMaster xmlns:a="http://schemas.openxmlformats.org/drawingml/2006/main" xmlns:r="http://schemas.openxmlformats.org/officeDocument/2006/relationships" xmlns:p="http://schemas.openxmlformats.org/presentationml/2006/main">
-  <p:cSld>
-    <p:bg>
-      <p:bgRef idx="1001">
-        <a:schemeClr val="bg1"/>
-      </p:bgRef>
-    </p:bg>
-    <p:spTree>
-      <p:nvGrpSpPr>
-        <p:cNvPr id="1" name=""/>
-        <p:cNvGrpSpPr/>
-        <p:nvPr/>
-      </p:nvGrpSpPr>
-      <p:grpSpPr>
-        <a:xfrm>
-          <a:off x="0" y="0"/>
-          <a:ext cx="0" cy="0"/>
-          <a:chOff x="0" y="0"/>
-          <a:chExt cx="0" cy="0"/>
-        </a:xfrm>
-      </p:grpSpPr>
-      <p:sp>
-        <p:nvSpPr>
-          <p:cNvPr id="2" name="Title Placeholder 1"/>
-          <p:cNvSpPr>
-            <a:spLocks noGrp="1"/>
-          </p:cNvSpPr>
-          <p:nvPr>
-            <p:ph type="title"/>
-          </p:nvPr>
-        </p:nvSpPr>
-        <p:spPr>
-          <a:xfrm>
-            <a:off x="457200" y="274638"/>
-            <a:ext cx="8229600" cy="1143000"/>
-          </a:xfrm>
-          <a:prstGeom prst="rect">
-            <a:avLst/>
-          </a:prstGeom>
-        </p:spPr>
-        <p:txBody>
-          <a:bodyPr vert="horz" lIns="91440" tIns="45720" rIns="91440" bIns="45720" rtlCol="0" anchor="ctr">
-            <a:normAutofit/>
-          </a:bodyPr>
-          <a:lstStyle/>
-          <a:p>
-            <a:r>
-              <a:rPr lang="en-US" smtClean="0"/>
-              <a:t>Click to edit Master title style</a:t>
-            </a:r>
-            <a:endParaRPr lang="en-US"/>
-          </a:p>
-        </p:txBody>
-      </p:sp>
-      <p:sp>
-        <p:nvSpPr>
-          <p:cNvPr id="3" name="Text Placeholder 2"/>
-          <p:cNvSpPr>
-            <a:spLocks noGrp="1"/>
-          </p:cNvSpPr>
-          <p:nvPr>
-            <p:ph type="body" idx="1"/>
-          </p:nvPr>
-        </p:nvSpPr>
-        <p:spPr>
-          <a:xfrm>
-            <a:off x="457200" y="1600200"/>
-            <a:ext cx="8229600" cy="4525963"/>
-          </a:xfrm>
-          <a:prstGeom prst="rect">
-            <a:avLst/>
-          </a:prstGeom>
-        </p:spPr>
-        <p:txBody>
-          <a:bodyPr vert="horz" lIns="91440" tIns="45720" rIns="91440" bIns="45720" rtlCol="0">
-            <a:normAutofit/>
-          </a:bodyPr>
-          <a:lstStyle/>
-          <a:p>
-            <a:pPr lvl="0"/>
-            <a:r>
-              <a:rPr lang="en-US" smtClean="0"/>
-              <a:t>Click to edit Master text styles</a:t>
-            </a:r>
-          </a:p>
-          <a:p>
-            <a:pPr lvl="1"/>
-            <a:r>
-              <a:rPr lang="en-US" smtClean="0"/>
-              <a:t>Second level</a:t>
-            </a:r>
-          </a:p>
-          <a:p>
-            <a:pPr lvl="2"/>
-            <a:r>
-              <a:rPr lang="en-US" smtClean="0"/>
-              <a:t>Third level</a:t>
-            </a:r>
-          </a:p>
-          <a:p>
-            <a:pPr lvl="3"/>
-            <a:r>
-              <a:rPr lang="en-US" smtClean="0"/>
-              <a:t>Fourth level</a:t>
-            </a:r>
-          </a:p>
-          <a:p>
-            <a:pPr lvl="4"/>
-            <a:r>
-              <a:rPr lang="en-US" smtClean="0"/>
-              <a:t>Fifth level</a:t>
-            </a:r>
-            <a:endParaRPr lang="en-US"/>
-          </a:p>
-        </p:txBody>
-      </p:sp>
-      <p:sp>
-        <p:nvSpPr>
-          <p:cNvPr id="4" name="Date Placeholder 3"/>
-          <p:cNvSpPr>
-            <a:spLocks noGrp="1"/>
-          </p:cNvSpPr>
-          <p:nvPr>
-            <p:ph type="dt" sz="half" idx="2"/>
-          </p:nvPr>
-        </p:nvSpPr>
-        <p:spPr>
-          <a:xfrm>
-            <a:off x="457200" y="6356350"/>
-            <a:ext cx="2133600" cy="365125"/>
-          </a:xfrm>
-          <a:prstGeom prst="rect">
-            <a:avLst/>
-          </a:prstGeom>
-        </p:spPr>
-        <p:txBody>
-          <a:bodyPr vert="horz" lIns="91440" tIns="45720" rIns="91440" bIns="45720" rtlCol="0" anchor="ctr"/>
-          <a:lstStyle>
-            <a:lvl1pPr algn="l">
-              <a:defRPr sz="1200">
-                <a:solidFill>
-                  <a:schemeClr val="tx1">
-                    <a:tint val="75000"/>
-                  </a:schemeClr>
-                </a:solidFill>
-              </a:defRPr>
-            </a:lvl1pPr>
-          </a:lstStyle>
-          <a:p>
-            <a:fld id="{5BCAD085-E8A6-8845-BD4E-CB4CCA059FC4}" type="datetimeFigureOut">
-              <a:rPr lang="en-US" smtClean="0"/>
-              <a:t>1/27/13</a:t>
-            </a:fld>
-            <a:endParaRPr lang="en-US"/>
-          </a:p>
-        </p:txBody>
-      </p:sp>
-      <p:sp>
-        <p:nvSpPr>
-          <p:cNvPr id="5" name="Footer Placeholder 4"/>
-          <p:cNvSpPr>
-            <a:spLocks noGrp="1"/>
-          </p:cNvSpPr>
-          <p:nvPr>
-            <p:ph type="ftr" sz="quarter" idx="3"/>
-          </p:nvPr>
-        </p:nvSpPr>
-        <p:spPr>
-          <a:xfrm>
-            <a:off x="3124200" y="6356350"/>
-            <a:ext cx="2895600" cy="365125"/>
-          </a:xfrm>
-          <a:prstGeom prst="rect">
-            <a:avLst/>
-          </a:prstGeom>
-        </p:spPr>
-        <p:txBody>
-          <a:bodyPr vert="horz" lIns="91440" tIns="45720" rIns="91440" bIns="45720" rtlCol="0" anchor="ctr"/>
-          <a:lstStyle>
-            <a:lvl1pPr algn="ctr">
-              <a:defRPr sz="1200">
-                <a:solidFill>
-                  <a:schemeClr val="tx1">
-                    <a:tint val="75000"/>
-                  </a:schemeClr>
-                </a:solidFill>
-              </a:defRPr>
-            </a:lvl1pPr>
-          </a:lstStyle>
-          <a:p>
-            <a:endParaRPr lang="en-US"/>
-          </a:p>
-        </p:txBody>
-      </p:sp>
-      <p:sp>
-        <p:nvSpPr>
-          <p:cNvPr id="6" name="Slide Number Placeholder 5"/>
-          <p:cNvSpPr>
-            <a:spLocks noGrp="1"/>
-          </p:cNvSpPr>
-          <p:nvPr>
-            <p:ph type="sldNum" sz="quarter" idx="4"/>
-          </p:nvPr>
-        </p:nvSpPr>
-        <p:spPr>
-          <a:xfrm>
-            <a:off x="6553200" y="6356350"/>
-            <a:ext cx="2133600" cy="365125"/>
-          </a:xfrm>
-          <a:prstGeom prst="rect">
-            <a:avLst/>
-          </a:prstGeom>
-        </p:spPr>
-        <p:txBody>
-          <a:bodyPr vert="horz" lIns="91440" tIns="45720" rIns="91440" bIns="45720" rtlCol="0" anchor="ctr"/>
-          <a:lstStyle>
-            <a:lvl1pPr algn="r">
-              <a:defRPr sz="1200">
-                <a:solidFill>
-                  <a:schemeClr val="tx1">
-                    <a:tint val="75000"/>
-                  </a:schemeClr>
-                </a:solidFill>
-              </a:defRPr>
-            </a:lvl1pPr>
-          </a:lstStyle>
-          <a:p>
-            <a:fld id="{C1FF6DA9-008F-8B48-92A6-B652298478BF}" type="slidenum">
-              <a:rPr lang="en-US" smtClean="0"/>
-              <a:t>‹#›</a:t>
-            </a:fld>
-            <a:endParaRPr lang="en-US"/>
-          </a:p>
-        </p:txBody>
-      </p:sp>
-    </p:spTree>
-    <p:extLst>
-      <p:ext uri="{BB962C8B-B14F-4D97-AF65-F5344CB8AC3E}">
-        <p14:creationId xmlns:p14="http://schemas.microsoft.com/office/powerpoint/2010/main" val="2209977519"/>
-      </p:ext>
-    </p:extLst>
-  </p:cSld>
-  <p:clrMap bg1="lt1" tx1="dk1" bg2="lt2" tx2="dk2" accent1="accent1" accent2="accent2" accent3="accent3" accent4="accent4" accent5="accent5" accent6="accent6" hlink="hlink" folHlink="folHlink"/>
-  <p:sldLayoutIdLst>
-    <p:sldLayoutId id="2147483649" r:id="rId1"/>
-    <p:sldLayoutId id="2147483650" r:id="rId2"/>
-    <p:sldLayoutId id="2147483651" r:id="rId3"/>
-    <p:sldLayoutId id="2147483652" r:id="rId4"/>
-    <p:sldLayoutId id="2147483653" r:id="rId5"/>
-    <p:sldLayoutId id="2147483654" r:id="rId6"/>
-    <p:sldLayoutId id="2147483655" r:id="rId7"/>
-    <p:sldLayoutId id="2147483656" r:id="rId8"/>
-    <p:sldLayoutId id="2147483657" r:id="rId9"/>
-    <p:sldLayoutId id="2147483658" r:id="rId10"/>
-    <p:sldLayoutId id="2147483659" r:id="rId11"/>
-  </p:sldLayoutIdLst>
-  <p:txStyles>
-    <p:titleStyle>
-      <a:lvl1pPr algn="ctr" defTabSz="457200" rtl="0" eaLnBrk="1" latinLnBrk="0" hangingPunct="1">
-        <a:spcBef>
-          <a:spcPct val="0"/>
-        </a:spcBef>
-        <a:buNone/>
-        <a:defRPr sz="4400" kern="1200">
-          <a:solidFill>
-            <a:schemeClr val="tx1"/>
-          </a:solidFill>
-          <a:latin typeface="+mj-lt"/>
-          <a:ea typeface="+mj-ea"/>
-          <a:cs typeface="+mj-cs"/>
-        </a:defRPr>
-      </a:lvl1pPr>
-    </p:titleStyle>
-    <p:bodyStyle>
-      <a:lvl1pPr marL="342900" indent="-342900" algn="l" defTabSz="457200" rtl="0" eaLnBrk="1" latinLnBrk="0" hangingPunct="1">
-        <a:spcBef>
-          <a:spcPct val="20000"/>
-        </a:spcBef>
-        <a:buFont typeface="Arial"/>
-        <a:buChar char="•"/>
-        <a:defRPr sz="3200" kern="1200">
-          <a:solidFill>
-            <a:schemeClr val="tx1"/>
-          </a:solidFill>
-          <a:latin typeface="+mn-lt"/>
-          <a:ea typeface="+mn-ea"/>
-          <a:cs typeface="+mn-cs"/>
-        </a:defRPr>
-      </a:lvl1pPr>
-      <a:lvl2pPr marL="742950" indent="-285750" algn="l" defTabSz="457200" rtl="0" eaLnBrk="1" latinLnBrk="0" hangingPunct="1">
-        <a:spcBef>
-          <a:spcPct val="20000"/>
-        </a:spcBef>
-        <a:buFont typeface="Arial"/>
-        <a:buChar char="–"/>
-        <a:defRPr sz="2800" kern="1200">
-          <a:solidFill>
-            <a:schemeClr val="tx1"/>
-          </a:solidFill>
-          <a:latin typeface="+mn-lt"/>
-          <a:ea typeface="+mn-ea"/>
-          <a:cs typeface="+mn-cs"/>
-        </a:defRPr>
-      </a:lvl2pPr>
-      <a:lvl3pPr marL="1143000" indent="-228600" algn="l" defTabSz="457200" rtl="0" eaLnBrk="1" latinLnBrk="0" hangingPunct="1">
-        <a:spcBef>
-          <a:spcPct val="20000"/>
-        </a:spcBef>
-        <a:buFont typeface="Arial"/>
-        <a:buChar char="•"/>
-        <a:defRPr sz="2400" kern="1200">
-          <a:solidFill>
-            <a:schemeClr val="tx1"/>
-          </a:solidFill>
-          <a:latin typeface="+mn-lt"/>
-          <a:ea typeface="+mn-ea"/>
-          <a:cs typeface="+mn-cs"/>
-        </a:defRPr>
-      </a:lvl3pPr>
-      <a:lvl4pPr marL="1600200" indent="-228600" algn="l" defTabSz="457200" rtl="0" eaLnBrk="1" latinLnBrk="0" hangingPunct="1">
-        <a:spcBef>
-          <a:spcPct val="20000"/>
-        </a:spcBef>
-        <a:buFont typeface="Arial"/>
-        <a:buChar char="–"/>
-        <a:defRPr sz="2000" kern="1200">
-          <a:solidFill>
-            <a:schemeClr val="tx1"/>
-          </a:solidFill>
-          <a:latin typeface="+mn-lt"/>
-          <a:ea typeface="+mn-ea"/>
-          <a:cs typeface="+mn-cs"/>
-        </a:defRPr>
-      </a:lvl4pPr>
-      <a:lvl5pPr marL="2057400" indent="-228600" algn="l" defTabSz="457200" rtl="0" eaLnBrk="1" latinLnBrk="0" hangingPunct="1">
-        <a:spcBef>
-          <a:spcPct val="20000"/>
-        </a:spcBef>
-        <a:buFont typeface="Arial"/>
-        <a:buChar char="»"/>
-        <a:defRPr sz="2000" kern="1200">
-          <a:solidFill>
-            <a:schemeClr val="tx1"/>
-          </a:solidFill>
-          <a:latin typeface="+mn-lt"/>
-          <a:ea typeface="+mn-ea"/>
-          <a:cs typeface="+mn-cs"/>
-        </a:defRPr>
-      </a:lvl5pPr>
-      <a:lvl6pPr marL="2514600" indent="-228600" algn="l" defTabSz="457200" rtl="0" eaLnBrk="1" latinLnBrk="0" hangingPunct="1">
-        <a:spcBef>
-          <a:spcPct val="20000"/>
-        </a:spcBef>
-        <a:buFont typeface="Arial"/>
-        <a:buChar char="•"/>
-        <a:defRPr sz="2000" kern="1200">
-          <a:solidFill>
-            <a:schemeClr val="tx1"/>
-          </a:solidFill>
-          <a:latin typeface="+mn-lt"/>
-          <a:ea typeface="+mn-ea"/>
-          <a:cs typeface="+mn-cs"/>
-        </a:defRPr>
-      </a:lvl6pPr>
-      <a:lvl7pPr marL="2971800" indent="-228600" algn="l" defTabSz="457200" rtl="0" eaLnBrk="1" latinLnBrk="0" hangingPunct="1">
-        <a:spcBef>
-          <a:spcPct val="20000"/>
-        </a:spcBef>
-        <a:buFont typeface="Arial"/>
-        <a:buChar char="•"/>
-        <a:defRPr sz="2000" kern="1200">
-          <a:solidFill>
-            <a:schemeClr val="tx1"/>
-          </a:solidFill>
-          <a:latin typeface="+mn-lt"/>
-          <a:ea typeface="+mn-ea"/>
-          <a:cs typeface="+mn-cs"/>
-        </a:defRPr>
-      </a:lvl7pPr>
-      <a:lvl8pPr marL="3429000" indent="-228600" algn="l" defTabSz="457200" rtl="0" eaLnBrk="1" latinLnBrk="0" hangingPunct="1">
-        <a:spcBef>
-          <a:spcPct val="20000"/>
-        </a:spcBef>
-        <a:buFont typeface="Arial"/>
-        <a:buChar char="•"/>
-        <a:defRPr sz="2000" kern="1200">
-          <a:solidFill>
-            <a:schemeClr val="tx1"/>
-          </a:solidFill>
-          <a:latin typeface="+mn-lt"/>
-          <a:ea typeface="+mn-ea"/>
-          <a:cs typeface="+mn-cs"/>
-        </a:defRPr>
-      </a:lvl8pPr>
-      <a:lvl9pPr marL="3886200" indent="-228600" algn="l" defTabSz="457200" rtl="0" eaLnBrk="1" latinLnBrk="0" hangingPunct="1">
-        <a:spcBef>
-          <a:spcPct val="20000"/>
-        </a:spcBef>
-        <a:buFont typeface="Arial"/>
-        <a:buChar char="•"/>
-        <a:defRPr sz="2000" kern="1200">
-          <a:solidFill>
-            <a:schemeClr val="tx1"/>
-          </a:solidFill>
-          <a:latin typeface="+mn-lt"/>
-          <a:ea typeface="+mn-ea"/>
-          <a:cs typeface="+mn-cs"/>
-        </a:defRPr>
-      </a:lvl9pPr>
-    </p:bodyStyle>
-    <p:otherStyle>
-      <a:defPPr>
-        <a:defRPr lang="en-US"/>
-      </a:defPPr>
-      <a:lvl1pPr marL="0" algn="l" defTabSz="457200" rtl="0" eaLnBrk="1" latinLnBrk="0" hangingPunct="1">
-        <a:defRPr sz="1800" kern="1200">
-          <a:solidFill>
-            <a:schemeClr val="tx1"/>
-          </a:solidFill>
-          <a:latin typeface="+mn-lt"/>
-          <a:ea typeface="+mn-ea"/>
-          <a:cs typeface="+mn-cs"/>
-        </a:defRPr>
-      </a:lvl1pPr>
-      <a:lvl2pPr marL="457200" algn="l" defTabSz="457200" rtl="0" eaLnBrk="1" latinLnBrk="0" hangingPunct="1">
-        <a:defRPr sz="1800" kern="1200">
-          <a:solidFill>
-            <a:schemeClr val="tx1"/>
-          </a:solidFill>
-          <a:latin typeface="+mn-lt"/>
-          <a:ea typeface="+mn-ea"/>
-          <a:cs typeface="+mn-cs"/>
-        </a:defRPr>
-      </a:lvl2pPr>
-      <a:lvl3pPr marL="914400" algn="l" defTabSz="457200" rtl="0" eaLnBrk="1" latinLnBrk="0" hangingPunct="1">
-        <a:defRPr sz="1800" kern="1200">
-          <a:solidFill>
-            <a:schemeClr val="tx1"/>
-          </a:solidFill>
-          <a:latin typeface="+mn-lt"/>
-          <a:ea typeface="+mn-ea"/>
-          <a:cs typeface="+mn-cs"/>
-        </a:defRPr>
-      </a:lvl3pPr>
-      <a:lvl4pPr marL="1371600" algn="l" defTabSz="457200" rtl="0" eaLnBrk="1" latinLnBrk="0" hangingPunct="1">
-        <a:defRPr sz="1800" kern="1200">
-          <a:solidFill>
-            <a:schemeClr val="tx1"/>
-          </a:solidFill>
-          <a:latin typeface="+mn-lt"/>
-          <a:ea typeface="+mn-ea"/>
-          <a:cs typeface="+mn-cs"/>
-        </a:defRPr>
-      </a:lvl4pPr>
-      <a:lvl5pPr marL="1828800" algn="l" defTabSz="457200" rtl="0" eaLnBrk="1" latinLnBrk="0" hangingPunct="1">
-        <a:defRPr sz="1800" kern="1200">
-          <a:solidFill>
-            <a:schemeClr val="tx1"/>
-          </a:solidFill>
-          <a:latin typeface="+mn-lt"/>
-          <a:ea typeface="+mn-ea"/>
-          <a:cs typeface="+mn-cs"/>
-        </a:defRPr>
-      </a:lvl5pPr>
-      <a:lvl6pPr marL="2286000" algn="l" defTabSz="457200" rtl="0" eaLnBrk="1" latinLnBrk="0" hangingPunct="1">
-        <a:defRPr sz="1800" kern="1200">
-          <a:solidFill>
-            <a:schemeClr val="tx1"/>
-          </a:solidFill>
-          <a:latin typeface="+mn-lt"/>
-          <a:ea typeface="+mn-ea"/>
-          <a:cs typeface="+mn-cs"/>
-        </a:defRPr>
-      </a:lvl6pPr>
-      <a:lvl7pPr marL="2743200" algn="l" defTabSz="457200" rtl="0" eaLnBrk="1" latinLnBrk="0" hangingPunct="1">
-        <a:defRPr sz="1800" kern="1200">
-          <a:solidFill>
-            <a:schemeClr val="tx1"/>
-          </a:solidFill>
-          <a:latin typeface="+mn-lt"/>
-          <a:ea typeface="+mn-ea"/>
-          <a:cs typeface="+mn-cs"/>
-        </a:defRPr>
-      </a:lvl7pPr>
-      <a:lvl8pPr marL="3200400" algn="l" defTabSz="457200" rtl="0" eaLnBrk="1" latinLnBrk="0" hangingPunct="1">
-        <a:defRPr sz="1800" kern="1200">
-          <a:solidFill>
-            <a:schemeClr val="tx1"/>
-          </a:solidFill>
-          <a:latin typeface="+mn-lt"/>
-          <a:ea typeface="+mn-ea"/>
-          <a:cs typeface="+mn-cs"/>
-        </a:defRPr>
-      </a:lvl8pPr>
-      <a:lvl9pPr marL="3657600" algn="l" defTabSz="457200" rtl="0" eaLnBrk="1" latinLnBrk="0" hangingPunct="1">
-        <a:defRPr sz="1800" kern="1200">
-          <a:solidFill>
-            <a:schemeClr val="tx1"/>
-          </a:solidFill>
-          <a:latin typeface="+mn-lt"/>
-          <a:ea typeface="+mn-ea"/>
-          <a:cs typeface="+mn-cs"/>
-        </a:defRPr>
-      </a:lvl9pPr>
-    </p:otherStyle>
-  </p:txStyles>
-</p:sldMaster>
-</file>
-
 <file path=ppt/slides/slide1.xml><?xml version="1.0" encoding="utf-8"?>
 <p:sld xmlns:a="http://schemas.openxmlformats.org/drawingml/2006/main" xmlns:p="http://schemas.openxmlformats.org/presentationml/2006/main" xmlns:r="http://schemas.openxmlformats.org/officeDocument/2006/relationships">
   <p:cSld>
@@ -6870,7 +3899,7 @@
         <p:spPr>
           <a:xfrm>
             <a:off x="950976" y="2267712"/>
-            <a:ext cx="2999140" cy="3392423"/>
+            <a:ext cx="2999140" cy="2377439"/>
           </a:xfrm>
           <a:prstGeom prst="rect">
             <a:avLst/>
@@ -6962,25 +3991,74 @@
               <a:t>✗  Delayed inventory confirmation (2-3 day lag)</a:t>
             </a:r>
           </a:p>
-          <a:p>
-            <a:pPr>
-              <a:spcBef>
-                <a:spcPts val="800"/>
-              </a:spcBef>
-              <a:spcAft>
-                <a:spcPts val="200"/>
-              </a:spcAft>
-            </a:pPr>
-            <a:r>
-              <a:rPr sz="850" b="1" i="0">
-                <a:solidFill>
-                  <a:srgbClr val="64748B"/>
-                </a:solidFill>
-                <a:latin typeface="Inter"/>
-              </a:rPr>
-              <a:t>BASELINE METRICS</a:t>
-            </a:r>
-          </a:p>
+        </p:txBody>
+      </p:sp>
+      <p:sp>
+        <p:nvSpPr>
+          <p:cNvPr id="13" name="Rounded Rectangle 12"/>
+          <p:cNvSpPr/>
+          <p:nvPr/>
+        </p:nvSpPr>
+        <p:spPr>
+          <a:xfrm>
+            <a:off x="932688" y="4389120"/>
+            <a:ext cx="3035716" cy="1234440"/>
+          </a:xfrm>
+          <a:prstGeom prst="roundRect">
+            <a:avLst/>
+          </a:prstGeom>
+          <a:solidFill>
+            <a:srgbClr val="F1F5F9"/>
+          </a:solidFill>
+          <a:ln w="9525">
+            <a:solidFill>
+              <a:srgbClr val="E2E8F0"/>
+            </a:solidFill>
+          </a:ln>
+        </p:spPr>
+        <p:style>
+          <a:lnRef idx="1">
+            <a:schemeClr val="accent1"/>
+          </a:lnRef>
+          <a:fillRef idx="3">
+            <a:schemeClr val="accent1"/>
+          </a:fillRef>
+          <a:effectRef idx="2">
+            <a:schemeClr val="accent1"/>
+          </a:effectRef>
+          <a:fontRef idx="minor">
+            <a:schemeClr val="lt1"/>
+          </a:fontRef>
+        </p:style>
+        <p:txBody>
+          <a:bodyPr rtlCol="0" anchor="ctr"/>
+          <a:lstStyle/>
+          <a:p>
+            <a:pPr algn="ctr"/>
+          </a:p>
+        </p:txBody>
+      </p:sp>
+      <p:sp>
+        <p:nvSpPr>
+          <p:cNvPr id="14" name="TextBox 13"/>
+          <p:cNvSpPr txBox="1"/>
+          <p:nvPr/>
+        </p:nvSpPr>
+        <p:spPr>
+          <a:xfrm>
+            <a:off x="987552" y="4443983"/>
+            <a:ext cx="2925988" cy="1115568"/>
+          </a:xfrm>
+          <a:prstGeom prst="rect">
+            <a:avLst/>
+          </a:prstGeom>
+          <a:noFill/>
+        </p:spPr>
+        <p:txBody>
+          <a:bodyPr wrap="square" lIns="0" tIns="0" rIns="0" bIns="0">
+            <a:spAutoFit/>
+          </a:bodyPr>
+          <a:lstStyle/>
           <a:p>
             <a:pPr>
               <a:spcAft>
@@ -6988,13 +4066,13 @@
               </a:spcAft>
             </a:pPr>
             <a:r>
-              <a:rPr sz="819" b="1" i="0">
+              <a:rPr sz="850" b="1" i="0">
                 <a:solidFill>
                   <a:srgbClr val="64748B"/>
                 </a:solidFill>
                 <a:latin typeface="Inter"/>
               </a:rPr>
-              <a:t>• WIP Latency: 4.8 Days</a:t>
+              <a:t>BASELINE FRICTION METRICS</a:t>
             </a:r>
           </a:p>
           <a:p>
@@ -7006,11 +4084,11 @@
             <a:r>
               <a:rPr sz="819" b="1" i="0">
                 <a:solidFill>
-                  <a:srgbClr val="64748B"/>
-                </a:solidFill>
-                <a:latin typeface="Inter"/>
-              </a:rPr>
-              <a:t>• Scrap Rate: 4.2%</a:t>
+                  <a:srgbClr val="DC2626"/>
+                </a:solidFill>
+                <a:latin typeface="Inter"/>
+              </a:rPr>
+              <a:t>• WIP Latency: 4.8 Days</a:t>
             </a:r>
           </a:p>
           <a:p>
@@ -7022,7 +4100,23 @@
             <a:r>
               <a:rPr sz="819" b="1" i="0">
                 <a:solidFill>
-                  <a:srgbClr val="64748B"/>
+                  <a:srgbClr val="DC2626"/>
+                </a:solidFill>
+                <a:latin typeface="Inter"/>
+              </a:rPr>
+              <a:t>• Scrap Rate: 4.2%</a:t>
+            </a:r>
+          </a:p>
+          <a:p>
+            <a:pPr>
+              <a:spcAft>
+                <a:spcPts val="200"/>
+              </a:spcAft>
+            </a:pPr>
+            <a:r>
+              <a:rPr sz="819" b="1" i="0">
+                <a:solidFill>
+                  <a:srgbClr val="DC2626"/>
                 </a:solidFill>
                 <a:latin typeface="Inter"/>
               </a:rPr>
@@ -7033,7 +4127,7 @@
       </p:sp>
       <p:sp>
         <p:nvSpPr>
-          <p:cNvPr id="13" name="Right Arrow 12"/>
+          <p:cNvPr id="15" name="Right Arrow 14"/>
           <p:cNvSpPr/>
           <p:nvPr/>
         </p:nvSpPr>
@@ -7076,7 +4170,7 @@
       </p:sp>
       <p:sp>
         <p:nvSpPr>
-          <p:cNvPr id="14" name="Rounded Rectangle 13"/>
+          <p:cNvPr id="16" name="Rounded Rectangle 15"/>
           <p:cNvSpPr/>
           <p:nvPr/>
         </p:nvSpPr>
@@ -7121,7 +4215,7 @@
       </p:sp>
       <p:sp>
         <p:nvSpPr>
-          <p:cNvPr id="15" name="Rectangle 14"/>
+          <p:cNvPr id="17" name="Rectangle 16"/>
           <p:cNvSpPr/>
           <p:nvPr/>
         </p:nvSpPr>
@@ -7177,14 +4271,14 @@
       </p:sp>
       <p:sp>
         <p:nvSpPr>
-          <p:cNvPr id="16" name="TextBox 15"/>
+          <p:cNvPr id="18" name="TextBox 17"/>
           <p:cNvSpPr txBox="1"/>
           <p:nvPr/>
         </p:nvSpPr>
         <p:spPr>
           <a:xfrm>
             <a:off x="4491432" y="2267712"/>
-            <a:ext cx="3428286" cy="3392423"/>
+            <a:ext cx="3428286" cy="2377439"/>
           </a:xfrm>
           <a:prstGeom prst="rect">
             <a:avLst/>
@@ -7276,25 +4370,74 @@
               <a:t>⚙  Unified Industrial Data Fabric &amp; BTP Mesh</a:t>
             </a:r>
           </a:p>
-          <a:p>
-            <a:pPr>
-              <a:spcBef>
-                <a:spcPts val="800"/>
-              </a:spcBef>
-              <a:spcAft>
-                <a:spcPts val="200"/>
-              </a:spcAft>
-            </a:pPr>
-            <a:r>
-              <a:rPr sz="850" b="1" i="0">
-                <a:solidFill>
-                  <a:srgbClr val="0066CC"/>
-                </a:solidFill>
-                <a:latin typeface="Inter"/>
-              </a:rPr>
-              <a:t>ENABLERS &amp; ARCHITECTURE</a:t>
-            </a:r>
-          </a:p>
+        </p:txBody>
+      </p:sp>
+      <p:sp>
+        <p:nvSpPr>
+          <p:cNvPr id="19" name="Rounded Rectangle 18"/>
+          <p:cNvSpPr/>
+          <p:nvPr/>
+        </p:nvSpPr>
+        <p:spPr>
+          <a:xfrm>
+            <a:off x="4473144" y="4389120"/>
+            <a:ext cx="3464862" cy="1234440"/>
+          </a:xfrm>
+          <a:prstGeom prst="roundRect">
+            <a:avLst/>
+          </a:prstGeom>
+          <a:solidFill>
+            <a:srgbClr val="FFFFFF"/>
+          </a:solidFill>
+          <a:ln w="9525">
+            <a:solidFill>
+              <a:srgbClr val="0066CC"/>
+            </a:solidFill>
+          </a:ln>
+        </p:spPr>
+        <p:style>
+          <a:lnRef idx="1">
+            <a:schemeClr val="accent1"/>
+          </a:lnRef>
+          <a:fillRef idx="3">
+            <a:schemeClr val="accent1"/>
+          </a:fillRef>
+          <a:effectRef idx="2">
+            <a:schemeClr val="accent1"/>
+          </a:effectRef>
+          <a:fontRef idx="minor">
+            <a:schemeClr val="lt1"/>
+          </a:fontRef>
+        </p:style>
+        <p:txBody>
+          <a:bodyPr rtlCol="0" anchor="ctr"/>
+          <a:lstStyle/>
+          <a:p>
+            <a:pPr algn="ctr"/>
+          </a:p>
+        </p:txBody>
+      </p:sp>
+      <p:sp>
+        <p:nvSpPr>
+          <p:cNvPr id="20" name="TextBox 19"/>
+          <p:cNvSpPr txBox="1"/>
+          <p:nvPr/>
+        </p:nvSpPr>
+        <p:spPr>
+          <a:xfrm>
+            <a:off x="4528008" y="4443983"/>
+            <a:ext cx="3355134" cy="1115568"/>
+          </a:xfrm>
+          <a:prstGeom prst="rect">
+            <a:avLst/>
+          </a:prstGeom>
+          <a:noFill/>
+        </p:spPr>
+        <p:txBody>
+          <a:bodyPr wrap="square" lIns="0" tIns="0" rIns="0" bIns="0">
+            <a:spAutoFit/>
+          </a:bodyPr>
+          <a:lstStyle/>
           <a:p>
             <a:pPr>
               <a:spcAft>
@@ -7302,13 +4445,13 @@
               </a:spcAft>
             </a:pPr>
             <a:r>
-              <a:rPr sz="819" b="1" i="0">
-                <a:solidFill>
-                  <a:srgbClr val="64748B"/>
-                </a:solidFill>
-                <a:latin typeface="Inter"/>
-              </a:rPr>
-              <a:t>✔ Air-gapped edge buffering</a:t>
+              <a:rPr sz="850" b="1" i="0">
+                <a:solidFill>
+                  <a:srgbClr val="0066CC"/>
+                </a:solidFill>
+                <a:latin typeface="Inter"/>
+              </a:rPr>
+              <a:t>CORE ARCHITECTURAL ENABLERS</a:t>
             </a:r>
           </a:p>
           <a:p>
@@ -7320,11 +4463,11 @@
             <a:r>
               <a:rPr sz="819" b="1" i="0">
                 <a:solidFill>
-                  <a:srgbClr val="64748B"/>
-                </a:solidFill>
-                <a:latin typeface="Inter"/>
-              </a:rPr>
-              <a:t>✔ Deterministic PLC connectors</a:t>
+                  <a:srgbClr val="0F172A"/>
+                </a:solidFill>
+                <a:latin typeface="Inter"/>
+              </a:rPr>
+              <a:t>✔ Air-gapped edge buffering</a:t>
             </a:r>
           </a:p>
           <a:p>
@@ -7336,7 +4479,23 @@
             <a:r>
               <a:rPr sz="819" b="1" i="0">
                 <a:solidFill>
-                  <a:srgbClr val="64748B"/>
+                  <a:srgbClr val="0F172A"/>
+                </a:solidFill>
+                <a:latin typeface="Inter"/>
+              </a:rPr>
+              <a:t>✔ Deterministic PLC connectors</a:t>
+            </a:r>
+          </a:p>
+          <a:p>
+            <a:pPr>
+              <a:spcAft>
+                <a:spcPts val="200"/>
+              </a:spcAft>
+            </a:pPr>
+            <a:r>
+              <a:rPr sz="819" b="1" i="0">
+                <a:solidFill>
+                  <a:srgbClr val="0F172A"/>
                 </a:solidFill>
                 <a:latin typeface="Inter"/>
               </a:rPr>
@@ -7347,7 +4506,7 @@
       </p:sp>
       <p:sp>
         <p:nvSpPr>
-          <p:cNvPr id="17" name="Right Arrow 16"/>
+          <p:cNvPr id="21" name="Right Arrow 20"/>
           <p:cNvSpPr/>
           <p:nvPr/>
         </p:nvSpPr>
@@ -7390,7 +4549,7 @@
       </p:sp>
       <p:sp>
         <p:nvSpPr>
-          <p:cNvPr id="18" name="Rounded Rectangle 17"/>
+          <p:cNvPr id="22" name="Rounded Rectangle 21"/>
           <p:cNvSpPr/>
           <p:nvPr/>
         </p:nvSpPr>
@@ -7435,7 +4594,7 @@
       </p:sp>
       <p:sp>
         <p:nvSpPr>
-          <p:cNvPr id="19" name="Rectangle 18"/>
+          <p:cNvPr id="23" name="Rectangle 22"/>
           <p:cNvSpPr/>
           <p:nvPr/>
         </p:nvSpPr>
@@ -7491,14 +4650,14 @@
       </p:sp>
       <p:sp>
         <p:nvSpPr>
-          <p:cNvPr id="20" name="TextBox 19"/>
+          <p:cNvPr id="24" name="TextBox 23"/>
           <p:cNvSpPr txBox="1"/>
           <p:nvPr/>
         </p:nvSpPr>
         <p:spPr>
           <a:xfrm>
             <a:off x="8461034" y="2267712"/>
-            <a:ext cx="2999140" cy="3392423"/>
+            <a:ext cx="2999140" cy="2377439"/>
           </a:xfrm>
           <a:prstGeom prst="rect">
             <a:avLst/>
@@ -7590,25 +4749,74 @@
               <a:t>✔  Sub-second financial ledger postings</a:t>
             </a:r>
           </a:p>
-          <a:p>
-            <a:pPr>
-              <a:spcBef>
-                <a:spcPts val="800"/>
-              </a:spcBef>
-              <a:spcAft>
-                <a:spcPts val="200"/>
-              </a:spcAft>
-            </a:pPr>
-            <a:r>
-              <a:rPr sz="850" b="1" i="0">
-                <a:solidFill>
-                  <a:srgbClr val="10B981"/>
-                </a:solidFill>
-                <a:latin typeface="Inter"/>
-              </a:rPr>
-              <a:t>MEASURABLE OUTCOMES</a:t>
-            </a:r>
-          </a:p>
+        </p:txBody>
+      </p:sp>
+      <p:sp>
+        <p:nvSpPr>
+          <p:cNvPr id="25" name="Rounded Rectangle 24"/>
+          <p:cNvSpPr/>
+          <p:nvPr/>
+        </p:nvSpPr>
+        <p:spPr>
+          <a:xfrm>
+            <a:off x="8442746" y="4389120"/>
+            <a:ext cx="3035716" cy="1234440"/>
+          </a:xfrm>
+          <a:prstGeom prst="roundRect">
+            <a:avLst/>
+          </a:prstGeom>
+          <a:solidFill>
+            <a:srgbClr val="F1F5F9"/>
+          </a:solidFill>
+          <a:ln w="12700">
+            <a:solidFill>
+              <a:srgbClr val="10B981"/>
+            </a:solidFill>
+          </a:ln>
+        </p:spPr>
+        <p:style>
+          <a:lnRef idx="1">
+            <a:schemeClr val="accent1"/>
+          </a:lnRef>
+          <a:fillRef idx="3">
+            <a:schemeClr val="accent1"/>
+          </a:fillRef>
+          <a:effectRef idx="2">
+            <a:schemeClr val="accent1"/>
+          </a:effectRef>
+          <a:fontRef idx="minor">
+            <a:schemeClr val="lt1"/>
+          </a:fontRef>
+        </p:style>
+        <p:txBody>
+          <a:bodyPr rtlCol="0" anchor="ctr"/>
+          <a:lstStyle/>
+          <a:p>
+            <a:pPr algn="ctr"/>
+          </a:p>
+        </p:txBody>
+      </p:sp>
+      <p:sp>
+        <p:nvSpPr>
+          <p:cNvPr id="26" name="TextBox 25"/>
+          <p:cNvSpPr txBox="1"/>
+          <p:nvPr/>
+        </p:nvSpPr>
+        <p:spPr>
+          <a:xfrm>
+            <a:off x="8497610" y="4443983"/>
+            <a:ext cx="2925988" cy="1115568"/>
+          </a:xfrm>
+          <a:prstGeom prst="rect">
+            <a:avLst/>
+          </a:prstGeom>
+          <a:noFill/>
+        </p:spPr>
+        <p:txBody>
+          <a:bodyPr wrap="square" lIns="0" tIns="0" rIns="0" bIns="0">
+            <a:spAutoFit/>
+          </a:bodyPr>
+          <a:lstStyle/>
           <a:p>
             <a:pPr>
               <a:spcAft>
@@ -7616,13 +4824,13 @@
               </a:spcAft>
             </a:pPr>
             <a:r>
-              <a:rPr sz="819" b="1" i="0">
-                <a:solidFill>
-                  <a:srgbClr val="0F172A"/>
-                </a:solidFill>
-                <a:latin typeface="Inter"/>
-              </a:rPr>
-              <a:t>★ WIP Latency: 1.2 Days (-75%)</a:t>
+              <a:rPr sz="850" b="1" i="0">
+                <a:solidFill>
+                  <a:srgbClr val="10B981"/>
+                </a:solidFill>
+                <a:latin typeface="Inter"/>
+              </a:rPr>
+              <a:t>AUDITED VALUE OUTCOMES</a:t>
             </a:r>
           </a:p>
           <a:p>
@@ -7638,7 +4846,7 @@
                 </a:solidFill>
                 <a:latin typeface="Inter"/>
               </a:rPr>
-              <a:t>★ Scrap Rate: 0.8% (-81%)</a:t>
+              <a:t>★ WIP Latency: 1.2 Days (-75%)</a:t>
             </a:r>
           </a:p>
           <a:p>
@@ -7654,6 +4862,22 @@
                 </a:solidFill>
                 <a:latin typeface="Inter"/>
               </a:rPr>
+              <a:t>★ Scrap Rate: 0.8% (-81%)</a:t>
+            </a:r>
+          </a:p>
+          <a:p>
+            <a:pPr>
+              <a:spcAft>
+                <a:spcPts val="200"/>
+              </a:spcAft>
+            </a:pPr>
+            <a:r>
+              <a:rPr sz="819" b="1" i="0">
+                <a:solidFill>
+                  <a:srgbClr val="0F172A"/>
+                </a:solidFill>
+                <a:latin typeface="Inter"/>
+              </a:rPr>
               <a:t>★ OTIF Delivery: 97.5% (+16 pts)</a:t>
             </a:r>
           </a:p>
@@ -7661,7 +4885,7 @@
       </p:sp>
       <p:sp>
         <p:nvSpPr>
-          <p:cNvPr id="21" name="Rounded Rectangle 20"/>
+          <p:cNvPr id="27" name="Rounded Rectangle 26"/>
           <p:cNvSpPr/>
           <p:nvPr/>
         </p:nvSpPr>
@@ -12265,8 +9489,8 @@
         </p:nvSpPr>
         <p:spPr>
           <a:xfrm>
-            <a:off x="2898648" y="1956815"/>
-            <a:ext cx="1004925" cy="645566"/>
+            <a:off x="2898648" y="2023567"/>
+            <a:ext cx="1004925" cy="512064"/>
           </a:xfrm>
           <a:prstGeom prst="roundRect">
             <a:avLst/>
@@ -12295,39 +9519,65 @@
           </a:fontRef>
         </p:style>
         <p:txBody>
-          <a:bodyPr rtlCol="0" anchor="ctr" wrap="square" lIns="73152" rIns="73152" tIns="54864"/>
-          <a:lstStyle/>
-          <a:p>
-            <a:pPr algn="ctr"/>
-            <a:r>
-              <a:rPr sz="819" b="1" i="0">
+          <a:bodyPr rtlCol="0" anchor="ctr" wrap="square" lIns="45720" rIns="45720" tIns="18288" bIns="9144"/>
+          <a:lstStyle/>
+          <a:p>
+            <a:pPr algn="ctr">
+              <a:spcBef>
+                <a:spcPts val="0"/>
+              </a:spcBef>
+              <a:spcAft>
+                <a:spcPts val="0"/>
+              </a:spcAft>
+              <a:defRPr sz="750" b="1">
                 <a:solidFill>
                   <a:srgbClr val="0066CC"/>
                 </a:solidFill>
                 <a:latin typeface="Inter"/>
-              </a:rPr>
+              </a:defRPr>
+            </a:pPr>
+            <a:r>
+              <a:rPr/>
               <a:t>[1] EDI 850</a:t>
             </a:r>
           </a:p>
           <a:p>
-            <a:r>
-              <a:rPr sz="1050" b="1" i="0">
+            <a:pPr>
+              <a:spcBef>
+                <a:spcPts val="0"/>
+              </a:spcBef>
+              <a:spcAft>
+                <a:spcPts val="0"/>
+              </a:spcAft>
+              <a:defRPr sz="800" b="1">
                 <a:solidFill>
                   <a:srgbClr val="0F172A"/>
                 </a:solidFill>
                 <a:latin typeface="Inter"/>
-              </a:rPr>
+              </a:defRPr>
+            </a:pPr>
+            <a:r>
+              <a:rPr/>
               <a:t>Demand Forecast / EDI</a:t>
             </a:r>
           </a:p>
           <a:p>
-            <a:r>
-              <a:rPr sz="819" b="1" i="0">
+            <a:pPr>
+              <a:spcBef>
+                <a:spcPts val="0"/>
+              </a:spcBef>
+              <a:spcAft>
+                <a:spcPts val="0"/>
+              </a:spcAft>
+              <a:defRPr sz="700" b="0">
                 <a:solidFill>
                   <a:srgbClr val="64748B"/>
                 </a:solidFill>
                 <a:latin typeface="Inter"/>
-              </a:rPr>
+              </a:defRPr>
+            </a:pPr>
+            <a:r>
+              <a:rPr/>
               <a:t>Sales Demand Signal</a:t>
             </a:r>
           </a:p>
@@ -12341,8 +9591,8 @@
         </p:nvSpPr>
         <p:spPr>
           <a:xfrm>
-            <a:off x="4086453" y="2840126"/>
-            <a:ext cx="1004925" cy="645566"/>
+            <a:off x="4086453" y="2906877"/>
+            <a:ext cx="1004925" cy="512064"/>
           </a:xfrm>
           <a:prstGeom prst="roundRect">
             <a:avLst/>
@@ -12371,39 +9621,65 @@
           </a:fontRef>
         </p:style>
         <p:txBody>
-          <a:bodyPr rtlCol="0" anchor="ctr" wrap="square" lIns="73152" rIns="73152" tIns="54864"/>
-          <a:lstStyle/>
-          <a:p>
-            <a:pPr algn="ctr"/>
-            <a:r>
-              <a:rPr sz="819" b="1" i="0">
+          <a:bodyPr rtlCol="0" anchor="ctr" wrap="square" lIns="45720" rIns="45720" tIns="18288" bIns="9144"/>
+          <a:lstStyle/>
+          <a:p>
+            <a:pPr algn="ctr">
+              <a:spcBef>
+                <a:spcPts val="0"/>
+              </a:spcBef>
+              <a:spcAft>
+                <a:spcPts val="0"/>
+              </a:spcAft>
+              <a:defRPr sz="750" b="1">
                 <a:solidFill>
                   <a:srgbClr val="0066CC"/>
                 </a:solidFill>
                 <a:latin typeface="Inter"/>
-              </a:rPr>
+              </a:defRPr>
+            </a:pPr>
+            <a:r>
+              <a:rPr/>
               <a:t>[2] S/4HANA PP</a:t>
             </a:r>
           </a:p>
           <a:p>
-            <a:r>
-              <a:rPr sz="1050" b="1" i="0">
+            <a:pPr>
+              <a:spcBef>
+                <a:spcPts val="0"/>
+              </a:spcBef>
+              <a:spcAft>
+                <a:spcPts val="0"/>
+              </a:spcAft>
+              <a:defRPr sz="800" b="1">
                 <a:solidFill>
                   <a:srgbClr val="0F172A"/>
                 </a:solidFill>
                 <a:latin typeface="Inter"/>
-              </a:rPr>
+              </a:defRPr>
+            </a:pPr>
+            <a:r>
+              <a:rPr/>
               <a:t>Sales &amp; Production Order</a:t>
             </a:r>
           </a:p>
           <a:p>
-            <a:r>
-              <a:rPr sz="819" b="1" i="0">
+            <a:pPr>
+              <a:spcBef>
+                <a:spcPts val="0"/>
+              </a:spcBef>
+              <a:spcAft>
+                <a:spcPts val="0"/>
+              </a:spcAft>
+              <a:defRPr sz="700" b="0">
                 <a:solidFill>
                   <a:srgbClr val="64748B"/>
                 </a:solidFill>
                 <a:latin typeface="Inter"/>
-              </a:rPr>
+              </a:defRPr>
+            </a:pPr>
+            <a:r>
+              <a:rPr/>
               <a:t>MRP Planning Run</a:t>
             </a:r>
           </a:p>
@@ -12417,8 +9693,8 @@
         </p:nvSpPr>
         <p:spPr>
           <a:xfrm>
-            <a:off x="5274259" y="3723436"/>
-            <a:ext cx="1004925" cy="645566"/>
+            <a:off x="5274259" y="3790187"/>
+            <a:ext cx="1004925" cy="512064"/>
           </a:xfrm>
           <a:prstGeom prst="roundRect">
             <a:avLst/>
@@ -12447,39 +9723,65 @@
           </a:fontRef>
         </p:style>
         <p:txBody>
-          <a:bodyPr rtlCol="0" anchor="ctr" wrap="square" lIns="73152" rIns="73152" tIns="54864"/>
-          <a:lstStyle/>
-          <a:p>
-            <a:pPr algn="ctr"/>
-            <a:r>
-              <a:rPr sz="819" b="1" i="0">
+          <a:bodyPr rtlCol="0" anchor="ctr" wrap="square" lIns="45720" rIns="45720" tIns="18288" bIns="9144"/>
+          <a:lstStyle/>
+          <a:p>
+            <a:pPr algn="ctr">
+              <a:spcBef>
+                <a:spcPts val="0"/>
+              </a:spcBef>
+              <a:spcAft>
+                <a:spcPts val="0"/>
+              </a:spcAft>
+              <a:defRPr sz="750" b="1">
                 <a:solidFill>
                   <a:srgbClr val="0066CC"/>
                 </a:solidFill>
                 <a:latin typeface="Inter"/>
-              </a:rPr>
+              </a:defRPr>
+            </a:pPr>
+            <a:r>
+              <a:rPr/>
               <a:t>[3] MES MOM</a:t>
             </a:r>
           </a:p>
           <a:p>
-            <a:r>
-              <a:rPr sz="1050" b="1" i="0">
+            <a:pPr>
+              <a:spcBef>
+                <a:spcPts val="0"/>
+              </a:spcBef>
+              <a:spcAft>
+                <a:spcPts val="0"/>
+              </a:spcAft>
+              <a:defRPr sz="800" b="1">
                 <a:solidFill>
                   <a:srgbClr val="0F172A"/>
                 </a:solidFill>
                 <a:latin typeface="Inter"/>
-              </a:rPr>
+              </a:defRPr>
+            </a:pPr>
+            <a:r>
+              <a:rPr/>
               <a:t>Dispatch &amp; Work Queue</a:t>
             </a:r>
           </a:p>
           <a:p>
-            <a:r>
-              <a:rPr sz="819" b="1" i="0">
+            <a:pPr>
+              <a:spcBef>
+                <a:spcPts val="0"/>
+              </a:spcBef>
+              <a:spcAft>
+                <a:spcPts val="0"/>
+              </a:spcAft>
+              <a:defRPr sz="700" b="0">
                 <a:solidFill>
                   <a:srgbClr val="64748B"/>
                 </a:solidFill>
                 <a:latin typeface="Inter"/>
-              </a:rPr>
+              </a:defRPr>
+            </a:pPr>
+            <a:r>
+              <a:rPr/>
               <a:t>Operation Scheduling</a:t>
             </a:r>
           </a:p>
@@ -12493,8 +9795,8 @@
         </p:nvSpPr>
         <p:spPr>
           <a:xfrm>
-            <a:off x="6462064" y="4606747"/>
-            <a:ext cx="1004925" cy="645566"/>
+            <a:off x="6462064" y="4673498"/>
+            <a:ext cx="1004925" cy="512064"/>
           </a:xfrm>
           <a:prstGeom prst="roundRect">
             <a:avLst/>
@@ -12523,39 +9825,65 @@
           </a:fontRef>
         </p:style>
         <p:txBody>
-          <a:bodyPr rtlCol="0" anchor="ctr" wrap="square" lIns="73152" rIns="73152" tIns="54864"/>
-          <a:lstStyle/>
-          <a:p>
-            <a:pPr algn="ctr"/>
-            <a:r>
-              <a:rPr sz="819" b="1" i="0">
+          <a:bodyPr rtlCol="0" anchor="ctr" wrap="square" lIns="45720" rIns="45720" tIns="18288" bIns="9144"/>
+          <a:lstStyle/>
+          <a:p>
+            <a:pPr algn="ctr">
+              <a:spcBef>
+                <a:spcPts val="0"/>
+              </a:spcBef>
+              <a:spcAft>
+                <a:spcPts val="0"/>
+              </a:spcAft>
+              <a:defRPr sz="750" b="1">
                 <a:solidFill>
                   <a:srgbClr val="0066CC"/>
                 </a:solidFill>
                 <a:latin typeface="Inter"/>
-              </a:rPr>
+              </a:defRPr>
+            </a:pPr>
+            <a:r>
+              <a:rPr/>
               <a:t>[4] PLC / OPC UA</a:t>
             </a:r>
           </a:p>
           <a:p>
-            <a:r>
-              <a:rPr sz="1050" b="1" i="0">
+            <a:pPr>
+              <a:spcBef>
+                <a:spcPts val="0"/>
+              </a:spcBef>
+              <a:spcAft>
+                <a:spcPts val="0"/>
+              </a:spcAft>
+              <a:defRPr sz="800" b="1">
                 <a:solidFill>
                   <a:srgbClr val="0F172A"/>
                 </a:solidFill>
                 <a:latin typeface="Inter"/>
-              </a:rPr>
+              </a:defRPr>
+            </a:pPr>
+            <a:r>
+              <a:rPr/>
               <a:t>CNC Machining &amp; Setup</a:t>
             </a:r>
           </a:p>
           <a:p>
-            <a:r>
-              <a:rPr sz="819" b="1" i="0">
+            <a:pPr>
+              <a:spcBef>
+                <a:spcPts val="0"/>
+              </a:spcBef>
+              <a:spcAft>
+                <a:spcPts val="0"/>
+              </a:spcAft>
+              <a:defRPr sz="700" b="0">
                 <a:solidFill>
                   <a:srgbClr val="64748B"/>
                 </a:solidFill>
                 <a:latin typeface="Inter"/>
-              </a:rPr>
+              </a:defRPr>
+            </a:pPr>
+            <a:r>
+              <a:rPr/>
               <a:t>Physical Execution</a:t>
             </a:r>
           </a:p>
@@ -12569,8 +9897,8 @@
         </p:nvSpPr>
         <p:spPr>
           <a:xfrm>
-            <a:off x="7649870" y="4606747"/>
-            <a:ext cx="1004925" cy="645566"/>
+            <a:off x="7649870" y="4673498"/>
+            <a:ext cx="1004925" cy="512064"/>
           </a:xfrm>
           <a:prstGeom prst="roundRect">
             <a:avLst/>
@@ -12599,39 +9927,65 @@
           </a:fontRef>
         </p:style>
         <p:txBody>
-          <a:bodyPr rtlCol="0" anchor="ctr" wrap="square" lIns="73152" rIns="73152" tIns="54864"/>
-          <a:lstStyle/>
-          <a:p>
-            <a:pPr algn="ctr"/>
-            <a:r>
-              <a:rPr sz="819" b="1" i="0">
+          <a:bodyPr rtlCol="0" anchor="ctr" wrap="square" lIns="45720" rIns="45720" tIns="18288" bIns="9144"/>
+          <a:lstStyle/>
+          <a:p>
+            <a:pPr algn="ctr">
+              <a:spcBef>
+                <a:spcPts val="0"/>
+              </a:spcBef>
+              <a:spcAft>
+                <a:spcPts val="0"/>
+              </a:spcAft>
+              <a:defRPr sz="750" b="1">
                 <a:solidFill>
                   <a:srgbClr val="0066CC"/>
                 </a:solidFill>
                 <a:latin typeface="Inter"/>
-              </a:rPr>
+              </a:defRPr>
+            </a:pPr>
+            <a:r>
+              <a:rPr/>
               <a:t>[5] 261 Movement</a:t>
             </a:r>
           </a:p>
           <a:p>
-            <a:r>
-              <a:rPr sz="1050" b="1" i="0">
+            <a:pPr>
+              <a:spcBef>
+                <a:spcPts val="0"/>
+              </a:spcBef>
+              <a:spcAft>
+                <a:spcPts val="0"/>
+              </a:spcAft>
+              <a:defRPr sz="800" b="1">
                 <a:solidFill>
                   <a:srgbClr val="0F172A"/>
                 </a:solidFill>
                 <a:latin typeface="Inter"/>
-              </a:rPr>
+              </a:defRPr>
+            </a:pPr>
+            <a:r>
+              <a:rPr/>
               <a:t>Material Consumption</a:t>
             </a:r>
           </a:p>
           <a:p>
-            <a:r>
-              <a:rPr sz="819" b="1" i="0">
+            <a:pPr>
+              <a:spcBef>
+                <a:spcPts val="0"/>
+              </a:spcBef>
+              <a:spcAft>
+                <a:spcPts val="0"/>
+              </a:spcAft>
+              <a:defRPr sz="700" b="0">
                 <a:solidFill>
                   <a:srgbClr val="64748B"/>
                 </a:solidFill>
                 <a:latin typeface="Inter"/>
-              </a:rPr>
+              </a:defRPr>
+            </a:pPr>
+            <a:r>
+              <a:rPr/>
               <a:t>Batch Component Binding</a:t>
             </a:r>
           </a:p>
@@ -12639,24 +9993,24 @@
       </p:sp>
       <p:sp>
         <p:nvSpPr>
-          <p:cNvPr id="25" name="Diamond 24"/>
+          <p:cNvPr id="25" name="Rounded Rectangle 24"/>
           <p:cNvSpPr/>
           <p:nvPr/>
         </p:nvSpPr>
         <p:spPr>
           <a:xfrm>
-            <a:off x="8837676" y="5490057"/>
-            <a:ext cx="1004925" cy="645566"/>
-          </a:xfrm>
-          <a:prstGeom prst="diamond">
-            <a:avLst/>
-          </a:prstGeom>
-          <a:solidFill>
-            <a:srgbClr val="FFFFFF"/>
-          </a:solidFill>
-          <a:ln w="15240">
+            <a:off x="8837676" y="5556808"/>
+            <a:ext cx="1004925" cy="512064"/>
+          </a:xfrm>
+          <a:prstGeom prst="roundRect">
+            <a:avLst/>
+          </a:prstGeom>
+          <a:solidFill>
+            <a:srgbClr val="EEF2FF"/>
+          </a:solidFill>
+          <a:ln w="19050">
             <a:solidFill>
-              <a:srgbClr val="0066CC"/>
+              <a:srgbClr val="D97706"/>
             </a:solidFill>
           </a:ln>
         </p:spPr>
@@ -12675,39 +10029,65 @@
           </a:fontRef>
         </p:style>
         <p:txBody>
-          <a:bodyPr rtlCol="0" anchor="ctr" wrap="square" lIns="73152" rIns="73152" tIns="54864"/>
-          <a:lstStyle/>
-          <a:p>
-            <a:pPr algn="ctr"/>
-            <a:r>
-              <a:rPr sz="819" b="1" i="0">
-                <a:solidFill>
-                  <a:srgbClr val="0066CC"/>
-                </a:solidFill>
-                <a:latin typeface="Inter"/>
-              </a:rPr>
-              <a:t>[6] CMM Gauge</a:t>
-            </a:r>
-          </a:p>
-          <a:p>
-            <a:r>
-              <a:rPr sz="1050" b="1" i="0">
+          <a:bodyPr rtlCol="0" anchor="ctr" wrap="square" lIns="45720" rIns="45720" tIns="18288" bIns="9144"/>
+          <a:lstStyle/>
+          <a:p>
+            <a:pPr algn="ctr">
+              <a:spcBef>
+                <a:spcPts val="0"/>
+              </a:spcBef>
+              <a:spcAft>
+                <a:spcPts val="0"/>
+              </a:spcAft>
+              <a:defRPr sz="750" b="1">
+                <a:solidFill>
+                  <a:srgbClr val="D97706"/>
+                </a:solidFill>
+                <a:latin typeface="Inter"/>
+              </a:defRPr>
+            </a:pPr>
+            <a:r>
+              <a:rPr/>
+              <a:t>◆ GATE [6]</a:t>
+            </a:r>
+          </a:p>
+          <a:p>
+            <a:pPr>
+              <a:spcBef>
+                <a:spcPts val="0"/>
+              </a:spcBef>
+              <a:spcAft>
+                <a:spcPts val="0"/>
+              </a:spcAft>
+              <a:defRPr sz="800" b="1">
                 <a:solidFill>
                   <a:srgbClr val="0F172A"/>
                 </a:solidFill>
                 <a:latin typeface="Inter"/>
-              </a:rPr>
+              </a:defRPr>
+            </a:pPr>
+            <a:r>
+              <a:rPr/>
               <a:t>Optical Inspection Gate</a:t>
             </a:r>
           </a:p>
           <a:p>
-            <a:r>
-              <a:rPr sz="819" b="1" i="0">
+            <a:pPr>
+              <a:spcBef>
+                <a:spcPts val="0"/>
+              </a:spcBef>
+              <a:spcAft>
+                <a:spcPts val="0"/>
+              </a:spcAft>
+              <a:defRPr sz="700" b="0">
                 <a:solidFill>
                   <a:srgbClr val="64748B"/>
                 </a:solidFill>
                 <a:latin typeface="Inter"/>
-              </a:rPr>
+              </a:defRPr>
+            </a:pPr>
+            <a:r>
+              <a:rPr/>
               <a:t>SPC Tolerance Validation</a:t>
             </a:r>
           </a:p>
@@ -12721,8 +10101,8 @@
         </p:nvSpPr>
         <p:spPr>
           <a:xfrm>
-            <a:off x="10025481" y="2840126"/>
-            <a:ext cx="1004925" cy="645566"/>
+            <a:off x="10025481" y="2906877"/>
+            <a:ext cx="1004925" cy="512064"/>
           </a:xfrm>
           <a:prstGeom prst="roundRect">
             <a:avLst/>
@@ -12751,39 +10131,65 @@
           </a:fontRef>
         </p:style>
         <p:txBody>
-          <a:bodyPr rtlCol="0" anchor="ctr" wrap="square" lIns="73152" rIns="73152" tIns="54864"/>
-          <a:lstStyle/>
-          <a:p>
-            <a:pPr algn="ctr"/>
-            <a:r>
-              <a:rPr sz="819" b="1" i="0">
+          <a:bodyPr rtlCol="0" anchor="ctr" wrap="square" lIns="45720" rIns="45720" tIns="18288" bIns="9144"/>
+          <a:lstStyle/>
+          <a:p>
+            <a:pPr algn="ctr">
+              <a:spcBef>
+                <a:spcPts val="0"/>
+              </a:spcBef>
+              <a:spcAft>
+                <a:spcPts val="0"/>
+              </a:spcAft>
+              <a:defRPr sz="750" b="1">
                 <a:solidFill>
                   <a:srgbClr val="0066CC"/>
                 </a:solidFill>
                 <a:latin typeface="Inter"/>
-              </a:rPr>
+              </a:defRPr>
+            </a:pPr>
+            <a:r>
+              <a:rPr/>
               <a:t>[7] ACDOCA Post</a:t>
             </a:r>
           </a:p>
           <a:p>
-            <a:r>
-              <a:rPr sz="1050" b="1" i="0">
+            <a:pPr>
+              <a:spcBef>
+                <a:spcPts val="0"/>
+              </a:spcBef>
+              <a:spcAft>
+                <a:spcPts val="0"/>
+              </a:spcAft>
+              <a:defRPr sz="800" b="1">
                 <a:solidFill>
                   <a:srgbClr val="0F172A"/>
                 </a:solidFill>
                 <a:latin typeface="Inter"/>
-              </a:rPr>
+              </a:defRPr>
+            </a:pPr>
+            <a:r>
+              <a:rPr/>
               <a:t>Confirmation &amp; Ledger</a:t>
             </a:r>
           </a:p>
           <a:p>
-            <a:r>
-              <a:rPr sz="819" b="1" i="0">
+            <a:pPr>
+              <a:spcBef>
+                <a:spcPts val="0"/>
+              </a:spcBef>
+              <a:spcAft>
+                <a:spcPts val="0"/>
+              </a:spcAft>
+              <a:defRPr sz="700" b="0">
                 <a:solidFill>
                   <a:srgbClr val="64748B"/>
                 </a:solidFill>
                 <a:latin typeface="Inter"/>
-              </a:rPr>
+              </a:defRPr>
+            </a:pPr>
+            <a:r>
+              <a:rPr/>
               <a:t>CO11N &amp; 101 Goods Receipt</a:t>
             </a:r>
           </a:p>
@@ -12797,8 +10203,8 @@
         </p:nvSpPr>
         <p:spPr>
           <a:xfrm>
-            <a:off x="3327958" y="2620670"/>
-            <a:ext cx="146304" cy="201167"/>
+            <a:off x="3337102" y="2553919"/>
+            <a:ext cx="128016" cy="334670"/>
           </a:xfrm>
           <a:prstGeom prst="downArrow">
             <a:avLst/>
@@ -12840,8 +10246,8 @@
         </p:nvSpPr>
         <p:spPr>
           <a:xfrm>
-            <a:off x="3510838" y="2629814"/>
-            <a:ext cx="1188720" cy="219456"/>
+            <a:off x="3483406" y="2620670"/>
+            <a:ext cx="1005840" cy="164592"/>
           </a:xfrm>
           <a:prstGeom prst="roundRect">
             <a:avLst/>
@@ -12870,17 +10276,19 @@
           </a:fontRef>
         </p:style>
         <p:txBody>
-          <a:bodyPr rtlCol="0" anchor="ctr" lIns="0" rIns="0" tIns="0" bIns="0"/>
-          <a:lstStyle/>
-          <a:p>
-            <a:pPr algn="ctr"/>
-            <a:r>
-              <a:rPr sz="819" b="1" i="0">
+          <a:bodyPr rtlCol="0" anchor="ctr" wrap="none" lIns="0" rIns="0" tIns="0" bIns="0"/>
+          <a:lstStyle/>
+          <a:p>
+            <a:pPr algn="ctr">
+              <a:defRPr sz="700" b="1">
                 <a:solidFill>
                   <a:srgbClr val="0066CC"/>
                 </a:solidFill>
                 <a:latin typeface="Inter"/>
-              </a:rPr>
+              </a:defRPr>
+            </a:pPr>
+            <a:r>
+              <a:rPr/>
               <a:t>Sales Order</a:t>
             </a:r>
           </a:p>
@@ -12894,8 +10302,8 @@
         </p:nvSpPr>
         <p:spPr>
           <a:xfrm>
-            <a:off x="4515764" y="3503980"/>
-            <a:ext cx="146304" cy="201167"/>
+            <a:off x="4524908" y="3437229"/>
+            <a:ext cx="128016" cy="334670"/>
           </a:xfrm>
           <a:prstGeom prst="downArrow">
             <a:avLst/>
@@ -12937,8 +10345,8 @@
         </p:nvSpPr>
         <p:spPr>
           <a:xfrm>
-            <a:off x="4698644" y="3513124"/>
-            <a:ext cx="1188720" cy="219456"/>
+            <a:off x="4671212" y="3503980"/>
+            <a:ext cx="1005840" cy="164592"/>
           </a:xfrm>
           <a:prstGeom prst="roundRect">
             <a:avLst/>
@@ -12967,17 +10375,19 @@
           </a:fontRef>
         </p:style>
         <p:txBody>
-          <a:bodyPr rtlCol="0" anchor="ctr" lIns="0" rIns="0" tIns="0" bIns="0"/>
-          <a:lstStyle/>
-          <a:p>
-            <a:pPr algn="ctr"/>
-            <a:r>
-              <a:rPr sz="819" b="1" i="0">
+          <a:bodyPr rtlCol="0" anchor="ctr" wrap="none" lIns="0" rIns="0" tIns="0" bIns="0"/>
+          <a:lstStyle/>
+          <a:p>
+            <a:pPr algn="ctr">
+              <a:defRPr sz="700" b="1">
                 <a:solidFill>
                   <a:srgbClr val="0066CC"/>
                 </a:solidFill>
                 <a:latin typeface="Inter"/>
-              </a:rPr>
+              </a:defRPr>
+            </a:pPr>
+            <a:r>
+              <a:rPr/>
               <a:t>Production Order</a:t>
             </a:r>
           </a:p>
@@ -12991,8 +10401,8 @@
         </p:nvSpPr>
         <p:spPr>
           <a:xfrm>
-            <a:off x="5703570" y="4387291"/>
-            <a:ext cx="146304" cy="201168"/>
+            <a:off x="5712714" y="4320540"/>
+            <a:ext cx="128016" cy="334670"/>
           </a:xfrm>
           <a:prstGeom prst="downArrow">
             <a:avLst/>
@@ -13034,8 +10444,8 @@
         </p:nvSpPr>
         <p:spPr>
           <a:xfrm>
-            <a:off x="5886450" y="4396435"/>
-            <a:ext cx="1188720" cy="219456"/>
+            <a:off x="5859018" y="4387291"/>
+            <a:ext cx="1005840" cy="164592"/>
           </a:xfrm>
           <a:prstGeom prst="roundRect">
             <a:avLst/>
@@ -13064,17 +10474,19 @@
           </a:fontRef>
         </p:style>
         <p:txBody>
-          <a:bodyPr rtlCol="0" anchor="ctr" lIns="0" rIns="0" tIns="0" bIns="0"/>
-          <a:lstStyle/>
-          <a:p>
-            <a:pPr algn="ctr"/>
-            <a:r>
-              <a:rPr sz="819" b="1" i="0">
+          <a:bodyPr rtlCol="0" anchor="ctr" wrap="none" lIns="0" rIns="0" tIns="0" bIns="0"/>
+          <a:lstStyle/>
+          <a:p>
+            <a:pPr algn="ctr">
+              <a:defRPr sz="700" b="1">
                 <a:solidFill>
                   <a:srgbClr val="0066CC"/>
                 </a:solidFill>
                 <a:latin typeface="Inter"/>
-              </a:rPr>
+              </a:defRPr>
+            </a:pPr>
+            <a:r>
+              <a:rPr/>
               <a:t>Dispatch Job</a:t>
             </a:r>
           </a:p>
@@ -13088,8 +10500,8 @@
         </p:nvSpPr>
         <p:spPr>
           <a:xfrm>
-            <a:off x="7485278" y="4856378"/>
-            <a:ext cx="146303" cy="146304"/>
+            <a:off x="7485278" y="4865522"/>
+            <a:ext cx="146303" cy="128016"/>
           </a:xfrm>
           <a:prstGeom prst="rightArrow">
             <a:avLst/>
@@ -13131,8 +10543,8 @@
         </p:nvSpPr>
         <p:spPr>
           <a:xfrm>
-            <a:off x="8079181" y="5270601"/>
-            <a:ext cx="146304" cy="201167"/>
+            <a:off x="8088325" y="5203850"/>
+            <a:ext cx="128016" cy="334670"/>
           </a:xfrm>
           <a:prstGeom prst="downArrow">
             <a:avLst/>
@@ -13174,8 +10586,8 @@
         </p:nvSpPr>
         <p:spPr>
           <a:xfrm>
-            <a:off x="8262061" y="5279745"/>
-            <a:ext cx="1188720" cy="219456"/>
+            <a:off x="8234629" y="5270601"/>
+            <a:ext cx="1005840" cy="164592"/>
           </a:xfrm>
           <a:prstGeom prst="roundRect">
             <a:avLst/>
@@ -13204,17 +10616,19 @@
           </a:fontRef>
         </p:style>
         <p:txBody>
-          <a:bodyPr rtlCol="0" anchor="ctr" lIns="0" rIns="0" tIns="0" bIns="0"/>
-          <a:lstStyle/>
-          <a:p>
-            <a:pPr algn="ctr"/>
-            <a:r>
-              <a:rPr sz="819" b="1" i="0">
+          <a:bodyPr rtlCol="0" anchor="ctr" wrap="none" lIns="0" rIns="0" tIns="0" bIns="0"/>
+          <a:lstStyle/>
+          <a:p>
+            <a:pPr algn="ctr">
+              <a:defRPr sz="700" b="1">
                 <a:solidFill>
                   <a:srgbClr val="0066CC"/>
                 </a:solidFill>
                 <a:latin typeface="Inter"/>
-              </a:rPr>
+              </a:defRPr>
+            </a:pPr>
+            <a:r>
+              <a:rPr/>
               <a:t>Inspection Trigger</a:t>
             </a:r>
           </a:p>
@@ -13228,8 +10642,8 @@
         </p:nvSpPr>
         <p:spPr>
           <a:xfrm>
-            <a:off x="9266986" y="3503980"/>
-            <a:ext cx="146304" cy="1967788"/>
+            <a:off x="9276130" y="3437229"/>
+            <a:ext cx="128016" cy="2101291"/>
           </a:xfrm>
           <a:prstGeom prst="upArrow">
             <a:avLst/>
@@ -13271,8 +10685,8 @@
         </p:nvSpPr>
         <p:spPr>
           <a:xfrm>
-            <a:off x="9449866" y="4396435"/>
-            <a:ext cx="1188720" cy="219456"/>
+            <a:off x="9440722" y="4405579"/>
+            <a:ext cx="1005840" cy="164592"/>
           </a:xfrm>
           <a:prstGeom prst="roundRect">
             <a:avLst/>
@@ -13301,17 +10715,19 @@
           </a:fontRef>
         </p:style>
         <p:txBody>
-          <a:bodyPr rtlCol="0" anchor="ctr" lIns="0" rIns="0" tIns="0" bIns="0"/>
-          <a:lstStyle/>
-          <a:p>
-            <a:pPr algn="ctr"/>
-            <a:r>
-              <a:rPr sz="819" b="1" i="0">
+          <a:bodyPr rtlCol="0" anchor="ctr" wrap="none" lIns="0" rIns="0" tIns="0" bIns="0"/>
+          <a:lstStyle/>
+          <a:p>
+            <a:pPr algn="ctr">
+              <a:defRPr sz="700" b="1">
                 <a:solidFill>
                   <a:srgbClr val="0066CC"/>
                 </a:solidFill>
                 <a:latin typeface="Inter"/>
-              </a:rPr>
+              </a:defRPr>
+            </a:pPr>
+            <a:r>
+              <a:rPr/>
               <a:t>Clearance GR</a:t>
             </a:r>
           </a:p>
@@ -14474,7 +11890,7 @@
         <p:spPr>
           <a:xfrm>
             <a:off x="6944476" y="1984248"/>
-            <a:ext cx="1294921" cy="1188720"/>
+            <a:ext cx="1489159" cy="1188720"/>
           </a:xfrm>
           <a:prstGeom prst="diamond">
             <a:avLst/>
@@ -14503,8 +11919,20 @@
           </a:fontRef>
         </p:style>
         <p:txBody>
-          <a:bodyPr rtlCol="0" anchor="ctr" wrap="square" lIns="137160" rIns="137160"/>
-          <a:lstStyle/>
+          <a:bodyPr rtlCol="0" anchor="ctr" wrap="square" lIns="36576" rIns="36576" tIns="54864" bIns="54864"/>
+          <a:lstStyle/>
+          <a:p>
+            <a:pPr algn="ctr"/>
+            <a:r>
+              <a:rPr sz="819" b="1" i="0">
+                <a:solidFill>
+                  <a:srgbClr val="0066CC"/>
+                </a:solidFill>
+                <a:latin typeface="Inter"/>
+              </a:rPr>
+              <a:t>GATE</a:t>
+            </a:r>
+          </a:p>
           <a:p>
             <a:pPr algn="ctr">
               <a:spcAft>
@@ -14514,23 +11942,12 @@
             <a:r>
               <a:rPr sz="850" b="1" i="0">
                 <a:solidFill>
-                  <a:srgbClr val="0066CC"/>
-                </a:solidFill>
-                <a:latin typeface="Inter"/>
-              </a:rPr>
-              <a:t>DECISION GATE</a:t>
-            </a:r>
-          </a:p>
-          <a:p>
-            <a:pPr algn="ctr"/>
-            <a:r>
-              <a:rPr sz="1050" b="1" i="0">
-                <a:solidFill>
                   <a:srgbClr val="0F172A"/>
                 </a:solidFill>
                 <a:latin typeface="Inter"/>
               </a:rPr>
-              <a:t>Quality Gate &amp; SPC</a:t>
+              <a:t>QUALITY GATE
+&amp; SPC</a:t>
             </a:r>
           </a:p>
         </p:txBody>
@@ -14543,8 +11960,8 @@
         </p:nvSpPr>
         <p:spPr>
           <a:xfrm>
-            <a:off x="8266829" y="2468879"/>
-            <a:ext cx="146304" cy="219456"/>
+            <a:off x="8470211" y="2468879"/>
+            <a:ext cx="548640" cy="219456"/>
           </a:xfrm>
           <a:prstGeom prst="rightArrow">
             <a:avLst/>
@@ -14586,8 +12003,8 @@
         </p:nvSpPr>
         <p:spPr>
           <a:xfrm>
-            <a:off x="8175389" y="2057400"/>
-            <a:ext cx="548640" cy="219456"/>
+            <a:off x="8506787" y="2304288"/>
+            <a:ext cx="475488" cy="201168"/>
           </a:xfrm>
           <a:prstGeom prst="roundRect">
             <a:avLst/>
@@ -14638,7 +12055,7 @@
         </p:nvSpPr>
         <p:spPr>
           <a:xfrm>
-            <a:off x="8440565" y="1984248"/>
+            <a:off x="9055427" y="1984248"/>
             <a:ext cx="1294921" cy="1188720"/>
           </a:xfrm>
           <a:prstGeom prst="roundRect">
@@ -14683,7 +12100,7 @@
         </p:nvSpPr>
         <p:spPr>
           <a:xfrm>
-            <a:off x="8440565" y="1984248"/>
+            <a:off x="9055427" y="1984248"/>
             <a:ext cx="1294921" cy="256032"/>
           </a:xfrm>
           <a:prstGeom prst="rect">
@@ -14735,7 +12152,7 @@
         </p:nvSpPr>
         <p:spPr>
           <a:xfrm>
-            <a:off x="8513717" y="2276856"/>
+            <a:off x="9128579" y="2276856"/>
             <a:ext cx="1148617" cy="859536"/>
           </a:xfrm>
           <a:prstGeom prst="rect">
@@ -14790,7 +12207,7 @@
         </p:nvSpPr>
         <p:spPr>
           <a:xfrm>
-            <a:off x="9762918" y="2468879"/>
+            <a:off x="10377780" y="2468879"/>
             <a:ext cx="146304" cy="219456"/>
           </a:xfrm>
           <a:prstGeom prst="rightArrow">
@@ -14833,7 +12250,7 @@
         </p:nvSpPr>
         <p:spPr>
           <a:xfrm>
-            <a:off x="9936654" y="1984248"/>
+            <a:off x="10551516" y="1984248"/>
             <a:ext cx="1294921" cy="1188720"/>
           </a:xfrm>
           <a:prstGeom prst="roundRect">
@@ -14878,7 +12295,7 @@
         </p:nvSpPr>
         <p:spPr>
           <a:xfrm>
-            <a:off x="9936654" y="1984248"/>
+            <a:off x="10551516" y="1984248"/>
             <a:ext cx="1294921" cy="256032"/>
           </a:xfrm>
           <a:prstGeom prst="rect">
@@ -14930,7 +12347,7 @@
         </p:nvSpPr>
         <p:spPr>
           <a:xfrm>
-            <a:off x="10009806" y="2276856"/>
+            <a:off x="10624668" y="2276856"/>
             <a:ext cx="1148617" cy="859536"/>
           </a:xfrm>
           <a:prstGeom prst="rect">
@@ -14985,7 +12402,7 @@
         </p:nvSpPr>
         <p:spPr>
           <a:xfrm>
-            <a:off x="7482208" y="3218687"/>
+            <a:off x="7579327" y="3218687"/>
             <a:ext cx="219456" cy="1673351"/>
           </a:xfrm>
           <a:prstGeom prst="downArrow">
@@ -15028,7 +12445,7 @@
         </p:nvSpPr>
         <p:spPr>
           <a:xfrm>
-            <a:off x="7738240" y="3310127"/>
+            <a:off x="7835359" y="3310127"/>
             <a:ext cx="1005840" cy="219456"/>
           </a:xfrm>
           <a:prstGeom prst="roundRect">
@@ -15471,8 +12888,8 @@
         </p:nvSpPr>
         <p:spPr>
           <a:xfrm>
-            <a:off x="10064670" y="4617720"/>
-            <a:ext cx="219456" cy="320040"/>
+            <a:off x="10064670" y="4434840"/>
+            <a:ext cx="219456" cy="502920"/>
           </a:xfrm>
           <a:prstGeom prst="upArrow">
             <a:avLst/>
@@ -15514,8 +12931,8 @@
         </p:nvSpPr>
         <p:spPr>
           <a:xfrm>
-            <a:off x="10302414" y="4526279"/>
-            <a:ext cx="1029745" cy="365760"/>
+            <a:off x="10320702" y="4507992"/>
+            <a:ext cx="1234440" cy="384048"/>
           </a:xfrm>
           <a:prstGeom prst="roundRect">
             <a:avLst/>
@@ -15523,7 +12940,7 @@
           <a:solidFill>
             <a:srgbClr val="EEF2FF"/>
           </a:solidFill>
-          <a:ln>
+          <a:ln w="12700">
             <a:solidFill>
               <a:srgbClr val="D97706"/>
             </a:solidFill>
@@ -15544,7 +12961,7 @@
           </a:fontRef>
         </p:style>
         <p:txBody>
-          <a:bodyPr rtlCol="0" anchor="ctr" wrap="square"/>
+          <a:bodyPr rtlCol="0" anchor="ctr" wrap="square" lIns="36576" rIns="36576" tIns="36576" bIns="36576"/>
           <a:lstStyle/>
           <a:p>
             <a:pPr algn="ctr"/>
@@ -15555,7 +12972,7 @@
                 </a:solidFill>
                 <a:latin typeface="Inter"/>
               </a:rPr>
-              <a:t>CLOSED-LOOP RE-ENTRY
+              <a:t>↺ RE-ENTRY LOOP
 Cleared for Confirmation</a:t>
             </a:r>
           </a:p>
@@ -15909,7 +13326,657 @@
           </a:fontRef>
         </p:style>
         <p:txBody>
-          <a:bodyPr rtlCol="0" anchor="ctr" lIns="182880" tIns="73152"/>
+          <a:bodyPr rtlCol="0" anchor="ctr"/>
+          <a:lstStyle/>
+          <a:p>
+            <a:pPr algn="ctr"/>
+          </a:p>
+        </p:txBody>
+      </p:sp>
+      <p:sp>
+        <p:nvSpPr>
+          <p:cNvPr id="10" name="TextBox 9"/>
+          <p:cNvSpPr txBox="1"/>
+          <p:nvPr/>
+        </p:nvSpPr>
+        <p:spPr>
+          <a:xfrm>
+            <a:off x="877824" y="1554480"/>
+            <a:ext cx="6705295" cy="329184"/>
+          </a:xfrm>
+          <a:prstGeom prst="rect">
+            <a:avLst/>
+          </a:prstGeom>
+          <a:noFill/>
+        </p:spPr>
+        <p:txBody>
+          <a:bodyPr wrap="square" lIns="0" rIns="0" tIns="0" bIns="0">
+            <a:spAutoFit/>
+          </a:bodyPr>
+          <a:lstStyle/>
+          <a:p>
+            <a:pPr>
+              <a:spcAft>
+                <a:spcPts val="200"/>
+              </a:spcAft>
+            </a:pPr>
+            <a:r>
+              <a:rPr sz="850" b="1" i="0">
+                <a:solidFill>
+                  <a:srgbClr val="0066CC"/>
+                </a:solidFill>
+                <a:latin typeface="Inter"/>
+              </a:rPr>
+              <a:t>DIGITAL TRANSFORMATION MATURITY ASSESSMENT: MANUFACTURING DIGITAL TRANSFORMATION MATURITY</a:t>
+            </a:r>
+          </a:p>
+        </p:txBody>
+      </p:sp>
+      <p:sp>
+        <p:nvSpPr>
+          <p:cNvPr id="11" name="Rounded Rectangle 10"/>
+          <p:cNvSpPr/>
+          <p:nvPr/>
+        </p:nvSpPr>
+        <p:spPr>
+          <a:xfrm>
+            <a:off x="9631375" y="1554480"/>
+            <a:ext cx="1645920" cy="329184"/>
+          </a:xfrm>
+          <a:prstGeom prst="roundRect">
+            <a:avLst/>
+          </a:prstGeom>
+          <a:solidFill>
+            <a:srgbClr val="10B981"/>
+          </a:solidFill>
+          <a:ln>
+            <a:noFill/>
+          </a:ln>
+        </p:spPr>
+        <p:style>
+          <a:lnRef idx="1">
+            <a:schemeClr val="accent1"/>
+          </a:lnRef>
+          <a:fillRef idx="3">
+            <a:schemeClr val="accent1"/>
+          </a:fillRef>
+          <a:effectRef idx="2">
+            <a:schemeClr val="accent1"/>
+          </a:effectRef>
+          <a:fontRef idx="minor">
+            <a:schemeClr val="lt1"/>
+          </a:fontRef>
+        </p:style>
+        <p:txBody>
+          <a:bodyPr rtlCol="0" anchor="ctr" lIns="0" rIns="0" tIns="0" bIns="0"/>
+          <a:lstStyle/>
+          <a:p>
+            <a:pPr algn="ctr"/>
+            <a:r>
+              <a:rPr sz="819" b="1" i="0">
+                <a:solidFill>
+                  <a:srgbClr val="FFFFFF"/>
+                </a:solidFill>
+                <a:latin typeface="Inter"/>
+              </a:rPr>
+              <a:t>TARGET: 4.2 / 5.0</a:t>
+            </a:r>
+          </a:p>
+        </p:txBody>
+      </p:sp>
+      <p:sp>
+        <p:nvSpPr>
+          <p:cNvPr id="12" name="Right Arrow 11"/>
+          <p:cNvSpPr/>
+          <p:nvPr/>
+        </p:nvSpPr>
+        <p:spPr>
+          <a:xfrm>
+            <a:off x="9311335" y="1627632"/>
+            <a:ext cx="228600" cy="182880"/>
+          </a:xfrm>
+          <a:prstGeom prst="rightArrow">
+            <a:avLst/>
+          </a:prstGeom>
+          <a:solidFill>
+            <a:srgbClr val="0066CC"/>
+          </a:solidFill>
+          <a:ln>
+            <a:noFill/>
+          </a:ln>
+        </p:spPr>
+        <p:style>
+          <a:lnRef idx="1">
+            <a:schemeClr val="accent1"/>
+          </a:lnRef>
+          <a:fillRef idx="3">
+            <a:schemeClr val="accent1"/>
+          </a:fillRef>
+          <a:effectRef idx="2">
+            <a:schemeClr val="accent1"/>
+          </a:effectRef>
+          <a:fontRef idx="minor">
+            <a:schemeClr val="lt1"/>
+          </a:fontRef>
+        </p:style>
+        <p:txBody>
+          <a:bodyPr rtlCol="0" anchor="ctr"/>
+          <a:lstStyle/>
+          <a:p>
+            <a:pPr algn="ctr"/>
+          </a:p>
+        </p:txBody>
+      </p:sp>
+      <p:sp>
+        <p:nvSpPr>
+          <p:cNvPr id="13" name="Rounded Rectangle 12"/>
+          <p:cNvSpPr/>
+          <p:nvPr/>
+        </p:nvSpPr>
+        <p:spPr>
+          <a:xfrm>
+            <a:off x="7528255" y="1554480"/>
+            <a:ext cx="1691640" cy="329184"/>
+          </a:xfrm>
+          <a:prstGeom prst="roundRect">
+            <a:avLst/>
+          </a:prstGeom>
+          <a:solidFill>
+            <a:srgbClr val="D97706"/>
+          </a:solidFill>
+          <a:ln>
+            <a:noFill/>
+          </a:ln>
+        </p:spPr>
+        <p:style>
+          <a:lnRef idx="1">
+            <a:schemeClr val="accent1"/>
+          </a:lnRef>
+          <a:fillRef idx="3">
+            <a:schemeClr val="accent1"/>
+          </a:fillRef>
+          <a:effectRef idx="2">
+            <a:schemeClr val="accent1"/>
+          </a:effectRef>
+          <a:fontRef idx="minor">
+            <a:schemeClr val="lt1"/>
+          </a:fontRef>
+        </p:style>
+        <p:txBody>
+          <a:bodyPr rtlCol="0" anchor="ctr" lIns="0" rIns="0" tIns="0" bIns="0"/>
+          <a:lstStyle/>
+          <a:p>
+            <a:pPr algn="ctr"/>
+            <a:r>
+              <a:rPr sz="819" b="1" i="0">
+                <a:solidFill>
+                  <a:srgbClr val="FFFFFF"/>
+                </a:solidFill>
+                <a:latin typeface="Inter"/>
+              </a:rPr>
+              <a:t>CURRENT: 2.4 / 5.0</a:t>
+            </a:r>
+          </a:p>
+        </p:txBody>
+      </p:sp>
+      <p:sp>
+        <p:nvSpPr>
+          <p:cNvPr id="14" name="Rounded Rectangle 13"/>
+          <p:cNvSpPr/>
+          <p:nvPr/>
+        </p:nvSpPr>
+        <p:spPr>
+          <a:xfrm>
+            <a:off x="859536" y="2066544"/>
+            <a:ext cx="4720608" cy="4123943"/>
+          </a:xfrm>
+          <a:prstGeom prst="roundRect">
+            <a:avLst/>
+          </a:prstGeom>
+          <a:solidFill>
+            <a:srgbClr val="F1F5F9"/>
+          </a:solidFill>
+          <a:ln w="12700">
+            <a:solidFill>
+              <a:srgbClr val="E2E8F0"/>
+            </a:solidFill>
+          </a:ln>
+        </p:spPr>
+        <p:style>
+          <a:lnRef idx="1">
+            <a:schemeClr val="accent1"/>
+          </a:lnRef>
+          <a:fillRef idx="3">
+            <a:schemeClr val="accent1"/>
+          </a:fillRef>
+          <a:effectRef idx="2">
+            <a:schemeClr val="accent1"/>
+          </a:effectRef>
+          <a:fontRef idx="minor">
+            <a:schemeClr val="lt1"/>
+          </a:fontRef>
+        </p:style>
+        <p:txBody>
+          <a:bodyPr rtlCol="0" anchor="ctr"/>
+          <a:lstStyle/>
+          <a:p>
+            <a:pPr algn="ctr"/>
+          </a:p>
+        </p:txBody>
+      </p:sp>
+      <p:sp>
+        <p:nvSpPr>
+          <p:cNvPr id="15" name="TextBox 14"/>
+          <p:cNvSpPr txBox="1"/>
+          <p:nvPr/>
+        </p:nvSpPr>
+        <p:spPr>
+          <a:xfrm>
+            <a:off x="969264" y="2139696"/>
+            <a:ext cx="4501152" cy="292608"/>
+          </a:xfrm>
+          <a:prstGeom prst="rect">
+            <a:avLst/>
+          </a:prstGeom>
+          <a:noFill/>
+        </p:spPr>
+        <p:txBody>
+          <a:bodyPr wrap="none" lIns="0" tIns="0">
+            <a:spAutoFit/>
+          </a:bodyPr>
+          <a:lstStyle/>
+          <a:p>
+            <a:pPr>
+              <a:spcAft>
+                <a:spcPts val="200"/>
+              </a:spcAft>
+            </a:pPr>
+            <a:r>
+              <a:rPr sz="850" b="1" i="0">
+                <a:solidFill>
+                  <a:srgbClr val="0066CC"/>
+                </a:solidFill>
+                <a:latin typeface="Inter"/>
+              </a:rPr>
+              <a:t>5-LEVEL DIGITAL MATURITY STAIRCASE</a:t>
+            </a:r>
+          </a:p>
+        </p:txBody>
+      </p:sp>
+      <p:sp>
+        <p:nvSpPr>
+          <p:cNvPr id="16" name="Rounded Rectangle 15"/>
+          <p:cNvSpPr/>
+          <p:nvPr/>
+        </p:nvSpPr>
+        <p:spPr>
+          <a:xfrm>
+            <a:off x="987552" y="5347411"/>
+            <a:ext cx="1964413" cy="669340"/>
+          </a:xfrm>
+          <a:prstGeom prst="roundRect">
+            <a:avLst/>
+          </a:prstGeom>
+          <a:solidFill>
+            <a:srgbClr val="FFFFFF"/>
+          </a:solidFill>
+          <a:ln w="9525">
+            <a:solidFill>
+              <a:srgbClr val="E2E8F0"/>
+            </a:solidFill>
+          </a:ln>
+        </p:spPr>
+        <p:style>
+          <a:lnRef idx="1">
+            <a:schemeClr val="accent1"/>
+          </a:lnRef>
+          <a:fillRef idx="3">
+            <a:schemeClr val="accent1"/>
+          </a:fillRef>
+          <a:effectRef idx="2">
+            <a:schemeClr val="accent1"/>
+          </a:effectRef>
+          <a:fontRef idx="minor">
+            <a:schemeClr val="lt1"/>
+          </a:fontRef>
+        </p:style>
+        <p:txBody>
+          <a:bodyPr rtlCol="0" anchor="ctr" wrap="square" tIns="36576"/>
+          <a:lstStyle/>
+          <a:p>
+            <a:pPr algn="ctr"/>
+            <a:r>
+              <a:rPr sz="1050" b="1" i="0">
+                <a:solidFill>
+                  <a:srgbClr val="0F172A"/>
+                </a:solidFill>
+                <a:latin typeface="Inter"/>
+              </a:rPr>
+              <a:t>1. Fragmented</a:t>
+            </a:r>
+          </a:p>
+        </p:txBody>
+      </p:sp>
+      <p:sp>
+        <p:nvSpPr>
+          <p:cNvPr id="17" name="Rounded Rectangle 16"/>
+          <p:cNvSpPr/>
+          <p:nvPr/>
+        </p:nvSpPr>
+        <p:spPr>
+          <a:xfrm>
+            <a:off x="987552" y="4641494"/>
+            <a:ext cx="2589454" cy="669340"/>
+          </a:xfrm>
+          <a:prstGeom prst="roundRect">
+            <a:avLst/>
+          </a:prstGeom>
+          <a:solidFill>
+            <a:srgbClr val="EEF2FF"/>
+          </a:solidFill>
+          <a:ln w="19050">
+            <a:solidFill>
+              <a:srgbClr val="D97706"/>
+            </a:solidFill>
+          </a:ln>
+        </p:spPr>
+        <p:style>
+          <a:lnRef idx="1">
+            <a:schemeClr val="accent1"/>
+          </a:lnRef>
+          <a:fillRef idx="3">
+            <a:schemeClr val="accent1"/>
+          </a:fillRef>
+          <a:effectRef idx="2">
+            <a:schemeClr val="accent1"/>
+          </a:effectRef>
+          <a:fontRef idx="minor">
+            <a:schemeClr val="lt1"/>
+          </a:fontRef>
+        </p:style>
+        <p:txBody>
+          <a:bodyPr rtlCol="0" anchor="ctr" wrap="square" tIns="36576"/>
+          <a:lstStyle/>
+          <a:p>
+            <a:pPr algn="ctr"/>
+            <a:r>
+              <a:rPr sz="1050" b="1" i="0">
+                <a:solidFill>
+                  <a:srgbClr val="D97706"/>
+                </a:solidFill>
+                <a:latin typeface="Inter"/>
+              </a:rPr>
+              <a:t>2. Standardized</a:t>
+            </a:r>
+          </a:p>
+          <a:p>
+            <a:r>
+              <a:rPr sz="819" b="1" i="0">
+                <a:solidFill>
+                  <a:srgbClr val="D97706"/>
+                </a:solidFill>
+                <a:latin typeface="Inter"/>
+              </a:rPr>
+              <a:t> [CURRENT POSITION]</a:t>
+            </a:r>
+          </a:p>
+        </p:txBody>
+      </p:sp>
+      <p:sp>
+        <p:nvSpPr>
+          <p:cNvPr id="18" name="Rounded Rectangle 17"/>
+          <p:cNvSpPr/>
+          <p:nvPr/>
+        </p:nvSpPr>
+        <p:spPr>
+          <a:xfrm>
+            <a:off x="987552" y="3935577"/>
+            <a:ext cx="3214494" cy="669340"/>
+          </a:xfrm>
+          <a:prstGeom prst="roundRect">
+            <a:avLst/>
+          </a:prstGeom>
+          <a:solidFill>
+            <a:srgbClr val="FFFFFF"/>
+          </a:solidFill>
+          <a:ln w="9525">
+            <a:solidFill>
+              <a:srgbClr val="E2E8F0"/>
+            </a:solidFill>
+          </a:ln>
+        </p:spPr>
+        <p:style>
+          <a:lnRef idx="1">
+            <a:schemeClr val="accent1"/>
+          </a:lnRef>
+          <a:fillRef idx="3">
+            <a:schemeClr val="accent1"/>
+          </a:fillRef>
+          <a:effectRef idx="2">
+            <a:schemeClr val="accent1"/>
+          </a:effectRef>
+          <a:fontRef idx="minor">
+            <a:schemeClr val="lt1"/>
+          </a:fontRef>
+        </p:style>
+        <p:txBody>
+          <a:bodyPr rtlCol="0" anchor="ctr" wrap="square" tIns="36576"/>
+          <a:lstStyle/>
+          <a:p>
+            <a:pPr algn="ctr"/>
+            <a:r>
+              <a:rPr sz="1050" b="1" i="0">
+                <a:solidFill>
+                  <a:srgbClr val="0F172A"/>
+                </a:solidFill>
+                <a:latin typeface="Inter"/>
+              </a:rPr>
+              <a:t>3. Integrated</a:t>
+            </a:r>
+          </a:p>
+        </p:txBody>
+      </p:sp>
+      <p:sp>
+        <p:nvSpPr>
+          <p:cNvPr id="19" name="Rounded Rectangle 18"/>
+          <p:cNvSpPr/>
+          <p:nvPr/>
+        </p:nvSpPr>
+        <p:spPr>
+          <a:xfrm>
+            <a:off x="987552" y="3229660"/>
+            <a:ext cx="3839535" cy="669340"/>
+          </a:xfrm>
+          <a:prstGeom prst="roundRect">
+            <a:avLst/>
+          </a:prstGeom>
+          <a:solidFill>
+            <a:srgbClr val="EEF2FF"/>
+          </a:solidFill>
+          <a:ln w="19050">
+            <a:solidFill>
+              <a:srgbClr val="10B981"/>
+            </a:solidFill>
+          </a:ln>
+        </p:spPr>
+        <p:style>
+          <a:lnRef idx="1">
+            <a:schemeClr val="accent1"/>
+          </a:lnRef>
+          <a:fillRef idx="3">
+            <a:schemeClr val="accent1"/>
+          </a:fillRef>
+          <a:effectRef idx="2">
+            <a:schemeClr val="accent1"/>
+          </a:effectRef>
+          <a:fontRef idx="minor">
+            <a:schemeClr val="lt1"/>
+          </a:fontRef>
+        </p:style>
+        <p:txBody>
+          <a:bodyPr rtlCol="0" anchor="ctr" wrap="square" tIns="36576"/>
+          <a:lstStyle/>
+          <a:p>
+            <a:pPr algn="ctr"/>
+            <a:r>
+              <a:rPr sz="1050" b="1" i="0">
+                <a:solidFill>
+                  <a:srgbClr val="10B981"/>
+                </a:solidFill>
+                <a:latin typeface="Inter"/>
+              </a:rPr>
+              <a:t>4. Intelligent</a:t>
+            </a:r>
+          </a:p>
+          <a:p>
+            <a:r>
+              <a:rPr sz="819" b="1" i="0">
+                <a:solidFill>
+                  <a:srgbClr val="10B981"/>
+                </a:solidFill>
+                <a:latin typeface="Inter"/>
+              </a:rPr>
+              <a:t> [TARGET HORIZON]</a:t>
+            </a:r>
+          </a:p>
+        </p:txBody>
+      </p:sp>
+      <p:sp>
+        <p:nvSpPr>
+          <p:cNvPr id="20" name="Rounded Rectangle 19"/>
+          <p:cNvSpPr/>
+          <p:nvPr/>
+        </p:nvSpPr>
+        <p:spPr>
+          <a:xfrm>
+            <a:off x="987552" y="2523744"/>
+            <a:ext cx="4464576" cy="669340"/>
+          </a:xfrm>
+          <a:prstGeom prst="roundRect">
+            <a:avLst/>
+          </a:prstGeom>
+          <a:solidFill>
+            <a:srgbClr val="FFFFFF"/>
+          </a:solidFill>
+          <a:ln w="9525">
+            <a:solidFill>
+              <a:srgbClr val="E2E8F0"/>
+            </a:solidFill>
+          </a:ln>
+        </p:spPr>
+        <p:style>
+          <a:lnRef idx="1">
+            <a:schemeClr val="accent1"/>
+          </a:lnRef>
+          <a:fillRef idx="3">
+            <a:schemeClr val="accent1"/>
+          </a:fillRef>
+          <a:effectRef idx="2">
+            <a:schemeClr val="accent1"/>
+          </a:effectRef>
+          <a:fontRef idx="minor">
+            <a:schemeClr val="lt1"/>
+          </a:fontRef>
+        </p:style>
+        <p:txBody>
+          <a:bodyPr rtlCol="0" anchor="ctr" wrap="square" tIns="36576"/>
+          <a:lstStyle/>
+          <a:p>
+            <a:pPr algn="ctr"/>
+            <a:r>
+              <a:rPr sz="1050" b="1" i="0">
+                <a:solidFill>
+                  <a:srgbClr val="0F172A"/>
+                </a:solidFill>
+                <a:latin typeface="Inter"/>
+              </a:rPr>
+              <a:t>5. Autonomous</a:t>
+            </a:r>
+          </a:p>
+        </p:txBody>
+      </p:sp>
+      <p:sp>
+        <p:nvSpPr>
+          <p:cNvPr id="21" name="Rounded Rectangle 20"/>
+          <p:cNvSpPr/>
+          <p:nvPr/>
+        </p:nvSpPr>
+        <p:spPr>
+          <a:xfrm>
+            <a:off x="5616720" y="2066544"/>
+            <a:ext cx="5686187" cy="4123943"/>
+          </a:xfrm>
+          <a:prstGeom prst="roundRect">
+            <a:avLst/>
+          </a:prstGeom>
+          <a:solidFill>
+            <a:srgbClr val="FFFFFF"/>
+          </a:solidFill>
+          <a:ln w="12700">
+            <a:solidFill>
+              <a:srgbClr val="E2E8F0"/>
+            </a:solidFill>
+          </a:ln>
+        </p:spPr>
+        <p:style>
+          <a:lnRef idx="1">
+            <a:schemeClr val="accent1"/>
+          </a:lnRef>
+          <a:fillRef idx="3">
+            <a:schemeClr val="accent1"/>
+          </a:fillRef>
+          <a:effectRef idx="2">
+            <a:schemeClr val="accent1"/>
+          </a:effectRef>
+          <a:fontRef idx="minor">
+            <a:schemeClr val="lt1"/>
+          </a:fontRef>
+        </p:style>
+        <p:txBody>
+          <a:bodyPr rtlCol="0" anchor="ctr"/>
+          <a:lstStyle/>
+          <a:p>
+            <a:pPr algn="ctr"/>
+          </a:p>
+        </p:txBody>
+      </p:sp>
+      <p:sp>
+        <p:nvSpPr>
+          <p:cNvPr id="22" name="Rectangle 21"/>
+          <p:cNvSpPr/>
+          <p:nvPr/>
+        </p:nvSpPr>
+        <p:spPr>
+          <a:xfrm>
+            <a:off x="5616720" y="2066544"/>
+            <a:ext cx="5686187" cy="329184"/>
+          </a:xfrm>
+          <a:prstGeom prst="rect">
+            <a:avLst/>
+          </a:prstGeom>
+          <a:solidFill>
+            <a:srgbClr val="EEF2FF"/>
+          </a:solidFill>
+          <a:ln>
+            <a:noFill/>
+          </a:ln>
+        </p:spPr>
+        <p:style>
+          <a:lnRef idx="1">
+            <a:schemeClr val="accent1"/>
+          </a:lnRef>
+          <a:fillRef idx="3">
+            <a:schemeClr val="accent1"/>
+          </a:fillRef>
+          <a:effectRef idx="2">
+            <a:schemeClr val="accent1"/>
+          </a:effectRef>
+          <a:fontRef idx="minor">
+            <a:schemeClr val="lt1"/>
+          </a:fontRef>
+        </p:style>
+        <p:txBody>
+          <a:bodyPr rtlCol="0" anchor="ctr" lIns="109728" tIns="54864"/>
           <a:lstStyle/>
           <a:p>
             <a:pPr algn="ctr">
@@ -15924,30 +13991,32 @@
                 </a:solidFill>
                 <a:latin typeface="Inter"/>
               </a:rPr>
-              <a:t>DIGITAL TRANSFORMATION MATURITY ASSESSMENT: MANUFACTURING DIGITAL TRANSFORMATION MATURITY</a:t>
-            </a:r>
-          </a:p>
-        </p:txBody>
-      </p:sp>
-      <p:sp>
-        <p:nvSpPr>
-          <p:cNvPr id="10" name="Rounded Rectangle 9"/>
+              <a:t>GAP AUDIT &amp; PRIORITY INTERVENTIONS (SCORE -&gt; GAP -&gt; ACTION)</a:t>
+            </a:r>
+          </a:p>
+        </p:txBody>
+      </p:sp>
+      <p:sp>
+        <p:nvSpPr>
+          <p:cNvPr id="23" name="Rounded Rectangle 22"/>
           <p:cNvSpPr/>
           <p:nvPr/>
         </p:nvSpPr>
         <p:spPr>
           <a:xfrm>
-            <a:off x="9631375" y="1554480"/>
-            <a:ext cx="1645920" cy="329184"/>
+            <a:off x="5708160" y="2505456"/>
+            <a:ext cx="5503307" cy="656539"/>
           </a:xfrm>
           <a:prstGeom prst="roundRect">
             <a:avLst/>
           </a:prstGeom>
           <a:solidFill>
-            <a:srgbClr val="10B981"/>
-          </a:solidFill>
-          <a:ln>
-            <a:noFill/>
+            <a:srgbClr val="FFFFFF"/>
+          </a:solidFill>
+          <a:ln w="12700">
+            <a:solidFill>
+              <a:srgbClr val="0066CC"/>
+            </a:solidFill>
           </a:ln>
         </p:spPr>
         <p:style>
@@ -15965,38 +14034,29 @@
           </a:fontRef>
         </p:style>
         <p:txBody>
-          <a:bodyPr rtlCol="0" anchor="ctr" lIns="0" rIns="0" tIns="0" bIns="0"/>
+          <a:bodyPr rtlCol="0" anchor="ctr"/>
           <a:lstStyle/>
           <a:p>
             <a:pPr algn="ctr"/>
-            <a:r>
-              <a:rPr sz="819" b="1" i="0">
-                <a:solidFill>
-                  <a:srgbClr val="FFFFFF"/>
-                </a:solidFill>
-                <a:latin typeface="Inter"/>
-              </a:rPr>
-              <a:t>TARGET: 4.2 / 5.0</a:t>
-            </a:r>
-          </a:p>
-        </p:txBody>
-      </p:sp>
-      <p:sp>
-        <p:nvSpPr>
-          <p:cNvPr id="11" name="Right Arrow 10"/>
+          </a:p>
+        </p:txBody>
+      </p:sp>
+      <p:sp>
+        <p:nvSpPr>
+          <p:cNvPr id="24" name="Rounded Rectangle 23"/>
           <p:cNvSpPr/>
           <p:nvPr/>
         </p:nvSpPr>
         <p:spPr>
           <a:xfrm>
-            <a:off x="9311335" y="1627632"/>
-            <a:ext cx="228600" cy="182880"/>
-          </a:xfrm>
-          <a:prstGeom prst="rightArrow">
-            <a:avLst/>
-          </a:prstGeom>
-          <a:solidFill>
-            <a:srgbClr val="0066CC"/>
+            <a:off x="5726448" y="2523744"/>
+            <a:ext cx="73152" cy="619963"/>
+          </a:xfrm>
+          <a:prstGeom prst="roundRect">
+            <a:avLst/>
+          </a:prstGeom>
+          <a:solidFill>
+            <a:srgbClr val="DC2626"/>
           </a:solidFill>
           <a:ln>
             <a:noFill/>
@@ -16026,23 +14086,92 @@
       </p:sp>
       <p:sp>
         <p:nvSpPr>
-          <p:cNvPr id="12" name="Rounded Rectangle 11"/>
+          <p:cNvPr id="25" name="TextBox 24"/>
+          <p:cNvSpPr txBox="1"/>
+          <p:nvPr/>
+        </p:nvSpPr>
+        <p:spPr>
+          <a:xfrm>
+            <a:off x="5854464" y="2523744"/>
+            <a:ext cx="5283851" cy="619963"/>
+          </a:xfrm>
+          <a:prstGeom prst="rect">
+            <a:avLst/>
+          </a:prstGeom>
+          <a:noFill/>
+        </p:spPr>
+        <p:txBody>
+          <a:bodyPr wrap="square" lIns="0" tIns="0" rIns="0" bIns="0">
+            <a:spAutoFit/>
+          </a:bodyPr>
+          <a:lstStyle/>
+          <a:p>
+            <a:r>
+              <a:rPr sz="1050" b="1" i="0">
+                <a:solidFill>
+                  <a:srgbClr val="0F172A"/>
+                </a:solidFill>
+                <a:latin typeface="Inter"/>
+              </a:rPr>
+              <a:t>Process &amp; Execution   [P1]</a:t>
+            </a:r>
+          </a:p>
+          <a:p>
+            <a:r>
+              <a:rPr sz="750" b="0" i="1">
+                <a:solidFill>
+                  <a:srgbClr val="0066CC"/>
+                </a:solidFill>
+                <a:latin typeface="Inter"/>
+              </a:rPr>
+              <a:t>Current: 2.1 / 5.0   ➔   Target: 4.3 / 5.0  (Gap: +2.2)</a:t>
+            </a:r>
+          </a:p>
+          <a:p>
+            <a:r>
+              <a:rPr sz="819" b="1" i="0">
+                <a:solidFill>
+                  <a:srgbClr val="DC2626"/>
+                </a:solidFill>
+                <a:latin typeface="Inter"/>
+              </a:rPr>
+              <a:t>▸ Gap: Paper travel cards &amp; manual dispatch</a:t>
+            </a:r>
+          </a:p>
+          <a:p>
+            <a:r>
+              <a:rPr sz="819" b="1" i="0">
+                <a:solidFill>
+                  <a:srgbClr val="10B981"/>
+                </a:solidFill>
+                <a:latin typeface="Inter"/>
+              </a:rPr>
+              <a:t>✓ Action: Deploy MES automated dispatch &amp; digital traveler</a:t>
+            </a:r>
+          </a:p>
+        </p:txBody>
+      </p:sp>
+      <p:sp>
+        <p:nvSpPr>
+          <p:cNvPr id="26" name="Rounded Rectangle 25"/>
           <p:cNvSpPr/>
           <p:nvPr/>
         </p:nvSpPr>
         <p:spPr>
           <a:xfrm>
-            <a:off x="7528255" y="1554480"/>
-            <a:ext cx="1691640" cy="329184"/>
+            <a:off x="5708160" y="3235147"/>
+            <a:ext cx="5503307" cy="656539"/>
           </a:xfrm>
           <a:prstGeom prst="roundRect">
             <a:avLst/>
           </a:prstGeom>
           <a:solidFill>
-            <a:srgbClr val="D97706"/>
-          </a:solidFill>
-          <a:ln>
-            <a:noFill/>
+            <a:srgbClr val="F1F5F9"/>
+          </a:solidFill>
+          <a:ln w="12700">
+            <a:solidFill>
+              <a:srgbClr val="0066CC"/>
+            </a:solidFill>
           </a:ln>
         </p:spPr>
         <p:style>
@@ -16060,43 +14189,32 @@
           </a:fontRef>
         </p:style>
         <p:txBody>
-          <a:bodyPr rtlCol="0" anchor="ctr" lIns="0" rIns="0" tIns="0" bIns="0"/>
+          <a:bodyPr rtlCol="0" anchor="ctr"/>
           <a:lstStyle/>
           <a:p>
             <a:pPr algn="ctr"/>
-            <a:r>
-              <a:rPr sz="819" b="1" i="0">
-                <a:solidFill>
-                  <a:srgbClr val="FFFFFF"/>
-                </a:solidFill>
-                <a:latin typeface="Inter"/>
-              </a:rPr>
-              <a:t>CURRENT: 2.4 / 5.0</a:t>
-            </a:r>
-          </a:p>
-        </p:txBody>
-      </p:sp>
-      <p:sp>
-        <p:nvSpPr>
-          <p:cNvPr id="13" name="Rounded Rectangle 12"/>
+          </a:p>
+        </p:txBody>
+      </p:sp>
+      <p:sp>
+        <p:nvSpPr>
+          <p:cNvPr id="27" name="Rounded Rectangle 26"/>
           <p:cNvSpPr/>
           <p:nvPr/>
         </p:nvSpPr>
         <p:spPr>
           <a:xfrm>
-            <a:off x="859536" y="2066544"/>
-            <a:ext cx="4720608" cy="4123943"/>
+            <a:off x="5726448" y="3253435"/>
+            <a:ext cx="73152" cy="619963"/>
           </a:xfrm>
           <a:prstGeom prst="roundRect">
             <a:avLst/>
           </a:prstGeom>
           <a:solidFill>
-            <a:srgbClr val="F1F5F9"/>
-          </a:solidFill>
-          <a:ln w="12700">
-            <a:solidFill>
-              <a:srgbClr val="E2E8F0"/>
-            </a:solidFill>
+            <a:srgbClr val="DC2626"/>
+          </a:solidFill>
+          <a:ln>
+            <a:noFill/>
           </a:ln>
         </p:spPr>
         <p:style>
@@ -16123,14 +14241,14 @@
       </p:sp>
       <p:sp>
         <p:nvSpPr>
-          <p:cNvPr id="14" name="TextBox 13"/>
+          <p:cNvPr id="28" name="TextBox 27"/>
           <p:cNvSpPr txBox="1"/>
           <p:nvPr/>
         </p:nvSpPr>
         <p:spPr>
           <a:xfrm>
-            <a:off x="969264" y="2139696"/>
-            <a:ext cx="4501152" cy="292608"/>
+            <a:off x="5854464" y="3253435"/>
+            <a:ext cx="5283851" cy="619963"/>
           </a:xfrm>
           <a:prstGeom prst="rect">
             <a:avLst/>
@@ -16138,38 +14256,66 @@
           <a:noFill/>
         </p:spPr>
         <p:txBody>
-          <a:bodyPr wrap="none" lIns="0" tIns="0">
+          <a:bodyPr wrap="square" lIns="0" tIns="0" rIns="0" bIns="0">
             <a:spAutoFit/>
           </a:bodyPr>
           <a:lstStyle/>
           <a:p>
-            <a:pPr>
-              <a:spcAft>
-                <a:spcPts val="200"/>
-              </a:spcAft>
-            </a:pPr>
-            <a:r>
-              <a:rPr sz="850" b="1" i="0">
+            <a:r>
+              <a:rPr sz="1050" b="1" i="0">
+                <a:solidFill>
+                  <a:srgbClr val="0F172A"/>
+                </a:solidFill>
+                <a:latin typeface="Inter"/>
+              </a:rPr>
+              <a:t>Data &amp; Genealogy   [P1]</a:t>
+            </a:r>
+          </a:p>
+          <a:p>
+            <a:r>
+              <a:rPr sz="750" b="0" i="1">
                 <a:solidFill>
                   <a:srgbClr val="0066CC"/>
                 </a:solidFill>
                 <a:latin typeface="Inter"/>
               </a:rPr>
-              <a:t>5-LEVEL DIGITAL MATURITY STAIRCASE</a:t>
-            </a:r>
-          </a:p>
-        </p:txBody>
-      </p:sp>
-      <p:sp>
-        <p:nvSpPr>
-          <p:cNvPr id="15" name="Rounded Rectangle 14"/>
+              <a:t>Current: 2.3 / 5.0   ➔   Target: 4.5 / 5.0  (Gap: +2.2)</a:t>
+            </a:r>
+          </a:p>
+          <a:p>
+            <a:r>
+              <a:rPr sz="819" b="1" i="0">
+                <a:solidFill>
+                  <a:srgbClr val="DC2626"/>
+                </a:solidFill>
+                <a:latin typeface="Inter"/>
+              </a:rPr>
+              <a:t>▸ Gap: Missing component-to-serial batch linkage</a:t>
+            </a:r>
+          </a:p>
+          <a:p>
+            <a:r>
+              <a:rPr sz="819" b="1" i="0">
+                <a:solidFill>
+                  <a:srgbClr val="10B981"/>
+                </a:solidFill>
+                <a:latin typeface="Inter"/>
+              </a:rPr>
+              <a:t>✓ Action: Automated barcode &amp; OPC-UA genealogy binding</a:t>
+            </a:r>
+          </a:p>
+        </p:txBody>
+      </p:sp>
+      <p:sp>
+        <p:nvSpPr>
+          <p:cNvPr id="29" name="Rounded Rectangle 28"/>
           <p:cNvSpPr/>
           <p:nvPr/>
         </p:nvSpPr>
         <p:spPr>
           <a:xfrm>
-            <a:off x="987552" y="5347411"/>
-            <a:ext cx="892915" cy="669340"/>
+            <a:off x="5708160" y="3964838"/>
+            <a:ext cx="5503307" cy="656539"/>
           </a:xfrm>
           <a:prstGeom prst="roundRect">
             <a:avLst/>
@@ -16177,7 +14323,7 @@
           <a:solidFill>
             <a:srgbClr val="FFFFFF"/>
           </a:solidFill>
-          <a:ln w="9525">
+          <a:ln w="6350">
             <a:solidFill>
               <a:srgbClr val="E2E8F0"/>
             </a:solidFill>
@@ -16198,43 +14344,32 @@
           </a:fontRef>
         </p:style>
         <p:txBody>
-          <a:bodyPr rtlCol="0" anchor="ctr" wrap="square" tIns="36576"/>
+          <a:bodyPr rtlCol="0" anchor="ctr"/>
           <a:lstStyle/>
           <a:p>
             <a:pPr algn="ctr"/>
-            <a:r>
-              <a:rPr sz="1050" b="1" i="0">
-                <a:solidFill>
-                  <a:srgbClr val="0F172A"/>
-                </a:solidFill>
-                <a:latin typeface="Inter"/>
-              </a:rPr>
-              <a:t>1. Fragmented</a:t>
-            </a:r>
-          </a:p>
-        </p:txBody>
-      </p:sp>
-      <p:sp>
-        <p:nvSpPr>
-          <p:cNvPr id="16" name="Rounded Rectangle 15"/>
+          </a:p>
+        </p:txBody>
+      </p:sp>
+      <p:sp>
+        <p:nvSpPr>
+          <p:cNvPr id="30" name="Rounded Rectangle 29"/>
           <p:cNvSpPr/>
           <p:nvPr/>
         </p:nvSpPr>
         <p:spPr>
           <a:xfrm>
-            <a:off x="987552" y="4641494"/>
-            <a:ext cx="1785830" cy="669340"/>
+            <a:off x="5726448" y="3983126"/>
+            <a:ext cx="73152" cy="619963"/>
           </a:xfrm>
           <a:prstGeom prst="roundRect">
             <a:avLst/>
           </a:prstGeom>
           <a:solidFill>
-            <a:srgbClr val="EEF2FF"/>
-          </a:solidFill>
-          <a:ln w="19050">
-            <a:solidFill>
-              <a:srgbClr val="D97706"/>
-            </a:solidFill>
+            <a:srgbClr val="D97706"/>
+          </a:solidFill>
+          <a:ln>
+            <a:noFill/>
           </a:ln>
         </p:spPr>
         <p:style>
@@ -16252,53 +14387,100 @@
           </a:fontRef>
         </p:style>
         <p:txBody>
-          <a:bodyPr rtlCol="0" anchor="ctr" wrap="square" tIns="36576"/>
+          <a:bodyPr rtlCol="0" anchor="ctr"/>
           <a:lstStyle/>
           <a:p>
             <a:pPr algn="ctr"/>
+          </a:p>
+        </p:txBody>
+      </p:sp>
+      <p:sp>
+        <p:nvSpPr>
+          <p:cNvPr id="31" name="TextBox 30"/>
+          <p:cNvSpPr txBox="1"/>
+          <p:nvPr/>
+        </p:nvSpPr>
+        <p:spPr>
+          <a:xfrm>
+            <a:off x="5854464" y="3983126"/>
+            <a:ext cx="5283851" cy="619963"/>
+          </a:xfrm>
+          <a:prstGeom prst="rect">
+            <a:avLst/>
+          </a:prstGeom>
+          <a:noFill/>
+        </p:spPr>
+        <p:txBody>
+          <a:bodyPr wrap="square" lIns="0" tIns="0" rIns="0" bIns="0">
+            <a:spAutoFit/>
+          </a:bodyPr>
+          <a:lstStyle/>
+          <a:p>
             <a:r>
               <a:rPr sz="1050" b="1" i="0">
                 <a:solidFill>
-                  <a:srgbClr val="D97706"/>
-                </a:solidFill>
-                <a:latin typeface="Inter"/>
-              </a:rPr>
-              <a:t>2. Standardized</a:t>
+                  <a:srgbClr val="0F172A"/>
+                </a:solidFill>
+                <a:latin typeface="Inter"/>
+              </a:rPr>
+              <a:t>SAP Clean Core   [P2]</a:t>
+            </a:r>
+          </a:p>
+          <a:p>
+            <a:r>
+              <a:rPr sz="750" b="0" i="1">
+                <a:solidFill>
+                  <a:srgbClr val="0066CC"/>
+                </a:solidFill>
+                <a:latin typeface="Inter"/>
+              </a:rPr>
+              <a:t>Current: 2.6 / 5.0   ➔   Target: 4.2 / 5.0  (Gap: +1.6)</a:t>
             </a:r>
           </a:p>
           <a:p>
             <a:r>
               <a:rPr sz="819" b="1" i="0">
                 <a:solidFill>
-                  <a:srgbClr val="D97706"/>
-                </a:solidFill>
-                <a:latin typeface="Inter"/>
-              </a:rPr>
-              <a:t> [CURRENT POSITION]</a:t>
-            </a:r>
-          </a:p>
-        </p:txBody>
-      </p:sp>
-      <p:sp>
-        <p:nvSpPr>
-          <p:cNvPr id="17" name="Rounded Rectangle 16"/>
+                  <a:srgbClr val="64748B"/>
+                </a:solidFill>
+                <a:latin typeface="Inter"/>
+              </a:rPr>
+              <a:t>▸ Gap: Excess custom Z-tables blocking cloud upgrade</a:t>
+            </a:r>
+          </a:p>
+          <a:p>
+            <a:r>
+              <a:rPr sz="819" b="1" i="0">
+                <a:solidFill>
+                  <a:srgbClr val="10B981"/>
+                </a:solidFill>
+                <a:latin typeface="Inter"/>
+              </a:rPr>
+              <a:t>✓ Action: Migrate custom code to BTP event mesh</a:t>
+            </a:r>
+          </a:p>
+        </p:txBody>
+      </p:sp>
+      <p:sp>
+        <p:nvSpPr>
+          <p:cNvPr id="32" name="Rounded Rectangle 31"/>
           <p:cNvSpPr/>
           <p:nvPr/>
         </p:nvSpPr>
         <p:spPr>
           <a:xfrm>
-            <a:off x="987552" y="3935577"/>
-            <a:ext cx="2678745" cy="669340"/>
+            <a:off x="5708160" y="4694529"/>
+            <a:ext cx="5503307" cy="656539"/>
           </a:xfrm>
           <a:prstGeom prst="roundRect">
             <a:avLst/>
           </a:prstGeom>
           <a:solidFill>
-            <a:srgbClr val="FFFFFF"/>
-          </a:solidFill>
-          <a:ln w="9525">
+            <a:srgbClr val="F1F5F9"/>
+          </a:solidFill>
+          <a:ln w="12700">
             <a:solidFill>
-              <a:srgbClr val="E2E8F0"/>
+              <a:srgbClr val="0066CC"/>
             </a:solidFill>
           </a:ln>
         </p:spPr>
@@ -16317,43 +14499,32 @@
           </a:fontRef>
         </p:style>
         <p:txBody>
-          <a:bodyPr rtlCol="0" anchor="ctr" wrap="square" tIns="36576"/>
+          <a:bodyPr rtlCol="0" anchor="ctr"/>
           <a:lstStyle/>
           <a:p>
             <a:pPr algn="ctr"/>
-            <a:r>
-              <a:rPr sz="1050" b="1" i="0">
-                <a:solidFill>
-                  <a:srgbClr val="0F172A"/>
-                </a:solidFill>
-                <a:latin typeface="Inter"/>
-              </a:rPr>
-              <a:t>3. Integrated</a:t>
-            </a:r>
-          </a:p>
-        </p:txBody>
-      </p:sp>
-      <p:sp>
-        <p:nvSpPr>
-          <p:cNvPr id="18" name="Rounded Rectangle 17"/>
+          </a:p>
+        </p:txBody>
+      </p:sp>
+      <p:sp>
+        <p:nvSpPr>
+          <p:cNvPr id="33" name="Rounded Rectangle 32"/>
           <p:cNvSpPr/>
           <p:nvPr/>
         </p:nvSpPr>
         <p:spPr>
           <a:xfrm>
-            <a:off x="987552" y="3229660"/>
-            <a:ext cx="3571661" cy="669340"/>
+            <a:off x="5726448" y="4712817"/>
+            <a:ext cx="73152" cy="619963"/>
           </a:xfrm>
           <a:prstGeom prst="roundRect">
             <a:avLst/>
           </a:prstGeom>
           <a:solidFill>
-            <a:srgbClr val="EEF2FF"/>
-          </a:solidFill>
-          <a:ln w="19050">
-            <a:solidFill>
-              <a:srgbClr val="10B981"/>
-            </a:solidFill>
+            <a:srgbClr val="DC2626"/>
+          </a:solidFill>
+          <a:ln>
+            <a:noFill/>
           </a:ln>
         </p:spPr>
         <p:style>
@@ -16371,43 +14542,90 @@
           </a:fontRef>
         </p:style>
         <p:txBody>
-          <a:bodyPr rtlCol="0" anchor="ctr" wrap="square" tIns="36576"/>
+          <a:bodyPr rtlCol="0" anchor="ctr"/>
           <a:lstStyle/>
           <a:p>
             <a:pPr algn="ctr"/>
+          </a:p>
+        </p:txBody>
+      </p:sp>
+      <p:sp>
+        <p:nvSpPr>
+          <p:cNvPr id="34" name="TextBox 33"/>
+          <p:cNvSpPr txBox="1"/>
+          <p:nvPr/>
+        </p:nvSpPr>
+        <p:spPr>
+          <a:xfrm>
+            <a:off x="5854464" y="4712817"/>
+            <a:ext cx="5283851" cy="619963"/>
+          </a:xfrm>
+          <a:prstGeom prst="rect">
+            <a:avLst/>
+          </a:prstGeom>
+          <a:noFill/>
+        </p:spPr>
+        <p:txBody>
+          <a:bodyPr wrap="square" lIns="0" tIns="0" rIns="0" bIns="0">
+            <a:spAutoFit/>
+          </a:bodyPr>
+          <a:lstStyle/>
+          <a:p>
             <a:r>
               <a:rPr sz="1050" b="1" i="0">
                 <a:solidFill>
+                  <a:srgbClr val="0F172A"/>
+                </a:solidFill>
+                <a:latin typeface="Inter"/>
+              </a:rPr>
+              <a:t>Quality &amp; Rework   [P1]</a:t>
+            </a:r>
+          </a:p>
+          <a:p>
+            <a:r>
+              <a:rPr sz="750" b="0" i="1">
+                <a:solidFill>
+                  <a:srgbClr val="0066CC"/>
+                </a:solidFill>
+                <a:latin typeface="Inter"/>
+              </a:rPr>
+              <a:t>Current: 2.2 / 5.0   ➔   Target: 4.0 / 5.0  (Gap: +1.8)</a:t>
+            </a:r>
+          </a:p>
+          <a:p>
+            <a:r>
+              <a:rPr sz="819" b="1" i="0">
+                <a:solidFill>
+                  <a:srgbClr val="DC2626"/>
+                </a:solidFill>
+                <a:latin typeface="Inter"/>
+              </a:rPr>
+              <a:t>▸ Gap: Delayed defect logging &amp; missing CAPA loops</a:t>
+            </a:r>
+          </a:p>
+          <a:p>
+            <a:r>
+              <a:rPr sz="819" b="1" i="0">
+                <a:solidFill>
                   <a:srgbClr val="10B981"/>
                 </a:solidFill>
                 <a:latin typeface="Inter"/>
               </a:rPr>
-              <a:t>4. Intelligent</a:t>
-            </a:r>
-          </a:p>
-          <a:p>
-            <a:r>
-              <a:rPr sz="819" b="1" i="0">
-                <a:solidFill>
-                  <a:srgbClr val="10B981"/>
-                </a:solidFill>
-                <a:latin typeface="Inter"/>
-              </a:rPr>
-              <a:t> [TARGET HORIZON]</a:t>
-            </a:r>
-          </a:p>
-        </p:txBody>
-      </p:sp>
-      <p:sp>
-        <p:nvSpPr>
-          <p:cNvPr id="19" name="Rounded Rectangle 18"/>
+              <a:t>✓ Action: Closed-loop digital inspection interlocks</a:t>
+            </a:r>
+          </a:p>
+        </p:txBody>
+      </p:sp>
+      <p:sp>
+        <p:nvSpPr>
+          <p:cNvPr id="35" name="Rounded Rectangle 34"/>
           <p:cNvSpPr/>
           <p:nvPr/>
         </p:nvSpPr>
         <p:spPr>
           <a:xfrm>
-            <a:off x="987552" y="2523744"/>
-            <a:ext cx="4464576" cy="669340"/>
+            <a:off x="5708160" y="5424220"/>
+            <a:ext cx="5503307" cy="656539"/>
           </a:xfrm>
           <a:prstGeom prst="roundRect">
             <a:avLst/>
@@ -16415,7 +14633,7 @@
           <a:solidFill>
             <a:srgbClr val="FFFFFF"/>
           </a:solidFill>
-          <a:ln w="9525">
+          <a:ln w="6350">
             <a:solidFill>
               <a:srgbClr val="E2E8F0"/>
             </a:solidFill>
@@ -16436,43 +14654,32 @@
           </a:fontRef>
         </p:style>
         <p:txBody>
-          <a:bodyPr rtlCol="0" anchor="ctr" wrap="square" tIns="36576"/>
+          <a:bodyPr rtlCol="0" anchor="ctr"/>
           <a:lstStyle/>
           <a:p>
             <a:pPr algn="ctr"/>
-            <a:r>
-              <a:rPr sz="1050" b="1" i="0">
-                <a:solidFill>
-                  <a:srgbClr val="0F172A"/>
-                </a:solidFill>
-                <a:latin typeface="Inter"/>
-              </a:rPr>
-              <a:t>5. Autonomous</a:t>
-            </a:r>
-          </a:p>
-        </p:txBody>
-      </p:sp>
-      <p:sp>
-        <p:nvSpPr>
-          <p:cNvPr id="20" name="Rounded Rectangle 19"/>
+          </a:p>
+        </p:txBody>
+      </p:sp>
+      <p:sp>
+        <p:nvSpPr>
+          <p:cNvPr id="36" name="Rounded Rectangle 35"/>
           <p:cNvSpPr/>
           <p:nvPr/>
         </p:nvSpPr>
         <p:spPr>
           <a:xfrm>
-            <a:off x="5616720" y="2066544"/>
-            <a:ext cx="5686187" cy="4123943"/>
+            <a:off x="5726448" y="5442508"/>
+            <a:ext cx="73152" cy="619963"/>
           </a:xfrm>
           <a:prstGeom prst="roundRect">
             <a:avLst/>
           </a:prstGeom>
           <a:solidFill>
-            <a:srgbClr val="FFFFFF"/>
-          </a:solidFill>
-          <a:ln w="12700">
-            <a:solidFill>
-              <a:srgbClr val="E2E8F0"/>
-            </a:solidFill>
+            <a:srgbClr val="D97706"/>
+          </a:solidFill>
+          <a:ln>
+            <a:noFill/>
           </a:ln>
         </p:spPr>
         <p:style>
@@ -16499,115 +14706,14 @@
       </p:sp>
       <p:sp>
         <p:nvSpPr>
-          <p:cNvPr id="21" name="Rectangle 20"/>
-          <p:cNvSpPr/>
-          <p:nvPr/>
-        </p:nvSpPr>
-        <p:spPr>
-          <a:xfrm>
-            <a:off x="5616720" y="2066544"/>
-            <a:ext cx="5686187" cy="329184"/>
-          </a:xfrm>
-          <a:prstGeom prst="rect">
-            <a:avLst/>
-          </a:prstGeom>
-          <a:solidFill>
-            <a:srgbClr val="EEF2FF"/>
-          </a:solidFill>
-          <a:ln>
-            <a:noFill/>
-          </a:ln>
-        </p:spPr>
-        <p:style>
-          <a:lnRef idx="1">
-            <a:schemeClr val="accent1"/>
-          </a:lnRef>
-          <a:fillRef idx="3">
-            <a:schemeClr val="accent1"/>
-          </a:fillRef>
-          <a:effectRef idx="2">
-            <a:schemeClr val="accent1"/>
-          </a:effectRef>
-          <a:fontRef idx="minor">
-            <a:schemeClr val="lt1"/>
-          </a:fontRef>
-        </p:style>
-        <p:txBody>
-          <a:bodyPr rtlCol="0" anchor="ctr" lIns="109728" tIns="54864"/>
-          <a:lstStyle/>
-          <a:p>
-            <a:pPr algn="ctr">
-              <a:spcAft>
-                <a:spcPts val="200"/>
-              </a:spcAft>
-            </a:pPr>
-            <a:r>
-              <a:rPr sz="850" b="1" i="0">
-                <a:solidFill>
-                  <a:srgbClr val="0066CC"/>
-                </a:solidFill>
-                <a:latin typeface="Inter"/>
-              </a:rPr>
-              <a:t>GAP AUDIT &amp; PRIORITY INTERVENTIONS (SCORE -&gt; GAP -&gt; ACTION)</a:t>
-            </a:r>
-          </a:p>
-        </p:txBody>
-      </p:sp>
-      <p:sp>
-        <p:nvSpPr>
-          <p:cNvPr id="22" name="Rounded Rectangle 21"/>
-          <p:cNvSpPr/>
-          <p:nvPr/>
-        </p:nvSpPr>
-        <p:spPr>
-          <a:xfrm>
-            <a:off x="5708160" y="2505456"/>
-            <a:ext cx="5503307" cy="656539"/>
-          </a:xfrm>
-          <a:prstGeom prst="roundRect">
-            <a:avLst/>
-          </a:prstGeom>
-          <a:solidFill>
-            <a:srgbClr val="FFFFFF"/>
-          </a:solidFill>
-          <a:ln w="12700">
-            <a:solidFill>
-              <a:srgbClr val="0066CC"/>
-            </a:solidFill>
-          </a:ln>
-        </p:spPr>
-        <p:style>
-          <a:lnRef idx="1">
-            <a:schemeClr val="accent1"/>
-          </a:lnRef>
-          <a:fillRef idx="3">
-            <a:schemeClr val="accent1"/>
-          </a:fillRef>
-          <a:effectRef idx="2">
-            <a:schemeClr val="accent1"/>
-          </a:effectRef>
-          <a:fontRef idx="minor">
-            <a:schemeClr val="lt1"/>
-          </a:fontRef>
-        </p:style>
-        <p:txBody>
-          <a:bodyPr rtlCol="0" anchor="ctr"/>
-          <a:lstStyle/>
-          <a:p>
-            <a:pPr algn="ctr"/>
-          </a:p>
-        </p:txBody>
-      </p:sp>
-      <p:sp>
-        <p:nvSpPr>
-          <p:cNvPr id="23" name="TextBox 22"/>
+          <p:cNvPr id="37" name="TextBox 36"/>
           <p:cNvSpPr txBox="1"/>
           <p:nvPr/>
         </p:nvSpPr>
         <p:spPr>
           <a:xfrm>
-            <a:off x="5763024" y="2523744"/>
-            <a:ext cx="5393579" cy="619963"/>
+            <a:off x="5854464" y="5442508"/>
+            <a:ext cx="5283851" cy="619963"/>
           </a:xfrm>
           <a:prstGeom prst="rect">
             <a:avLst/>
@@ -16627,7 +14733,7 @@
                 </a:solidFill>
                 <a:latin typeface="Inter"/>
               </a:rPr>
-              <a:t>Process &amp; Execution  [P1]</a:t>
+              <a:t>Governance &amp; RACI   [P2]</a:t>
             </a:r>
           </a:p>
           <a:p>
@@ -16638,18 +14744,18 @@
                 </a:solidFill>
                 <a:latin typeface="Inter"/>
               </a:rPr>
-              <a:t>Current: 2.1 / 5.0  ➔  Target: 4.3 / 5.0 (Gap: +2.2)</a:t>
+              <a:t>Current: 2.8 / 5.0   ➔   Target: 4.0 / 5.0  (Gap: +1.2)</a:t>
             </a:r>
           </a:p>
           <a:p>
             <a:r>
               <a:rPr sz="819" b="1" i="0">
                 <a:solidFill>
-                  <a:srgbClr val="DC2626"/>
-                </a:solidFill>
-                <a:latin typeface="Inter"/>
-              </a:rPr>
-              <a:t>Gap: Paper travel cards &amp; manual dispatch</a:t>
+                  <a:srgbClr val="64748B"/>
+                </a:solidFill>
+                <a:latin typeface="Inter"/>
+              </a:rPr>
+              <a:t>▸ Gap: Ambiguous IT/OT boundary ownership</a:t>
             </a:r>
           </a:p>
           <a:p>
@@ -16660,455 +14766,7 @@
                 </a:solidFill>
                 <a:latin typeface="Inter"/>
               </a:rPr>
-              <a:t>Intervention: Deploy MES automated dispatch &amp; digital traveler</a:t>
-            </a:r>
-          </a:p>
-        </p:txBody>
-      </p:sp>
-      <p:sp>
-        <p:nvSpPr>
-          <p:cNvPr id="24" name="Rounded Rectangle 23"/>
-          <p:cNvSpPr/>
-          <p:nvPr/>
-        </p:nvSpPr>
-        <p:spPr>
-          <a:xfrm>
-            <a:off x="5708160" y="3235147"/>
-            <a:ext cx="5503307" cy="656539"/>
-          </a:xfrm>
-          <a:prstGeom prst="roundRect">
-            <a:avLst/>
-          </a:prstGeom>
-          <a:solidFill>
-            <a:srgbClr val="F1F5F9"/>
-          </a:solidFill>
-          <a:ln w="12700">
-            <a:solidFill>
-              <a:srgbClr val="0066CC"/>
-            </a:solidFill>
-          </a:ln>
-        </p:spPr>
-        <p:style>
-          <a:lnRef idx="1">
-            <a:schemeClr val="accent1"/>
-          </a:lnRef>
-          <a:fillRef idx="3">
-            <a:schemeClr val="accent1"/>
-          </a:fillRef>
-          <a:effectRef idx="2">
-            <a:schemeClr val="accent1"/>
-          </a:effectRef>
-          <a:fontRef idx="minor">
-            <a:schemeClr val="lt1"/>
-          </a:fontRef>
-        </p:style>
-        <p:txBody>
-          <a:bodyPr rtlCol="0" anchor="ctr"/>
-          <a:lstStyle/>
-          <a:p>
-            <a:pPr algn="ctr"/>
-          </a:p>
-        </p:txBody>
-      </p:sp>
-      <p:sp>
-        <p:nvSpPr>
-          <p:cNvPr id="25" name="TextBox 24"/>
-          <p:cNvSpPr txBox="1"/>
-          <p:nvPr/>
-        </p:nvSpPr>
-        <p:spPr>
-          <a:xfrm>
-            <a:off x="5763024" y="3253435"/>
-            <a:ext cx="5393579" cy="619963"/>
-          </a:xfrm>
-          <a:prstGeom prst="rect">
-            <a:avLst/>
-          </a:prstGeom>
-          <a:noFill/>
-        </p:spPr>
-        <p:txBody>
-          <a:bodyPr wrap="square" lIns="0" tIns="0" rIns="0" bIns="0">
-            <a:spAutoFit/>
-          </a:bodyPr>
-          <a:lstStyle/>
-          <a:p>
-            <a:r>
-              <a:rPr sz="1050" b="1" i="0">
-                <a:solidFill>
-                  <a:srgbClr val="0F172A"/>
-                </a:solidFill>
-                <a:latin typeface="Inter"/>
-              </a:rPr>
-              <a:t>Data &amp; Genealogy  [P1]</a:t>
-            </a:r>
-          </a:p>
-          <a:p>
-            <a:r>
-              <a:rPr sz="750" b="0" i="1">
-                <a:solidFill>
-                  <a:srgbClr val="0066CC"/>
-                </a:solidFill>
-                <a:latin typeface="Inter"/>
-              </a:rPr>
-              <a:t>Current: 2.3 / 5.0  ➔  Target: 4.5 / 5.0 (Gap: +2.2)</a:t>
-            </a:r>
-          </a:p>
-          <a:p>
-            <a:r>
-              <a:rPr sz="819" b="1" i="0">
-                <a:solidFill>
-                  <a:srgbClr val="DC2626"/>
-                </a:solidFill>
-                <a:latin typeface="Inter"/>
-              </a:rPr>
-              <a:t>Gap: Missing component-to-serial batch linkage</a:t>
-            </a:r>
-          </a:p>
-          <a:p>
-            <a:r>
-              <a:rPr sz="819" b="1" i="0">
-                <a:solidFill>
-                  <a:srgbClr val="10B981"/>
-                </a:solidFill>
-                <a:latin typeface="Inter"/>
-              </a:rPr>
-              <a:t>Intervention: Automated barcode &amp; OPC-UA genealogy binding</a:t>
-            </a:r>
-          </a:p>
-        </p:txBody>
-      </p:sp>
-      <p:sp>
-        <p:nvSpPr>
-          <p:cNvPr id="26" name="Rounded Rectangle 25"/>
-          <p:cNvSpPr/>
-          <p:nvPr/>
-        </p:nvSpPr>
-        <p:spPr>
-          <a:xfrm>
-            <a:off x="5708160" y="3964838"/>
-            <a:ext cx="5503307" cy="656539"/>
-          </a:xfrm>
-          <a:prstGeom prst="roundRect">
-            <a:avLst/>
-          </a:prstGeom>
-          <a:solidFill>
-            <a:srgbClr val="FFFFFF"/>
-          </a:solidFill>
-          <a:ln w="6350">
-            <a:solidFill>
-              <a:srgbClr val="E2E8F0"/>
-            </a:solidFill>
-          </a:ln>
-        </p:spPr>
-        <p:style>
-          <a:lnRef idx="1">
-            <a:schemeClr val="accent1"/>
-          </a:lnRef>
-          <a:fillRef idx="3">
-            <a:schemeClr val="accent1"/>
-          </a:fillRef>
-          <a:effectRef idx="2">
-            <a:schemeClr val="accent1"/>
-          </a:effectRef>
-          <a:fontRef idx="minor">
-            <a:schemeClr val="lt1"/>
-          </a:fontRef>
-        </p:style>
-        <p:txBody>
-          <a:bodyPr rtlCol="0" anchor="ctr"/>
-          <a:lstStyle/>
-          <a:p>
-            <a:pPr algn="ctr"/>
-          </a:p>
-        </p:txBody>
-      </p:sp>
-      <p:sp>
-        <p:nvSpPr>
-          <p:cNvPr id="27" name="TextBox 26"/>
-          <p:cNvSpPr txBox="1"/>
-          <p:nvPr/>
-        </p:nvSpPr>
-        <p:spPr>
-          <a:xfrm>
-            <a:off x="5763024" y="3983126"/>
-            <a:ext cx="5393579" cy="619963"/>
-          </a:xfrm>
-          <a:prstGeom prst="rect">
-            <a:avLst/>
-          </a:prstGeom>
-          <a:noFill/>
-        </p:spPr>
-        <p:txBody>
-          <a:bodyPr wrap="square" lIns="0" tIns="0" rIns="0" bIns="0">
-            <a:spAutoFit/>
-          </a:bodyPr>
-          <a:lstStyle/>
-          <a:p>
-            <a:r>
-              <a:rPr sz="1050" b="1" i="0">
-                <a:solidFill>
-                  <a:srgbClr val="0F172A"/>
-                </a:solidFill>
-                <a:latin typeface="Inter"/>
-              </a:rPr>
-              <a:t>SAP Clean Core  [P2]</a:t>
-            </a:r>
-          </a:p>
-          <a:p>
-            <a:r>
-              <a:rPr sz="750" b="0" i="1">
-                <a:solidFill>
-                  <a:srgbClr val="0066CC"/>
-                </a:solidFill>
-                <a:latin typeface="Inter"/>
-              </a:rPr>
-              <a:t>Current: 2.6 / 5.0  ➔  Target: 4.2 / 5.0 (Gap: +1.6)</a:t>
-            </a:r>
-          </a:p>
-          <a:p>
-            <a:r>
-              <a:rPr sz="819" b="1" i="0">
-                <a:solidFill>
-                  <a:srgbClr val="64748B"/>
-                </a:solidFill>
-                <a:latin typeface="Inter"/>
-              </a:rPr>
-              <a:t>Gap: Excess custom Z-tables blocking cloud upgrade</a:t>
-            </a:r>
-          </a:p>
-          <a:p>
-            <a:r>
-              <a:rPr sz="819" b="1" i="0">
-                <a:solidFill>
-                  <a:srgbClr val="10B981"/>
-                </a:solidFill>
-                <a:latin typeface="Inter"/>
-              </a:rPr>
-              <a:t>Intervention: Migrate custom code to BTP event mesh</a:t>
-            </a:r>
-          </a:p>
-        </p:txBody>
-      </p:sp>
-      <p:sp>
-        <p:nvSpPr>
-          <p:cNvPr id="28" name="Rounded Rectangle 27"/>
-          <p:cNvSpPr/>
-          <p:nvPr/>
-        </p:nvSpPr>
-        <p:spPr>
-          <a:xfrm>
-            <a:off x="5708160" y="4694529"/>
-            <a:ext cx="5503307" cy="656539"/>
-          </a:xfrm>
-          <a:prstGeom prst="roundRect">
-            <a:avLst/>
-          </a:prstGeom>
-          <a:solidFill>
-            <a:srgbClr val="F1F5F9"/>
-          </a:solidFill>
-          <a:ln w="12700">
-            <a:solidFill>
-              <a:srgbClr val="0066CC"/>
-            </a:solidFill>
-          </a:ln>
-        </p:spPr>
-        <p:style>
-          <a:lnRef idx="1">
-            <a:schemeClr val="accent1"/>
-          </a:lnRef>
-          <a:fillRef idx="3">
-            <a:schemeClr val="accent1"/>
-          </a:fillRef>
-          <a:effectRef idx="2">
-            <a:schemeClr val="accent1"/>
-          </a:effectRef>
-          <a:fontRef idx="minor">
-            <a:schemeClr val="lt1"/>
-          </a:fontRef>
-        </p:style>
-        <p:txBody>
-          <a:bodyPr rtlCol="0" anchor="ctr"/>
-          <a:lstStyle/>
-          <a:p>
-            <a:pPr algn="ctr"/>
-          </a:p>
-        </p:txBody>
-      </p:sp>
-      <p:sp>
-        <p:nvSpPr>
-          <p:cNvPr id="29" name="TextBox 28"/>
-          <p:cNvSpPr txBox="1"/>
-          <p:nvPr/>
-        </p:nvSpPr>
-        <p:spPr>
-          <a:xfrm>
-            <a:off x="5763024" y="4712817"/>
-            <a:ext cx="5393579" cy="619963"/>
-          </a:xfrm>
-          <a:prstGeom prst="rect">
-            <a:avLst/>
-          </a:prstGeom>
-          <a:noFill/>
-        </p:spPr>
-        <p:txBody>
-          <a:bodyPr wrap="square" lIns="0" tIns="0" rIns="0" bIns="0">
-            <a:spAutoFit/>
-          </a:bodyPr>
-          <a:lstStyle/>
-          <a:p>
-            <a:r>
-              <a:rPr sz="1050" b="1" i="0">
-                <a:solidFill>
-                  <a:srgbClr val="0F172A"/>
-                </a:solidFill>
-                <a:latin typeface="Inter"/>
-              </a:rPr>
-              <a:t>Quality &amp; Rework  [P1]</a:t>
-            </a:r>
-          </a:p>
-          <a:p>
-            <a:r>
-              <a:rPr sz="750" b="0" i="1">
-                <a:solidFill>
-                  <a:srgbClr val="0066CC"/>
-                </a:solidFill>
-                <a:latin typeface="Inter"/>
-              </a:rPr>
-              <a:t>Current: 2.2 / 5.0  ➔  Target: 4.0 / 5.0 (Gap: +1.8)</a:t>
-            </a:r>
-          </a:p>
-          <a:p>
-            <a:r>
-              <a:rPr sz="819" b="1" i="0">
-                <a:solidFill>
-                  <a:srgbClr val="DC2626"/>
-                </a:solidFill>
-                <a:latin typeface="Inter"/>
-              </a:rPr>
-              <a:t>Gap: Delayed defect logging &amp; missing CAPA loops</a:t>
-            </a:r>
-          </a:p>
-          <a:p>
-            <a:r>
-              <a:rPr sz="819" b="1" i="0">
-                <a:solidFill>
-                  <a:srgbClr val="10B981"/>
-                </a:solidFill>
-                <a:latin typeface="Inter"/>
-              </a:rPr>
-              <a:t>Intervention: Closed-loop digital inspection interlocks</a:t>
-            </a:r>
-          </a:p>
-        </p:txBody>
-      </p:sp>
-      <p:sp>
-        <p:nvSpPr>
-          <p:cNvPr id="30" name="Rounded Rectangle 29"/>
-          <p:cNvSpPr/>
-          <p:nvPr/>
-        </p:nvSpPr>
-        <p:spPr>
-          <a:xfrm>
-            <a:off x="5708160" y="5424220"/>
-            <a:ext cx="5503307" cy="656539"/>
-          </a:xfrm>
-          <a:prstGeom prst="roundRect">
-            <a:avLst/>
-          </a:prstGeom>
-          <a:solidFill>
-            <a:srgbClr val="FFFFFF"/>
-          </a:solidFill>
-          <a:ln w="6350">
-            <a:solidFill>
-              <a:srgbClr val="E2E8F0"/>
-            </a:solidFill>
-          </a:ln>
-        </p:spPr>
-        <p:style>
-          <a:lnRef idx="1">
-            <a:schemeClr val="accent1"/>
-          </a:lnRef>
-          <a:fillRef idx="3">
-            <a:schemeClr val="accent1"/>
-          </a:fillRef>
-          <a:effectRef idx="2">
-            <a:schemeClr val="accent1"/>
-          </a:effectRef>
-          <a:fontRef idx="minor">
-            <a:schemeClr val="lt1"/>
-          </a:fontRef>
-        </p:style>
-        <p:txBody>
-          <a:bodyPr rtlCol="0" anchor="ctr"/>
-          <a:lstStyle/>
-          <a:p>
-            <a:pPr algn="ctr"/>
-          </a:p>
-        </p:txBody>
-      </p:sp>
-      <p:sp>
-        <p:nvSpPr>
-          <p:cNvPr id="31" name="TextBox 30"/>
-          <p:cNvSpPr txBox="1"/>
-          <p:nvPr/>
-        </p:nvSpPr>
-        <p:spPr>
-          <a:xfrm>
-            <a:off x="5763024" y="5442508"/>
-            <a:ext cx="5393579" cy="619963"/>
-          </a:xfrm>
-          <a:prstGeom prst="rect">
-            <a:avLst/>
-          </a:prstGeom>
-          <a:noFill/>
-        </p:spPr>
-        <p:txBody>
-          <a:bodyPr wrap="square" lIns="0" tIns="0" rIns="0" bIns="0">
-            <a:spAutoFit/>
-          </a:bodyPr>
-          <a:lstStyle/>
-          <a:p>
-            <a:r>
-              <a:rPr sz="1050" b="1" i="0">
-                <a:solidFill>
-                  <a:srgbClr val="0F172A"/>
-                </a:solidFill>
-                <a:latin typeface="Inter"/>
-              </a:rPr>
-              <a:t>Governance &amp; RACI  [P2]</a:t>
-            </a:r>
-          </a:p>
-          <a:p>
-            <a:r>
-              <a:rPr sz="750" b="0" i="1">
-                <a:solidFill>
-                  <a:srgbClr val="0066CC"/>
-                </a:solidFill>
-                <a:latin typeface="Inter"/>
-              </a:rPr>
-              <a:t>Current: 2.8 / 5.0  ➔  Target: 4.0 / 5.0 (Gap: +1.2)</a:t>
-            </a:r>
-          </a:p>
-          <a:p>
-            <a:r>
-              <a:rPr sz="819" b="1" i="0">
-                <a:solidFill>
-                  <a:srgbClr val="64748B"/>
-                </a:solidFill>
-                <a:latin typeface="Inter"/>
-              </a:rPr>
-              <a:t>Gap: Ambiguous IT/OT boundary ownership</a:t>
-            </a:r>
-          </a:p>
-          <a:p>
-            <a:r>
-              <a:rPr sz="819" b="1" i="0">
-                <a:solidFill>
-                  <a:srgbClr val="10B981"/>
-                </a:solidFill>
-                <a:latin typeface="Inter"/>
-              </a:rPr>
-              <a:t>Intervention: Formalize unified IT/OT operating charter</a:t>
+              <a:t>✓ Action: Formalize unified IT/OT operating charter</a:t>
             </a:r>
           </a:p>
         </p:txBody>
@@ -17139,6 +14797,51 @@
         </p:nvSpPr>
         <p:spPr>
           <a:xfrm>
+            <a:off x="0" y="0"/>
+            <a:ext cx="12191695" cy="6858000"/>
+          </a:xfrm>
+          <a:prstGeom prst="rect">
+            <a:avLst/>
+          </a:prstGeom>
+          <a:solidFill>
+            <a:srgbClr val="0A162C"/>
+          </a:solidFill>
+          <a:ln>
+            <a:noFill/>
+          </a:ln>
+        </p:spPr>
+        <p:style>
+          <a:lnRef idx="1">
+            <a:schemeClr val="accent1"/>
+          </a:lnRef>
+          <a:fillRef idx="3">
+            <a:schemeClr val="accent1"/>
+          </a:fillRef>
+          <a:effectRef idx="2">
+            <a:schemeClr val="accent1"/>
+          </a:effectRef>
+          <a:fontRef idx="minor">
+            <a:schemeClr val="lt1"/>
+          </a:fontRef>
+        </p:style>
+        <p:txBody>
+          <a:bodyPr rtlCol="0" anchor="ctr"/>
+          <a:lstStyle/>
+          <a:p>
+            <a:pPr algn="ctr">
+              <a:defRPr/>
+            </a:pPr>
+          </a:p>
+        </p:txBody>
+      </p:sp>
+      <p:sp>
+        <p:nvSpPr>
+          <p:cNvPr id="3" name="Rectangle 2"/>
+          <p:cNvSpPr/>
+          <p:nvPr/>
+        </p:nvSpPr>
+        <p:spPr>
+          <a:xfrm>
             <a:off x="731520" y="347472"/>
             <a:ext cx="2372868" cy="237744"/>
           </a:xfrm>
@@ -17192,7 +14895,7 @@
       </p:sp>
       <p:sp>
         <p:nvSpPr>
-          <p:cNvPr id="3" name="TextBox 2"/>
+          <p:cNvPr id="4" name="TextBox 3"/>
           <p:cNvSpPr txBox="1"/>
           <p:nvPr/>
         </p:nvSpPr>
@@ -17231,7 +14934,7 @@
       </p:sp>
       <p:sp>
         <p:nvSpPr>
-          <p:cNvPr id="4" name="TextBox 3"/>
+          <p:cNvPr id="5" name="TextBox 4"/>
           <p:cNvSpPr txBox="1"/>
           <p:nvPr/>
         </p:nvSpPr>
@@ -17270,7 +14973,7 @@
       </p:sp>
       <p:sp>
         <p:nvSpPr>
-          <p:cNvPr id="5" name="Rectangle 4"/>
+          <p:cNvPr id="6" name="Rectangle 5"/>
           <p:cNvSpPr/>
           <p:nvPr/>
         </p:nvSpPr>
@@ -17313,7 +15016,7 @@
       </p:sp>
       <p:sp>
         <p:nvSpPr>
-          <p:cNvPr id="6" name="TextBox 5"/>
+          <p:cNvPr id="7" name="TextBox 6"/>
           <p:cNvSpPr txBox="1"/>
           <p:nvPr/>
         </p:nvSpPr>
@@ -17347,7 +15050,7 @@
       </p:sp>
       <p:sp>
         <p:nvSpPr>
-          <p:cNvPr id="7" name="TextBox 6"/>
+          <p:cNvPr id="8" name="TextBox 7"/>
           <p:cNvSpPr txBox="1"/>
           <p:nvPr/>
         </p:nvSpPr>
@@ -17382,7 +15085,7 @@
       </p:sp>
       <p:sp>
         <p:nvSpPr>
-          <p:cNvPr id="8" name="Rounded Rectangle 7"/>
+          <p:cNvPr id="9" name="Rounded Rectangle 8"/>
           <p:cNvSpPr/>
           <p:nvPr/>
         </p:nvSpPr>
@@ -17427,7 +15130,7 @@
       </p:sp>
       <p:sp>
         <p:nvSpPr>
-          <p:cNvPr id="9" name="Rectangle 8"/>
+          <p:cNvPr id="10" name="Rectangle 9"/>
           <p:cNvSpPr/>
           <p:nvPr/>
         </p:nvSpPr>
@@ -17483,7 +15186,7 @@
       </p:sp>
       <p:sp>
         <p:nvSpPr>
-          <p:cNvPr id="10" name="Rounded Rectangle 9"/>
+          <p:cNvPr id="11" name="Rounded Rectangle 10"/>
           <p:cNvSpPr/>
           <p:nvPr/>
         </p:nvSpPr>
@@ -17528,7 +15231,7 @@
       </p:sp>
       <p:sp>
         <p:nvSpPr>
-          <p:cNvPr id="11" name="Rectangle 10"/>
+          <p:cNvPr id="12" name="Rectangle 11"/>
           <p:cNvSpPr/>
           <p:nvPr/>
         </p:nvSpPr>
@@ -17584,7 +15287,7 @@
       </p:sp>
       <p:sp>
         <p:nvSpPr>
-          <p:cNvPr id="12" name="TextBox 11"/>
+          <p:cNvPr id="13" name="TextBox 12"/>
           <p:cNvSpPr txBox="1"/>
           <p:nvPr/>
         </p:nvSpPr>
@@ -17634,7 +15337,7 @@
       </p:sp>
       <p:sp>
         <p:nvSpPr>
-          <p:cNvPr id="13" name="Right Arrow 12"/>
+          <p:cNvPr id="14" name="Right Arrow 13"/>
           <p:cNvSpPr/>
           <p:nvPr/>
         </p:nvSpPr>
@@ -17677,7 +15380,7 @@
       </p:sp>
       <p:sp>
         <p:nvSpPr>
-          <p:cNvPr id="14" name="Rounded Rectangle 13"/>
+          <p:cNvPr id="15" name="Rounded Rectangle 14"/>
           <p:cNvSpPr/>
           <p:nvPr/>
         </p:nvSpPr>
@@ -17722,7 +15425,7 @@
       </p:sp>
       <p:sp>
         <p:nvSpPr>
-          <p:cNvPr id="15" name="Rectangle 14"/>
+          <p:cNvPr id="16" name="Rectangle 15"/>
           <p:cNvSpPr/>
           <p:nvPr/>
         </p:nvSpPr>
@@ -17778,7 +15481,7 @@
       </p:sp>
       <p:sp>
         <p:nvSpPr>
-          <p:cNvPr id="16" name="TextBox 15"/>
+          <p:cNvPr id="17" name="TextBox 16"/>
           <p:cNvSpPr txBox="1"/>
           <p:nvPr/>
         </p:nvSpPr>
@@ -17828,7 +15531,7 @@
       </p:sp>
       <p:sp>
         <p:nvSpPr>
-          <p:cNvPr id="17" name="Right Arrow 16"/>
+          <p:cNvPr id="18" name="Right Arrow 17"/>
           <p:cNvSpPr/>
           <p:nvPr/>
         </p:nvSpPr>
@@ -17871,7 +15574,7 @@
       </p:sp>
       <p:sp>
         <p:nvSpPr>
-          <p:cNvPr id="18" name="Rounded Rectangle 17"/>
+          <p:cNvPr id="19" name="Rounded Rectangle 18"/>
           <p:cNvSpPr/>
           <p:nvPr/>
         </p:nvSpPr>
@@ -17916,7 +15619,7 @@
       </p:sp>
       <p:sp>
         <p:nvSpPr>
-          <p:cNvPr id="19" name="Rectangle 18"/>
+          <p:cNvPr id="20" name="Rectangle 19"/>
           <p:cNvSpPr/>
           <p:nvPr/>
         </p:nvSpPr>
@@ -17972,7 +15675,7 @@
       </p:sp>
       <p:sp>
         <p:nvSpPr>
-          <p:cNvPr id="20" name="TextBox 19"/>
+          <p:cNvPr id="21" name="TextBox 20"/>
           <p:cNvSpPr txBox="1"/>
           <p:nvPr/>
         </p:nvSpPr>
@@ -18022,7 +15725,7 @@
       </p:sp>
       <p:sp>
         <p:nvSpPr>
-          <p:cNvPr id="21" name="Down Arrow 20"/>
+          <p:cNvPr id="22" name="Down Arrow 21"/>
           <p:cNvSpPr/>
           <p:nvPr/>
         </p:nvSpPr>
@@ -18065,7 +15768,7 @@
       </p:sp>
       <p:sp>
         <p:nvSpPr>
-          <p:cNvPr id="22" name="Rounded Rectangle 21"/>
+          <p:cNvPr id="23" name="Rounded Rectangle 22"/>
           <p:cNvSpPr/>
           <p:nvPr/>
         </p:nvSpPr>
@@ -18110,7 +15813,7 @@
       </p:sp>
       <p:sp>
         <p:nvSpPr>
-          <p:cNvPr id="23" name="Rectangle 22"/>
+          <p:cNvPr id="24" name="Rectangle 23"/>
           <p:cNvSpPr/>
           <p:nvPr/>
         </p:nvSpPr>
@@ -18166,7 +15869,7 @@
       </p:sp>
       <p:sp>
         <p:nvSpPr>
-          <p:cNvPr id="24" name="TextBox 23"/>
+          <p:cNvPr id="25" name="TextBox 24"/>
           <p:cNvSpPr txBox="1"/>
           <p:nvPr/>
         </p:nvSpPr>
@@ -18216,7 +15919,7 @@
       </p:sp>
       <p:sp>
         <p:nvSpPr>
-          <p:cNvPr id="25" name="Left Arrow 24"/>
+          <p:cNvPr id="26" name="Left Arrow 25"/>
           <p:cNvSpPr/>
           <p:nvPr/>
         </p:nvSpPr>
@@ -18259,7 +15962,7 @@
       </p:sp>
       <p:sp>
         <p:nvSpPr>
-          <p:cNvPr id="26" name="Rounded Rectangle 25"/>
+          <p:cNvPr id="27" name="Rounded Rectangle 26"/>
           <p:cNvSpPr/>
           <p:nvPr/>
         </p:nvSpPr>
@@ -18304,7 +16007,7 @@
       </p:sp>
       <p:sp>
         <p:nvSpPr>
-          <p:cNvPr id="27" name="Rectangle 26"/>
+          <p:cNvPr id="28" name="Rectangle 27"/>
           <p:cNvSpPr/>
           <p:nvPr/>
         </p:nvSpPr>
@@ -18360,7 +16063,7 @@
       </p:sp>
       <p:sp>
         <p:nvSpPr>
-          <p:cNvPr id="28" name="TextBox 27"/>
+          <p:cNvPr id="29" name="TextBox 28"/>
           <p:cNvSpPr txBox="1"/>
           <p:nvPr/>
         </p:nvSpPr>
@@ -18410,7 +16113,7 @@
       </p:sp>
       <p:sp>
         <p:nvSpPr>
-          <p:cNvPr id="29" name="Left Arrow 28"/>
+          <p:cNvPr id="30" name="Left Arrow 29"/>
           <p:cNvSpPr/>
           <p:nvPr/>
         </p:nvSpPr>
@@ -18453,7 +16156,7 @@
       </p:sp>
       <p:sp>
         <p:nvSpPr>
-          <p:cNvPr id="30" name="Rounded Rectangle 29"/>
+          <p:cNvPr id="31" name="Rounded Rectangle 30"/>
           <p:cNvSpPr/>
           <p:nvPr/>
         </p:nvSpPr>
@@ -18498,7 +16201,7 @@
       </p:sp>
       <p:sp>
         <p:nvSpPr>
-          <p:cNvPr id="31" name="Rectangle 30"/>
+          <p:cNvPr id="32" name="Rectangle 31"/>
           <p:cNvSpPr/>
           <p:nvPr/>
         </p:nvSpPr>
@@ -18554,7 +16257,7 @@
       </p:sp>
       <p:sp>
         <p:nvSpPr>
-          <p:cNvPr id="32" name="TextBox 31"/>
+          <p:cNvPr id="33" name="TextBox 32"/>
           <p:cNvSpPr txBox="1"/>
           <p:nvPr/>
         </p:nvSpPr>
@@ -18604,7 +16307,7 @@
       </p:sp>
       <p:sp>
         <p:nvSpPr>
-          <p:cNvPr id="33" name="Up Arrow 32"/>
+          <p:cNvPr id="34" name="Up Arrow 33"/>
           <p:cNvSpPr/>
           <p:nvPr/>
         </p:nvSpPr>
@@ -18647,7 +16350,7 @@
       </p:sp>
       <p:sp>
         <p:nvSpPr>
-          <p:cNvPr id="34" name="Rounded Rectangle 33"/>
+          <p:cNvPr id="35" name="Rounded Rectangle 34"/>
           <p:cNvSpPr/>
           <p:nvPr/>
         </p:nvSpPr>
@@ -20371,324 +18074,4 @@
   </a:objectDefaults>
   <a:extraClrSchemeLst/>
 </a:theme>
-</file>
-
-<file path=ppt/theme/theme1.xml><?xml version="1.0" encoding="utf-8"?>
-<a:theme xmlns:a="http://schemas.openxmlformats.org/drawingml/2006/main" name="Office Theme">
-  <a:themeElements>
-    <a:clrScheme name="Office">
-      <a:dk1>
-        <a:sysClr val="windowText" lastClr="000000"/>
-      </a:dk1>
-      <a:lt1>
-        <a:sysClr val="window" lastClr="FFFFFF"/>
-      </a:lt1>
-      <a:dk2>
-        <a:srgbClr val="1F497D"/>
-      </a:dk2>
-      <a:lt2>
-        <a:srgbClr val="EEECE1"/>
-      </a:lt2>
-      <a:accent1>
-        <a:srgbClr val="4F81BD"/>
-      </a:accent1>
-      <a:accent2>
-        <a:srgbClr val="C0504D"/>
-      </a:accent2>
-      <a:accent3>
-        <a:srgbClr val="9BBB59"/>
-      </a:accent3>
-      <a:accent4>
-        <a:srgbClr val="8064A2"/>
-      </a:accent4>
-      <a:accent5>
-        <a:srgbClr val="4BACC6"/>
-      </a:accent5>
-      <a:accent6>
-        <a:srgbClr val="F79646"/>
-      </a:accent6>
-      <a:hlink>
-        <a:srgbClr val="0000FF"/>
-      </a:hlink>
-      <a:folHlink>
-        <a:srgbClr val="800080"/>
-      </a:folHlink>
-    </a:clrScheme>
-    <a:fontScheme name="Office">
-      <a:majorFont>
-        <a:latin typeface="Calibri"/>
-        <a:ea typeface=""/>
-        <a:cs typeface=""/>
-        <a:font script="Jpan" typeface="ＭＳ Ｐゴシック"/>
-        <a:font script="Hang" typeface="맑은 고딕"/>
-        <a:font script="Hans" typeface="宋体"/>
-        <a:font script="Hant" typeface="新細明體"/>
-        <a:font script="Arab" typeface="Times New Roman"/>
-        <a:font script="Hebr" typeface="Times New Roman"/>
-        <a:font script="Thai" typeface="Angsana New"/>
-        <a:font script="Ethi" typeface="Nyala"/>
-        <a:font script="Beng" typeface="Vrinda"/>
-        <a:font script="Gujr" typeface="Shruti"/>
-        <a:font script="Khmr" typeface="MoolBoran"/>
-        <a:font script="Knda" typeface="Tunga"/>
-        <a:font script="Guru" typeface="Raavi"/>
-        <a:font script="Cans" typeface="Euphemia"/>
-        <a:font script="Cher" typeface="Plantagenet Cherokee"/>
-        <a:font script="Yiii" typeface="Microsoft Yi Baiti"/>
-        <a:font script="Tibt" typeface="Microsoft Himalaya"/>
-        <a:font script="Thaa" typeface="MV Boli"/>
-        <a:font script="Deva" typeface="Mangal"/>
-        <a:font script="Telu" typeface="Gautami"/>
-        <a:font script="Taml" typeface="Latha"/>
-        <a:font script="Syrc" typeface="Estrangelo Edessa"/>
-        <a:font script="Orya" typeface="Kalinga"/>
-        <a:font script="Mlym" typeface="Kartika"/>
-        <a:font script="Laoo" typeface="DokChampa"/>
-        <a:font script="Sinh" typeface="Iskoola Pota"/>
-        <a:font script="Mong" typeface="Mongolian Baiti"/>
-        <a:font script="Viet" typeface="Times New Roman"/>
-        <a:font script="Uigh" typeface="Microsoft Uighur"/>
-        <a:font script="Geor" typeface="Sylfaen"/>
-      </a:majorFont>
-      <a:minorFont>
-        <a:latin typeface="Calibri"/>
-        <a:ea typeface=""/>
-        <a:cs typeface=""/>
-        <a:font script="Jpan" typeface="ＭＳ Ｐゴシック"/>
-        <a:font script="Hang" typeface="맑은 고딕"/>
-        <a:font script="Hans" typeface="宋体"/>
-        <a:font script="Hant" typeface="新細明體"/>
-        <a:font script="Arab" typeface="Arial"/>
-        <a:font script="Hebr" typeface="Arial"/>
-        <a:font script="Thai" typeface="Cordia New"/>
-        <a:font script="Ethi" typeface="Nyala"/>
-        <a:font script="Beng" typeface="Vrinda"/>
-        <a:font script="Gujr" typeface="Shruti"/>
-        <a:font script="Khmr" typeface="DaunPenh"/>
-        <a:font script="Knda" typeface="Tunga"/>
-        <a:font script="Guru" typeface="Raavi"/>
-        <a:font script="Cans" typeface="Euphemia"/>
-        <a:font script="Cher" typeface="Plantagenet Cherokee"/>
-        <a:font script="Yiii" typeface="Microsoft Yi Baiti"/>
-        <a:font script="Tibt" typeface="Microsoft Himalaya"/>
-        <a:font script="Thaa" typeface="MV Boli"/>
-        <a:font script="Deva" typeface="Mangal"/>
-        <a:font script="Telu" typeface="Gautami"/>
-        <a:font script="Taml" typeface="Latha"/>
-        <a:font script="Syrc" typeface="Estrangelo Edessa"/>
-        <a:font script="Orya" typeface="Kalinga"/>
-        <a:font script="Mlym" typeface="Kartika"/>
-        <a:font script="Laoo" typeface="DokChampa"/>
-        <a:font script="Sinh" typeface="Iskoola Pota"/>
-        <a:font script="Mong" typeface="Mongolian Baiti"/>
-        <a:font script="Viet" typeface="Arial"/>
-        <a:font script="Uigh" typeface="Microsoft Uighur"/>
-        <a:font script="Geor" typeface="Sylfaen"/>
-      </a:minorFont>
-    </a:fontScheme>
-    <a:fmtScheme name="Office">
-      <a:fillStyleLst>
-        <a:solidFill>
-          <a:schemeClr val="phClr"/>
-        </a:solidFill>
-        <a:gradFill rotWithShape="1">
-          <a:gsLst>
-            <a:gs pos="0">
-              <a:schemeClr val="phClr">
-                <a:tint val="50000"/>
-                <a:satMod val="300000"/>
-              </a:schemeClr>
-            </a:gs>
-            <a:gs pos="35000">
-              <a:schemeClr val="phClr">
-                <a:tint val="37000"/>
-                <a:satMod val="300000"/>
-              </a:schemeClr>
-            </a:gs>
-            <a:gs pos="100000">
-              <a:schemeClr val="phClr">
-                <a:tint val="15000"/>
-                <a:satMod val="350000"/>
-              </a:schemeClr>
-            </a:gs>
-          </a:gsLst>
-          <a:lin ang="16200000" scaled="1"/>
-        </a:gradFill>
-        <a:gradFill rotWithShape="1">
-          <a:gsLst>
-            <a:gs pos="0">
-              <a:schemeClr val="phClr">
-                <a:tint val="100000"/>
-                <a:shade val="100000"/>
-                <a:satMod val="130000"/>
-              </a:schemeClr>
-            </a:gs>
-            <a:gs pos="100000">
-              <a:schemeClr val="phClr">
-                <a:tint val="50000"/>
-                <a:shade val="100000"/>
-                <a:satMod val="350000"/>
-              </a:schemeClr>
-            </a:gs>
-          </a:gsLst>
-          <a:lin ang="16200000" scaled="0"/>
-        </a:gradFill>
-      </a:fillStyleLst>
-      <a:lnStyleLst>
-        <a:ln w="9525" cap="flat" cmpd="sng" algn="ctr">
-          <a:solidFill>
-            <a:schemeClr val="phClr">
-              <a:shade val="95000"/>
-              <a:satMod val="105000"/>
-            </a:schemeClr>
-          </a:solidFill>
-          <a:prstDash val="solid"/>
-        </a:ln>
-        <a:ln w="25400" cap="flat" cmpd="sng" algn="ctr">
-          <a:solidFill>
-            <a:schemeClr val="phClr"/>
-          </a:solidFill>
-          <a:prstDash val="solid"/>
-        </a:ln>
-        <a:ln w="38100" cap="flat" cmpd="sng" algn="ctr">
-          <a:solidFill>
-            <a:schemeClr val="phClr"/>
-          </a:solidFill>
-          <a:prstDash val="solid"/>
-        </a:ln>
-      </a:lnStyleLst>
-      <a:effectStyleLst>
-        <a:effectStyle>
-          <a:effectLst>
-            <a:outerShdw blurRad="40000" dist="20000" dir="5400000" rotWithShape="0">
-              <a:srgbClr val="000000">
-                <a:alpha val="38000"/>
-              </a:srgbClr>
-            </a:outerShdw>
-          </a:effectLst>
-        </a:effectStyle>
-        <a:effectStyle>
-          <a:effectLst>
-            <a:outerShdw blurRad="40000" dist="23000" dir="5400000" rotWithShape="0">
-              <a:srgbClr val="000000">
-                <a:alpha val="35000"/>
-              </a:srgbClr>
-            </a:outerShdw>
-          </a:effectLst>
-        </a:effectStyle>
-        <a:effectStyle>
-          <a:effectLst>
-            <a:outerShdw blurRad="40000" dist="23000" dir="5400000" rotWithShape="0">
-              <a:srgbClr val="000000">
-                <a:alpha val="35000"/>
-              </a:srgbClr>
-            </a:outerShdw>
-          </a:effectLst>
-          <a:scene3d>
-            <a:camera prst="orthographicFront">
-              <a:rot lat="0" lon="0" rev="0"/>
-            </a:camera>
-            <a:lightRig rig="threePt" dir="t">
-              <a:rot lat="0" lon="0" rev="1200000"/>
-            </a:lightRig>
-          </a:scene3d>
-          <a:sp3d>
-            <a:bevelT w="63500" h="25400"/>
-          </a:sp3d>
-        </a:effectStyle>
-      </a:effectStyleLst>
-      <a:bgFillStyleLst>
-        <a:solidFill>
-          <a:schemeClr val="phClr"/>
-        </a:solidFill>
-        <a:gradFill rotWithShape="1">
-          <a:gsLst>
-            <a:gs pos="0">
-              <a:schemeClr val="phClr">
-                <a:tint val="40000"/>
-                <a:satMod val="350000"/>
-              </a:schemeClr>
-            </a:gs>
-            <a:gs pos="40000">
-              <a:schemeClr val="phClr">
-                <a:tint val="45000"/>
-                <a:shade val="99000"/>
-                <a:satMod val="350000"/>
-              </a:schemeClr>
-            </a:gs>
-            <a:gs pos="100000">
-              <a:schemeClr val="phClr">
-                <a:shade val="20000"/>
-                <a:satMod val="255000"/>
-              </a:schemeClr>
-            </a:gs>
-          </a:gsLst>
-          <a:path path="circle">
-            <a:fillToRect l="50000" t="-80000" r="50000" b="180000"/>
-          </a:path>
-        </a:gradFill>
-        <a:gradFill rotWithShape="1">
-          <a:gsLst>
-            <a:gs pos="0">
-              <a:schemeClr val="phClr">
-                <a:tint val="80000"/>
-                <a:satMod val="300000"/>
-              </a:schemeClr>
-            </a:gs>
-            <a:gs pos="100000">
-              <a:schemeClr val="phClr">
-                <a:shade val="30000"/>
-                <a:satMod val="200000"/>
-              </a:schemeClr>
-            </a:gs>
-          </a:gsLst>
-          <a:path path="circle">
-            <a:fillToRect l="50000" t="50000" r="50000" b="50000"/>
-          </a:path>
-        </a:gradFill>
-      </a:bgFillStyleLst>
-    </a:fmtScheme>
-  </a:themeElements>
-  <a:objectDefaults>
-    <a:spDef>
-      <a:spPr/>
-      <a:bodyPr/>
-      <a:lstStyle/>
-      <a:style>
-        <a:lnRef idx="1">
-          <a:schemeClr val="accent1"/>
-        </a:lnRef>
-        <a:fillRef idx="3">
-          <a:schemeClr val="accent1"/>
-        </a:fillRef>
-        <a:effectRef idx="2">
-          <a:schemeClr val="accent1"/>
-        </a:effectRef>
-        <a:fontRef idx="minor">
-          <a:schemeClr val="lt1"/>
-        </a:fontRef>
-      </a:style>
-    </a:spDef>
-    <a:lnDef>
-      <a:spPr/>
-      <a:bodyPr/>
-      <a:lstStyle/>
-      <a:style>
-        <a:lnRef idx="2">
-          <a:schemeClr val="accent1"/>
-        </a:lnRef>
-        <a:fillRef idx="0">
-          <a:schemeClr val="accent1"/>
-        </a:fillRef>
-        <a:effectRef idx="1">
-          <a:schemeClr val="accent1"/>
-        </a:effectRef>
-        <a:fontRef idx="minor">
-          <a:schemeClr val="tx1"/>
-        </a:fontRef>
-      </a:style>
-    </a:lnDef>
-  </a:objectDefaults>
-  <a:extraClrSchemeLst/>
-</a:theme>
 </file>